--- a/apresentacao_executiva.pptx
+++ b/apresentacao_executiva.pptx
@@ -4577,7 +4577,7 @@
                 </a:solidFill>
                 <a:latin typeface="Calibri"/>
               </a:rPr>
-              <a:t>O gap residual de 5,4% é real
+              <a:t>O gap residual de 6,2% é real
 e mensurável — e deve ser eliminado</a:t>
             </a:r>
           </a:p>
@@ -7377,7 +7377,7 @@
                 </a:solidFill>
                 <a:latin typeface="Calibri"/>
               </a:rPr>
-              <a:t>Após controlar todas as características observáveis, negros ainda recebem 5,4% menos na mesma função. No topo salarial esse gap chega a 12%.</a:t>
+              <a:t>Após controlar todas as características observáveis, negros ainda recebem 6,2% menos na mesma função. No topo salarial esse gap chega a 12%.</a:t>
             </a:r>
           </a:p>
         </p:txBody>

--- a/apresentacao_executiva.pptx
+++ b/apresentacao_executiva.pptx
@@ -17,6 +17,7 @@
     <p:sldId id="265" r:id="rId16"/>
     <p:sldId id="266" r:id="rId17"/>
     <p:sldId id="267" r:id="rId18"/>
+    <p:sldId id="268" r:id="rId19"/>
   </p:sldIdLst>
   <p:sldSz cx="12188952" cy="6858000" type="screen4x3"/>
   <p:notesSz cx="6858000" cy="9144000"/>
@@ -3483,7 +3484,7 @@
                 </a:solidFill>
                 <a:latin typeface="Calibri"/>
               </a:rPr>
-              <a:t>25%</a:t>
+              <a:t>31%</a:t>
             </a:r>
           </a:p>
         </p:txBody>
@@ -3915,7 +3916,7 @@
                 </a:solidFill>
                 <a:latin typeface="Calibri"/>
               </a:rPr>
-              <a:t>O Que Funciona — Três Eixos de Ação</a:t>
+              <a:t>O Racismo Tem Endereço — Varia Muito Entre Estados</a:t>
             </a:r>
           </a:p>
         </p:txBody>
@@ -3950,21 +3951,80 @@
                 </a:solidFill>
                 <a:latin typeface="Calibri"/>
               </a:rPr>
-              <a:t>Nenhum eixo isolado resolve. Os três precisam atuar simultaneamente.</a:t>
-            </a:r>
-          </a:p>
-        </p:txBody>
-      </p:sp>
-      <p:sp>
-        <p:nvSpPr>
-          <p:cNvPr id="5" name="Rectangle 4"/>
+              <a:t>A desvantagem racial é bem maior em alguns estados — e a política pode (e deve) focar onde mais dói</a:t>
+            </a:r>
+          </a:p>
+        </p:txBody>
+      </p:sp>
+      <p:sp>
+        <p:nvSpPr>
+          <p:cNvPr id="5" name="TextBox 4"/>
+          <p:cNvSpPr txBox="1"/>
+          <p:nvPr/>
+        </p:nvSpPr>
+        <p:spPr>
+          <a:xfrm>
+            <a:off x="365760" y="1051560"/>
+            <a:ext cx="11430000" cy="365760"/>
+          </a:xfrm>
+          <a:prstGeom prst="rect">
+            <a:avLst/>
+          </a:prstGeom>
+          <a:noFill/>
+        </p:spPr>
+        <p:txBody>
+          <a:bodyPr wrap="square">
+            <a:spAutoFit/>
+          </a:bodyPr>
+          <a:lstStyle/>
+          <a:p>
+            <a:pPr algn="l"/>
+            <a:r>
+              <a:rPr sz="1600" b="1" i="0">
+                <a:solidFill>
+                  <a:srgbClr val="1B2A4A"/>
+                </a:solidFill>
+                <a:latin typeface="Calibri"/>
+              </a:rPr>
+              <a:t>A mesma injustiça, em tamanhos muito diferentes pelo país:</a:t>
+            </a:r>
+          </a:p>
+        </p:txBody>
+      </p:sp>
+      <p:pic>
+        <p:nvPicPr>
+          <p:cNvPr id="6" name="Picture 5" descr="mapa_po_regional.png"/>
+          <p:cNvPicPr>
+            <a:picLocks noChangeAspect="1"/>
+          </p:cNvPicPr>
+          <p:nvPr/>
+        </p:nvPicPr>
+        <p:blipFill>
+          <a:blip r:embed="rId2"/>
+          <a:stretch>
+            <a:fillRect/>
+          </a:stretch>
+        </p:blipFill>
+        <p:spPr>
+          <a:xfrm>
+            <a:off x="457200" y="1417320"/>
+            <a:ext cx="3931920" cy="4397826"/>
+          </a:xfrm>
+          <a:prstGeom prst="rect">
+            <a:avLst/>
+          </a:prstGeom>
+        </p:spPr>
+      </p:pic>
+      <p:sp>
+        <p:nvSpPr>
+          <p:cNvPr id="7" name="Rectangle 6"/>
           <p:cNvSpPr/>
           <p:nvPr/>
         </p:nvSpPr>
         <p:spPr>
           <a:xfrm>
-            <a:off x="274320" y="1097280"/>
-            <a:ext cx="3749039" cy="5349240"/>
+            <a:off x="4937760" y="1417320"/>
+            <a:ext cx="6949440" cy="1371600"/>
           </a:xfrm>
           <a:prstGeom prst="rect">
             <a:avLst/>
@@ -4002,14 +4062,14 @@
       </p:sp>
       <p:sp>
         <p:nvSpPr>
-          <p:cNvPr id="6" name="Rectangle 5"/>
+          <p:cNvPr id="8" name="Rectangle 7"/>
           <p:cNvSpPr/>
           <p:nvPr/>
         </p:nvSpPr>
         <p:spPr>
           <a:xfrm>
-            <a:off x="274320" y="1097280"/>
-            <a:ext cx="3749039" cy="502920"/>
+            <a:off x="4937760" y="1417320"/>
+            <a:ext cx="128016" cy="1371600"/>
           </a:xfrm>
           <a:prstGeom prst="rect">
             <a:avLst/>
@@ -4043,14 +4103,14 @@
       </p:sp>
       <p:sp>
         <p:nvSpPr>
-          <p:cNvPr id="7" name="TextBox 6"/>
-          <p:cNvSpPr txBox="1"/>
-          <p:nvPr/>
-        </p:nvSpPr>
-        <p:spPr>
-          <a:xfrm>
-            <a:off x="384048" y="1124712"/>
-            <a:ext cx="3529584" cy="457200"/>
+          <p:cNvPr id="9" name="TextBox 8"/>
+          <p:cNvSpPr txBox="1"/>
+          <p:nvPr/>
+        </p:nvSpPr>
+        <p:spPr>
+          <a:xfrm>
+            <a:off x="5138928" y="1481328"/>
+            <a:ext cx="6675120" cy="365760"/>
           </a:xfrm>
           <a:prstGeom prst="rect">
             <a:avLst/>
@@ -4065,27 +4125,27 @@
           <a:p>
             <a:pPr algn="l"/>
             <a:r>
-              <a:rPr sz="1500" b="1" i="0">
-                <a:solidFill>
-                  <a:srgbClr val="FFFFFF"/>
-                </a:solidFill>
-                <a:latin typeface="Calibri"/>
-              </a:rPr>
-              <a:t>Abrir as Portas</a:t>
-            </a:r>
-          </a:p>
-        </p:txBody>
-      </p:sp>
-      <p:sp>
-        <p:nvSpPr>
-          <p:cNvPr id="8" name="TextBox 7"/>
-          <p:cNvSpPr txBox="1"/>
-          <p:nvPr/>
-        </p:nvSpPr>
-        <p:spPr>
-          <a:xfrm>
-            <a:off x="457200" y="1691640"/>
-            <a:ext cx="3383280" cy="1097280"/>
+              <a:rPr sz="1350" b="1" i="0">
+                <a:solidFill>
+                  <a:srgbClr val="C62828"/>
+                </a:solidFill>
+                <a:latin typeface="Calibri"/>
+              </a:rPr>
+              <a:t>O gap muda de estado para estado</a:t>
+            </a:r>
+          </a:p>
+        </p:txBody>
+      </p:sp>
+      <p:sp>
+        <p:nvSpPr>
+          <p:cNvPr id="10" name="TextBox 9"/>
+          <p:cNvSpPr txBox="1"/>
+          <p:nvPr/>
+        </p:nvSpPr>
+        <p:spPr>
+          <a:xfrm>
+            <a:off x="5138928" y="1892808"/>
+            <a:ext cx="6675120" cy="841248"/>
           </a:xfrm>
           <a:prstGeom prst="rect">
             <a:avLst/>
@@ -4106,31 +4166,33 @@
                 </a:solidFill>
                 <a:latin typeface="Calibri"/>
               </a:rPr>
-              <a:t>Ação 1:
-Cotas de acesso a cargos
-qualificados (meta: IR ≥ 0,80)</a:t>
-            </a:r>
-          </a:p>
-        </p:txBody>
-      </p:sp>
-      <p:sp>
-        <p:nvSpPr>
-          <p:cNvPr id="9" name="Rectangle 8"/>
+              <a:t>Chega a ~21% (DF) em alguns estados e cai a ~1% (MG) em outros. Não é o mesmo problema em todo lugar.</a:t>
+            </a:r>
+          </a:p>
+        </p:txBody>
+      </p:sp>
+      <p:sp>
+        <p:nvSpPr>
+          <p:cNvPr id="11" name="Rectangle 10"/>
           <p:cNvSpPr/>
           <p:nvPr/>
         </p:nvSpPr>
         <p:spPr>
           <a:xfrm>
-            <a:off x="457200" y="2834640"/>
-            <a:ext cx="3383280" cy="18288"/>
+            <a:off x="4937760" y="2898648"/>
+            <a:ext cx="6949440" cy="1371600"/>
           </a:xfrm>
           <a:prstGeom prst="rect">
             <a:avLst/>
           </a:prstGeom>
           <a:solidFill>
-            <a:srgbClr val="C62828"/>
+            <a:srgbClr val="F5F5F5"/>
           </a:solidFill>
-          <a:ln/>
+          <a:ln w="25400">
+            <a:solidFill>
+              <a:srgbClr val="FF8F00"/>
+            </a:solidFill>
+          </a:ln>
         </p:spPr>
         <p:style>
           <a:lnRef idx="1">
@@ -4156,58 +4218,20 @@
       </p:sp>
       <p:sp>
         <p:nvSpPr>
-          <p:cNvPr id="10" name="TextBox 9"/>
-          <p:cNvSpPr txBox="1"/>
-          <p:nvPr/>
-        </p:nvSpPr>
-        <p:spPr>
-          <a:xfrm>
-            <a:off x="457200" y="2926080"/>
-            <a:ext cx="3383280" cy="1097280"/>
-          </a:xfrm>
-          <a:prstGeom prst="rect">
-            <a:avLst/>
-          </a:prstGeom>
-          <a:noFill/>
-        </p:spPr>
-        <p:txBody>
-          <a:bodyPr wrap="square">
-            <a:spAutoFit/>
-          </a:bodyPr>
-          <a:lstStyle/>
-          <a:p>
-            <a:pPr algn="l"/>
-            <a:r>
-              <a:rPr sz="1200" b="0" i="0">
-                <a:solidFill>
-                  <a:srgbClr val="212121"/>
-                </a:solidFill>
-                <a:latin typeface="Calibri"/>
-              </a:rPr>
-              <a:t>Ação 2:
-Formação profissional com
-recorte racial e bolsas de
-residência em empresas premium</a:t>
-            </a:r>
-          </a:p>
-        </p:txBody>
-      </p:sp>
-      <p:sp>
-        <p:nvSpPr>
-          <p:cNvPr id="11" name="Rectangle 10"/>
+          <p:cNvPr id="12" name="Rectangle 11"/>
           <p:cNvSpPr/>
           <p:nvPr/>
         </p:nvSpPr>
         <p:spPr>
           <a:xfrm>
-            <a:off x="365760" y="4114800"/>
-            <a:ext cx="3566160" cy="18288"/>
+            <a:off x="4937760" y="2898648"/>
+            <a:ext cx="128016" cy="1371600"/>
           </a:xfrm>
           <a:prstGeom prst="rect">
             <a:avLst/>
           </a:prstGeom>
           <a:solidFill>
-            <a:srgbClr val="C62828"/>
+            <a:srgbClr val="FF8F00"/>
           </a:solidFill>
           <a:ln/>
         </p:spPr>
@@ -4235,14 +4259,14 @@
       </p:sp>
       <p:sp>
         <p:nvSpPr>
-          <p:cNvPr id="12" name="TextBox 11"/>
-          <p:cNvSpPr txBox="1"/>
-          <p:nvPr/>
-        </p:nvSpPr>
-        <p:spPr>
-          <a:xfrm>
-            <a:off x="411480" y="4206240"/>
-            <a:ext cx="3474720" cy="640080"/>
+          <p:cNvPr id="13" name="TextBox 12"/>
+          <p:cNvSpPr txBox="1"/>
+          <p:nvPr/>
+        </p:nvSpPr>
+        <p:spPr>
+          <a:xfrm>
+            <a:off x="5138928" y="2962656"/>
+            <a:ext cx="6675120" cy="365760"/>
           </a:xfrm>
           <a:prstGeom prst="rect">
             <a:avLst/>
@@ -4257,342 +4281,62 @@
           <a:p>
             <a:pPr algn="l"/>
             <a:r>
-              <a:rPr sz="1100" b="1" i="1">
-                <a:solidFill>
-                  <a:srgbClr val="C62828"/>
-                </a:solidFill>
-                <a:latin typeface="Calibri"/>
-              </a:rPr>
-              <a:t>Atacar onde os dados apontam:
-barreiras de ACESSO, não só salário</a:t>
-            </a:r>
-          </a:p>
-        </p:txBody>
-      </p:sp>
-      <p:sp>
-        <p:nvSpPr>
-          <p:cNvPr id="13" name="Rectangle 12"/>
+              <a:rPr sz="1350" b="1" i="0">
+                <a:solidFill>
+                  <a:srgbClr val="FF8F00"/>
+                </a:solidFill>
+                <a:latin typeface="Calibri"/>
+              </a:rPr>
+              <a:t>Maior onde há mais riqueza</a:t>
+            </a:r>
+          </a:p>
+        </p:txBody>
+      </p:sp>
+      <p:sp>
+        <p:nvSpPr>
+          <p:cNvPr id="14" name="TextBox 13"/>
+          <p:cNvSpPr txBox="1"/>
+          <p:nvPr/>
+        </p:nvSpPr>
+        <p:spPr>
+          <a:xfrm>
+            <a:off x="5138928" y="3374136"/>
+            <a:ext cx="6675120" cy="841248"/>
+          </a:xfrm>
+          <a:prstGeom prst="rect">
+            <a:avLst/>
+          </a:prstGeom>
+          <a:noFill/>
+        </p:spPr>
+        <p:txBody>
+          <a:bodyPr wrap="square">
+            <a:spAutoFit/>
+          </a:bodyPr>
+          <a:lstStyle/>
+          <a:p>
+            <a:pPr algn="l"/>
+            <a:r>
+              <a:rPr sz="1200" b="0" i="0">
+                <a:solidFill>
+                  <a:srgbClr val="212121"/>
+                </a:solidFill>
+                <a:latin typeface="Calibri"/>
+              </a:rPr>
+              <a:t>As maiores desvantagens aparecem no Distrito Federal, no Rio e em São Paulo — crescimento econômico, sozinho, não dissolve a barreira racial.</a:t>
+            </a:r>
+          </a:p>
+        </p:txBody>
+      </p:sp>
+      <p:sp>
+        <p:nvSpPr>
+          <p:cNvPr id="15" name="Rectangle 14"/>
           <p:cNvSpPr/>
           <p:nvPr/>
         </p:nvSpPr>
         <p:spPr>
           <a:xfrm>
-            <a:off x="4251959" y="1097280"/>
-            <a:ext cx="3749039" cy="5349240"/>
-          </a:xfrm>
-          <a:prstGeom prst="rect">
-            <a:avLst/>
-          </a:prstGeom>
-          <a:solidFill>
-            <a:srgbClr val="F5F5F5"/>
-          </a:solidFill>
-          <a:ln w="25400">
-            <a:solidFill>
-              <a:srgbClr val="1565C0"/>
-            </a:solidFill>
-          </a:ln>
-        </p:spPr>
-        <p:style>
-          <a:lnRef idx="1">
-            <a:schemeClr val="accent1"/>
-          </a:lnRef>
-          <a:fillRef idx="3">
-            <a:schemeClr val="accent1"/>
-          </a:fillRef>
-          <a:effectRef idx="2">
-            <a:schemeClr val="accent1"/>
-          </a:effectRef>
-          <a:fontRef idx="minor">
-            <a:schemeClr val="lt1"/>
-          </a:fontRef>
-        </p:style>
-        <p:txBody>
-          <a:bodyPr rtlCol="0" anchor="ctr"/>
-          <a:lstStyle/>
-          <a:p>
-            <a:pPr algn="ctr"/>
-          </a:p>
-        </p:txBody>
-      </p:sp>
-      <p:sp>
-        <p:nvSpPr>
-          <p:cNvPr id="14" name="Rectangle 13"/>
-          <p:cNvSpPr/>
-          <p:nvPr/>
-        </p:nvSpPr>
-        <p:spPr>
-          <a:xfrm>
-            <a:off x="4251959" y="1097280"/>
-            <a:ext cx="3749039" cy="502920"/>
-          </a:xfrm>
-          <a:prstGeom prst="rect">
-            <a:avLst/>
-          </a:prstGeom>
-          <a:solidFill>
-            <a:srgbClr val="1565C0"/>
-          </a:solidFill>
-          <a:ln/>
-        </p:spPr>
-        <p:style>
-          <a:lnRef idx="1">
-            <a:schemeClr val="accent1"/>
-          </a:lnRef>
-          <a:fillRef idx="3">
-            <a:schemeClr val="accent1"/>
-          </a:fillRef>
-          <a:effectRef idx="2">
-            <a:schemeClr val="accent1"/>
-          </a:effectRef>
-          <a:fontRef idx="minor">
-            <a:schemeClr val="lt1"/>
-          </a:fontRef>
-        </p:style>
-        <p:txBody>
-          <a:bodyPr rtlCol="0" anchor="ctr"/>
-          <a:lstStyle/>
-          <a:p>
-            <a:pPr algn="ctr"/>
-          </a:p>
-        </p:txBody>
-      </p:sp>
-      <p:sp>
-        <p:nvSpPr>
-          <p:cNvPr id="15" name="TextBox 14"/>
-          <p:cNvSpPr txBox="1"/>
-          <p:nvPr/>
-        </p:nvSpPr>
-        <p:spPr>
-          <a:xfrm>
-            <a:off x="4361687" y="1124712"/>
-            <a:ext cx="3529584" cy="457200"/>
-          </a:xfrm>
-          <a:prstGeom prst="rect">
-            <a:avLst/>
-          </a:prstGeom>
-          <a:noFill/>
-        </p:spPr>
-        <p:txBody>
-          <a:bodyPr wrap="square">
-            <a:spAutoFit/>
-          </a:bodyPr>
-          <a:lstStyle/>
-          <a:p>
-            <a:pPr algn="l"/>
-            <a:r>
-              <a:rPr sz="1500" b="1" i="0">
-                <a:solidFill>
-                  <a:srgbClr val="FFFFFF"/>
-                </a:solidFill>
-                <a:latin typeface="Calibri"/>
-              </a:rPr>
-              <a:t>Pagar Igual</a:t>
-            </a:r>
-          </a:p>
-        </p:txBody>
-      </p:sp>
-      <p:sp>
-        <p:nvSpPr>
-          <p:cNvPr id="16" name="TextBox 15"/>
-          <p:cNvSpPr txBox="1"/>
-          <p:nvPr/>
-        </p:nvSpPr>
-        <p:spPr>
-          <a:xfrm>
-            <a:off x="4434839" y="1691640"/>
-            <a:ext cx="3383280" cy="1097280"/>
-          </a:xfrm>
-          <a:prstGeom prst="rect">
-            <a:avLst/>
-          </a:prstGeom>
-          <a:noFill/>
-        </p:spPr>
-        <p:txBody>
-          <a:bodyPr wrap="square">
-            <a:spAutoFit/>
-          </a:bodyPr>
-          <a:lstStyle/>
-          <a:p>
-            <a:pPr algn="l"/>
-            <a:r>
-              <a:rPr sz="1200" b="0" i="0">
-                <a:solidFill>
-                  <a:srgbClr val="212121"/>
-                </a:solidFill>
-                <a:latin typeface="Calibri"/>
-              </a:rPr>
-              <a:t>Ação 1:
-Transparência salarial por raça
-obrigatória (empresas &gt; 100 fun.)</a:t>
-            </a:r>
-          </a:p>
-        </p:txBody>
-      </p:sp>
-      <p:sp>
-        <p:nvSpPr>
-          <p:cNvPr id="17" name="Rectangle 16"/>
-          <p:cNvSpPr/>
-          <p:nvPr/>
-        </p:nvSpPr>
-        <p:spPr>
-          <a:xfrm>
-            <a:off x="4434839" y="2834640"/>
-            <a:ext cx="3383280" cy="18288"/>
-          </a:xfrm>
-          <a:prstGeom prst="rect">
-            <a:avLst/>
-          </a:prstGeom>
-          <a:solidFill>
-            <a:srgbClr val="1565C0"/>
-          </a:solidFill>
-          <a:ln/>
-        </p:spPr>
-        <p:style>
-          <a:lnRef idx="1">
-            <a:schemeClr val="accent1"/>
-          </a:lnRef>
-          <a:fillRef idx="3">
-            <a:schemeClr val="accent1"/>
-          </a:fillRef>
-          <a:effectRef idx="2">
-            <a:schemeClr val="accent1"/>
-          </a:effectRef>
-          <a:fontRef idx="minor">
-            <a:schemeClr val="lt1"/>
-          </a:fontRef>
-        </p:style>
-        <p:txBody>
-          <a:bodyPr rtlCol="0" anchor="ctr"/>
-          <a:lstStyle/>
-          <a:p>
-            <a:pPr algn="ctr"/>
-          </a:p>
-        </p:txBody>
-      </p:sp>
-      <p:sp>
-        <p:nvSpPr>
-          <p:cNvPr id="18" name="TextBox 17"/>
-          <p:cNvSpPr txBox="1"/>
-          <p:nvPr/>
-        </p:nvSpPr>
-        <p:spPr>
-          <a:xfrm>
-            <a:off x="4434839" y="2926080"/>
-            <a:ext cx="3383280" cy="1097280"/>
-          </a:xfrm>
-          <a:prstGeom prst="rect">
-            <a:avLst/>
-          </a:prstGeom>
-          <a:noFill/>
-        </p:spPr>
-        <p:txBody>
-          <a:bodyPr wrap="square">
-            <a:spAutoFit/>
-          </a:bodyPr>
-          <a:lstStyle/>
-          <a:p>
-            <a:pPr algn="l"/>
-            <a:r>
-              <a:rPr sz="1200" b="0" i="0">
-                <a:solidFill>
-                  <a:srgbClr val="212121"/>
-                </a:solidFill>
-                <a:latin typeface="Calibri"/>
-              </a:rPr>
-              <a:t>Ação 2:
-Auditoria de igual pagamento
-por trabalho igual com
-penalidades progressivas</a:t>
-            </a:r>
-          </a:p>
-        </p:txBody>
-      </p:sp>
-      <p:sp>
-        <p:nvSpPr>
-          <p:cNvPr id="19" name="Rectangle 18"/>
-          <p:cNvSpPr/>
-          <p:nvPr/>
-        </p:nvSpPr>
-        <p:spPr>
-          <a:xfrm>
-            <a:off x="4343399" y="4114800"/>
-            <a:ext cx="3566160" cy="18288"/>
-          </a:xfrm>
-          <a:prstGeom prst="rect">
-            <a:avLst/>
-          </a:prstGeom>
-          <a:solidFill>
-            <a:srgbClr val="1565C0"/>
-          </a:solidFill>
-          <a:ln/>
-        </p:spPr>
-        <p:style>
-          <a:lnRef idx="1">
-            <a:schemeClr val="accent1"/>
-          </a:lnRef>
-          <a:fillRef idx="3">
-            <a:schemeClr val="accent1"/>
-          </a:fillRef>
-          <a:effectRef idx="2">
-            <a:schemeClr val="accent1"/>
-          </a:effectRef>
-          <a:fontRef idx="minor">
-            <a:schemeClr val="lt1"/>
-          </a:fontRef>
-        </p:style>
-        <p:txBody>
-          <a:bodyPr rtlCol="0" anchor="ctr"/>
-          <a:lstStyle/>
-          <a:p>
-            <a:pPr algn="ctr"/>
-          </a:p>
-        </p:txBody>
-      </p:sp>
-      <p:sp>
-        <p:nvSpPr>
-          <p:cNvPr id="20" name="TextBox 19"/>
-          <p:cNvSpPr txBox="1"/>
-          <p:nvPr/>
-        </p:nvSpPr>
-        <p:spPr>
-          <a:xfrm>
-            <a:off x="4389119" y="4206240"/>
-            <a:ext cx="3474720" cy="640080"/>
-          </a:xfrm>
-          <a:prstGeom prst="rect">
-            <a:avLst/>
-          </a:prstGeom>
-          <a:noFill/>
-        </p:spPr>
-        <p:txBody>
-          <a:bodyPr wrap="square">
-            <a:spAutoFit/>
-          </a:bodyPr>
-          <a:lstStyle/>
-          <a:p>
-            <a:pPr algn="l"/>
-            <a:r>
-              <a:rPr sz="1100" b="1" i="1">
-                <a:solidFill>
-                  <a:srgbClr val="1565C0"/>
-                </a:solidFill>
-                <a:latin typeface="Calibri"/>
-              </a:rPr>
-              <a:t>O gap residual de 6,2% é real
-e mensurável — e deve ser eliminado</a:t>
-            </a:r>
-          </a:p>
-        </p:txBody>
-      </p:sp>
-      <p:sp>
-        <p:nvSpPr>
-          <p:cNvPr id="21" name="Rectangle 20"/>
-          <p:cNvSpPr/>
-          <p:nvPr/>
-        </p:nvSpPr>
-        <p:spPr>
-          <a:xfrm>
-            <a:off x="8229598" y="1097280"/>
-            <a:ext cx="3749039" cy="5349240"/>
+            <a:off x="4937760" y="4379976"/>
+            <a:ext cx="6949440" cy="1371600"/>
           </a:xfrm>
           <a:prstGeom prst="rect">
             <a:avLst/>
@@ -4630,14 +4374,14 @@
       </p:sp>
       <p:sp>
         <p:nvSpPr>
-          <p:cNvPr id="22" name="Rectangle 21"/>
+          <p:cNvPr id="16" name="Rectangle 15"/>
           <p:cNvSpPr/>
           <p:nvPr/>
         </p:nvSpPr>
         <p:spPr>
           <a:xfrm>
-            <a:off x="8229598" y="1097280"/>
-            <a:ext cx="3749039" cy="502920"/>
+            <a:off x="4937760" y="4379976"/>
+            <a:ext cx="128016" cy="1371600"/>
           </a:xfrm>
           <a:prstGeom prst="rect">
             <a:avLst/>
@@ -4671,14 +4415,14 @@
       </p:sp>
       <p:sp>
         <p:nvSpPr>
-          <p:cNvPr id="23" name="TextBox 22"/>
-          <p:cNvSpPr txBox="1"/>
-          <p:nvPr/>
-        </p:nvSpPr>
-        <p:spPr>
-          <a:xfrm>
-            <a:off x="8339326" y="1124712"/>
-            <a:ext cx="3529584" cy="457200"/>
+          <p:cNvPr id="17" name="TextBox 16"/>
+          <p:cNvSpPr txBox="1"/>
+          <p:nvPr/>
+        </p:nvSpPr>
+        <p:spPr>
+          <a:xfrm>
+            <a:off x="5138928" y="4443984"/>
+            <a:ext cx="6675120" cy="365760"/>
           </a:xfrm>
           <a:prstGeom prst="rect">
             <a:avLst/>
@@ -4693,27 +4437,27 @@
           <a:p>
             <a:pPr algn="l"/>
             <a:r>
-              <a:rPr sz="1500" b="1" i="0">
-                <a:solidFill>
-                  <a:srgbClr val="FFFFFF"/>
-                </a:solidFill>
-                <a:latin typeface="Calibri"/>
-              </a:rPr>
-              <a:t>Ampliar as Redes</a:t>
-            </a:r>
-          </a:p>
-        </p:txBody>
-      </p:sp>
-      <p:sp>
-        <p:nvSpPr>
-          <p:cNvPr id="24" name="TextBox 23"/>
-          <p:cNvSpPr txBox="1"/>
-          <p:nvPr/>
-        </p:nvSpPr>
-        <p:spPr>
-          <a:xfrm>
-            <a:off x="8412478" y="1691640"/>
-            <a:ext cx="3383280" cy="1097280"/>
+              <a:rPr sz="1350" b="1" i="0">
+                <a:solidFill>
+                  <a:srgbClr val="2E7D32"/>
+                </a:solidFill>
+                <a:latin typeface="Calibri"/>
+              </a:rPr>
+              <a:t>Focar onde dói rende muito mais</a:t>
+            </a:r>
+          </a:p>
+        </p:txBody>
+      </p:sp>
+      <p:sp>
+        <p:nvSpPr>
+          <p:cNvPr id="18" name="TextBox 17"/>
+          <p:cNvSpPr txBox="1"/>
+          <p:nvPr/>
+        </p:nvSpPr>
+        <p:spPr>
+          <a:xfrm>
+            <a:off x="5138928" y="4855464"/>
+            <a:ext cx="6675120" cy="841248"/>
           </a:xfrm>
           <a:prstGeom prst="rect">
             <a:avLst/>
@@ -4734,32 +4478,33 @@
                 </a:solidFill>
                 <a:latin typeface="Calibri"/>
               </a:rPr>
-              <a:t>Ação 1:
-Mentoria estruturada para elevar
-a posição de negros nas redes
-profissionais</a:t>
-            </a:r>
-          </a:p>
-        </p:txBody>
-      </p:sp>
-      <p:sp>
-        <p:nvSpPr>
-          <p:cNvPr id="25" name="Rectangle 24"/>
+              <a:t>Concentrar o orçamento nos estados de maior desvantagem entrega até +68% mais resultado do que espalhar o dinheiro por igual.</a:t>
+            </a:r>
+          </a:p>
+        </p:txBody>
+      </p:sp>
+      <p:sp>
+        <p:nvSpPr>
+          <p:cNvPr id="19" name="Rectangle 18"/>
           <p:cNvSpPr/>
           <p:nvPr/>
         </p:nvSpPr>
         <p:spPr>
           <a:xfrm>
-            <a:off x="8412478" y="2834640"/>
-            <a:ext cx="3383280" cy="18288"/>
+            <a:off x="274320" y="5897880"/>
+            <a:ext cx="11612880" cy="603504"/>
           </a:xfrm>
           <a:prstGeom prst="rect">
             <a:avLst/>
           </a:prstGeom>
           <a:solidFill>
-            <a:srgbClr val="2E7D32"/>
+            <a:srgbClr val="FFF9E7"/>
           </a:solidFill>
-          <a:ln/>
+          <a:ln w="15240">
+            <a:solidFill>
+              <a:srgbClr val="FF8F00"/>
+            </a:solidFill>
+          </a:ln>
         </p:spPr>
         <p:style>
           <a:lnRef idx="1">
@@ -4785,58 +4530,55 @@
       </p:sp>
       <p:sp>
         <p:nvSpPr>
-          <p:cNvPr id="26" name="TextBox 25"/>
-          <p:cNvSpPr txBox="1"/>
-          <p:nvPr/>
-        </p:nvSpPr>
-        <p:spPr>
-          <a:xfrm>
-            <a:off x="8412478" y="2926080"/>
-            <a:ext cx="3383280" cy="1097280"/>
-          </a:xfrm>
-          <a:prstGeom prst="rect">
-            <a:avLst/>
-          </a:prstGeom>
-          <a:noFill/>
-        </p:spPr>
-        <p:txBody>
-          <a:bodyPr wrap="square">
-            <a:spAutoFit/>
-          </a:bodyPr>
-          <a:lstStyle/>
-          <a:p>
-            <a:pPr algn="l"/>
-            <a:r>
-              <a:rPr sz="1200" b="0" i="0">
-                <a:solidFill>
-                  <a:srgbClr val="212121"/>
-                </a:solidFill>
-                <a:latin typeface="Calibri"/>
-              </a:rPr>
-              <a:t>Ação 2:
-30% dos cargos de liderança
-(DAS + corporativo) para negros
-até 2030</a:t>
-            </a:r>
-          </a:p>
-        </p:txBody>
-      </p:sp>
-      <p:sp>
-        <p:nvSpPr>
-          <p:cNvPr id="27" name="Rectangle 26"/>
+          <p:cNvPr id="20" name="TextBox 19"/>
+          <p:cNvSpPr txBox="1"/>
+          <p:nvPr/>
+        </p:nvSpPr>
+        <p:spPr>
+          <a:xfrm>
+            <a:off x="411480" y="5989320"/>
+            <a:ext cx="11338560" cy="420624"/>
+          </a:xfrm>
+          <a:prstGeom prst="rect">
+            <a:avLst/>
+          </a:prstGeom>
+          <a:noFill/>
+        </p:spPr>
+        <p:txBody>
+          <a:bodyPr wrap="square">
+            <a:spAutoFit/>
+          </a:bodyPr>
+          <a:lstStyle/>
+          <a:p>
+            <a:pPr algn="ctr"/>
+            <a:r>
+              <a:rPr sz="1300" b="1" i="0">
+                <a:solidFill>
+                  <a:srgbClr val="1B2A4A"/>
+                </a:solidFill>
+                <a:latin typeface="Calibri"/>
+              </a:rPr>
+              <a:t>Em linguagem simples: tratar o país inteiro igual desperdiça recursos. Levar a política primeiro aos estados ★ (DF, AM, TO, PA, AC) multiplica o impacto do mesmo orçamento.</a:t>
+            </a:r>
+          </a:p>
+        </p:txBody>
+      </p:sp>
+      <p:sp>
+        <p:nvSpPr>
+          <p:cNvPr id="21" name="Rectangle 20"/>
           <p:cNvSpPr/>
           <p:nvPr/>
         </p:nvSpPr>
         <p:spPr>
           <a:xfrm>
-            <a:off x="8321038" y="4114800"/>
-            <a:ext cx="3566160" cy="18288"/>
+            <a:off x="0" y="6629400"/>
+            <a:ext cx="12188952" cy="228600"/>
           </a:xfrm>
           <a:prstGeom prst="rect">
             <a:avLst/>
           </a:prstGeom>
           <a:solidFill>
-            <a:srgbClr val="2E7D32"/>
+            <a:srgbClr val="1B2A4A"/>
           </a:solidFill>
           <a:ln/>
         </p:spPr>
@@ -4864,119 +4606,7 @@
       </p:sp>
       <p:sp>
         <p:nvSpPr>
-          <p:cNvPr id="28" name="TextBox 27"/>
-          <p:cNvSpPr txBox="1"/>
-          <p:nvPr/>
-        </p:nvSpPr>
-        <p:spPr>
-          <a:xfrm>
-            <a:off x="8366758" y="4206240"/>
-            <a:ext cx="3474720" cy="640080"/>
-          </a:xfrm>
-          <a:prstGeom prst="rect">
-            <a:avLst/>
-          </a:prstGeom>
-          <a:noFill/>
-        </p:spPr>
-        <p:txBody>
-          <a:bodyPr wrap="square">
-            <a:spAutoFit/>
-          </a:bodyPr>
-          <a:lstStyle/>
-          <a:p>
-            <a:pPr algn="l"/>
-            <a:r>
-              <a:rPr sz="1100" b="1" i="1">
-                <a:solidFill>
-                  <a:srgbClr val="2E7D32"/>
-                </a:solidFill>
-                <a:latin typeface="Calibri"/>
-              </a:rPr>
-              <a:t>Sem acesso às redes que convertem
-diplomas em empregos, nada muda</a:t>
-            </a:r>
-          </a:p>
-        </p:txBody>
-      </p:sp>
-      <p:sp>
-        <p:nvSpPr>
-          <p:cNvPr id="29" name="TextBox 28"/>
-          <p:cNvSpPr txBox="1"/>
-          <p:nvPr/>
-        </p:nvSpPr>
-        <p:spPr>
-          <a:xfrm>
-            <a:off x="274320" y="6355080"/>
-            <a:ext cx="11612880" cy="347472"/>
-          </a:xfrm>
-          <a:prstGeom prst="rect">
-            <a:avLst/>
-          </a:prstGeom>
-          <a:noFill/>
-        </p:spPr>
-        <p:txBody>
-          <a:bodyPr wrap="square">
-            <a:spAutoFit/>
-          </a:bodyPr>
-          <a:lstStyle/>
-          <a:p>
-            <a:pPr algn="ctr"/>
-            <a:r>
-              <a:rPr sz="1300" b="1" i="0">
-                <a:solidFill>
-                  <a:srgbClr val="C62828"/>
-                </a:solidFill>
-                <a:latin typeface="Calibri"/>
-              </a:rPr>
-              <a:t>⚠  Sem ação simultânea nos três eixos, fechar o gap levará mais de 100 anos no ritmo atual.</a:t>
-            </a:r>
-          </a:p>
-        </p:txBody>
-      </p:sp>
-      <p:sp>
-        <p:nvSpPr>
-          <p:cNvPr id="30" name="Rectangle 29"/>
-          <p:cNvSpPr/>
-          <p:nvPr/>
-        </p:nvSpPr>
-        <p:spPr>
-          <a:xfrm>
-            <a:off x="0" y="6629400"/>
-            <a:ext cx="12188952" cy="228600"/>
-          </a:xfrm>
-          <a:prstGeom prst="rect">
-            <a:avLst/>
-          </a:prstGeom>
-          <a:solidFill>
-            <a:srgbClr val="1B2A4A"/>
-          </a:solidFill>
-          <a:ln/>
-        </p:spPr>
-        <p:style>
-          <a:lnRef idx="1">
-            <a:schemeClr val="accent1"/>
-          </a:lnRef>
-          <a:fillRef idx="3">
-            <a:schemeClr val="accent1"/>
-          </a:fillRef>
-          <a:effectRef idx="2">
-            <a:schemeClr val="accent1"/>
-          </a:effectRef>
-          <a:fontRef idx="minor">
-            <a:schemeClr val="lt1"/>
-          </a:fontRef>
-        </p:style>
-        <p:txBody>
-          <a:bodyPr rtlCol="0" anchor="ctr"/>
-          <a:lstStyle/>
-          <a:p>
-            <a:pPr algn="ctr"/>
-          </a:p>
-        </p:txBody>
-      </p:sp>
-      <p:sp>
-        <p:nvSpPr>
-          <p:cNvPr id="31" name="TextBox 30"/>
+          <p:cNvPr id="22" name="TextBox 21"/>
           <p:cNvSpPr txBox="1"/>
           <p:nvPr/>
         </p:nvSpPr>
@@ -5011,7 +4641,7 @@
       </p:sp>
       <p:sp>
         <p:nvSpPr>
-          <p:cNvPr id="32" name="TextBox 31"/>
+          <p:cNvPr id="23" name="TextBox 22"/>
           <p:cNvSpPr txBox="1"/>
           <p:nvPr/>
         </p:nvSpPr>
@@ -5039,7 +4669,7 @@
                 </a:solidFill>
                 <a:latin typeface="Calibri"/>
               </a:rPr>
-              <a:t>10/12</a:t>
+              <a:t>10/13</a:t>
             </a:r>
           </a:p>
         </p:txBody>
@@ -5133,7 +4763,7 @@
                 </a:solidFill>
                 <a:latin typeface="Calibri"/>
               </a:rPr>
-              <a:t>A Urgência — O Que Está em Jogo</a:t>
+              <a:t>O Que Funciona — Três Eixos de Ação</a:t>
             </a:r>
           </a:p>
         </p:txBody>
@@ -5168,79 +4798,31 @@
                 </a:solidFill>
                 <a:latin typeface="Calibri"/>
               </a:rPr>
-              <a:t>Pleno emprego sem prosperidade: 94,4% empregados, renda real estagnada</a:t>
-            </a:r>
-          </a:p>
-        </p:txBody>
-      </p:sp>
-      <p:pic>
-        <p:nvPicPr>
-          <p:cNvPr id="5" name="Picture 4" descr="estado_h4_tendencia.png"/>
-          <p:cNvPicPr>
-            <a:picLocks noChangeAspect="1"/>
-          </p:cNvPicPr>
-          <p:nvPr/>
-        </p:nvPicPr>
-        <p:blipFill>
-          <a:blip r:embed="rId2"/>
-          <a:stretch>
-            <a:fillRect/>
-          </a:stretch>
-        </p:blipFill>
+              <a:t>Nenhum eixo isolado resolve. Os três precisam atuar simultaneamente.</a:t>
+            </a:r>
+          </a:p>
+        </p:txBody>
+      </p:sp>
+      <p:sp>
+        <p:nvSpPr>
+          <p:cNvPr id="5" name="Rectangle 4"/>
+          <p:cNvSpPr/>
+          <p:nvPr/>
+        </p:nvSpPr>
         <p:spPr>
           <a:xfrm>
             <a:off x="274320" y="1097280"/>
-            <a:ext cx="5669280" cy="2387374"/>
-          </a:xfrm>
-          <a:prstGeom prst="rect">
-            <a:avLst/>
-          </a:prstGeom>
-        </p:spPr>
-      </p:pic>
-      <p:pic>
-        <p:nvPicPr>
-          <p:cNvPr id="6" name="Picture 5" descr="estado_h5_armadilha.png"/>
-          <p:cNvPicPr>
-            <a:picLocks noChangeAspect="1"/>
-          </p:cNvPicPr>
-          <p:nvPr/>
-        </p:nvPicPr>
-        <p:blipFill>
-          <a:blip r:embed="rId3"/>
-          <a:stretch>
-            <a:fillRect/>
-          </a:stretch>
-        </p:blipFill>
-        <p:spPr>
-          <a:xfrm>
-            <a:off x="6126480" y="1097280"/>
-            <a:ext cx="5760720" cy="2423207"/>
-          </a:xfrm>
-          <a:prstGeom prst="rect">
-            <a:avLst/>
-          </a:prstGeom>
-        </p:spPr>
-      </p:pic>
-      <p:sp>
-        <p:nvSpPr>
-          <p:cNvPr id="7" name="Rectangle 6"/>
-          <p:cNvSpPr/>
-          <p:nvPr/>
-        </p:nvSpPr>
-        <p:spPr>
-          <a:xfrm>
-            <a:off x="274320" y="4754880"/>
-            <a:ext cx="2743200" cy="1234440"/>
+            <a:ext cx="3749039" cy="5349240"/>
           </a:xfrm>
           <a:prstGeom prst="rect">
             <a:avLst/>
           </a:prstGeom>
           <a:solidFill>
-            <a:srgbClr val="E8F5E9"/>
+            <a:srgbClr val="F5F5F5"/>
           </a:solidFill>
-          <a:ln w="19050">
+          <a:ln w="25400">
             <a:solidFill>
-              <a:srgbClr val="2E7D32"/>
+              <a:srgbClr val="C62828"/>
             </a:solidFill>
           </a:ln>
         </p:spPr>
@@ -5268,131 +4850,22 @@
       </p:sp>
       <p:sp>
         <p:nvSpPr>
-          <p:cNvPr id="8" name="TextBox 7"/>
-          <p:cNvSpPr txBox="1"/>
-          <p:nvPr/>
-        </p:nvSpPr>
-        <p:spPr>
-          <a:xfrm>
-            <a:off x="365760" y="4828032"/>
-            <a:ext cx="2560320" cy="658368"/>
-          </a:xfrm>
-          <a:prstGeom prst="rect">
-            <a:avLst/>
-          </a:prstGeom>
-          <a:noFill/>
-        </p:spPr>
-        <p:txBody>
-          <a:bodyPr wrap="square">
-            <a:spAutoFit/>
-          </a:bodyPr>
-          <a:lstStyle/>
-          <a:p>
-            <a:pPr algn="ctr"/>
-            <a:r>
-              <a:rPr sz="3400" b="1" i="0">
-                <a:solidFill>
-                  <a:srgbClr val="2E7D32"/>
-                </a:solidFill>
-                <a:latin typeface="Calibri"/>
-              </a:rPr>
-              <a:t>94,4%</a:t>
-            </a:r>
-          </a:p>
-        </p:txBody>
-      </p:sp>
-      <p:sp>
-        <p:nvSpPr>
-          <p:cNvPr id="9" name="TextBox 8"/>
-          <p:cNvSpPr txBox="1"/>
-          <p:nvPr/>
-        </p:nvSpPr>
-        <p:spPr>
-          <a:xfrm>
-            <a:off x="365760" y="5468112"/>
-            <a:ext cx="2560320" cy="320040"/>
-          </a:xfrm>
-          <a:prstGeom prst="rect">
-            <a:avLst/>
-          </a:prstGeom>
-          <a:noFill/>
-        </p:spPr>
-        <p:txBody>
-          <a:bodyPr wrap="square">
-            <a:spAutoFit/>
-          </a:bodyPr>
-          <a:lstStyle/>
-          <a:p>
-            <a:pPr algn="ctr"/>
-            <a:r>
-              <a:rPr sz="1150" b="1" i="0">
-                <a:solidFill>
-                  <a:srgbClr val="212121"/>
-                </a:solidFill>
-                <a:latin typeface="Calibri"/>
-              </a:rPr>
-              <a:t>emprego em 2025</a:t>
-            </a:r>
-          </a:p>
-        </p:txBody>
-      </p:sp>
-      <p:sp>
-        <p:nvSpPr>
-          <p:cNvPr id="10" name="TextBox 9"/>
-          <p:cNvSpPr txBox="1"/>
-          <p:nvPr/>
-        </p:nvSpPr>
-        <p:spPr>
-          <a:xfrm>
-            <a:off x="365760" y="5779008"/>
-            <a:ext cx="2560320" cy="292608"/>
-          </a:xfrm>
-          <a:prstGeom prst="rect">
-            <a:avLst/>
-          </a:prstGeom>
-          <a:noFill/>
-        </p:spPr>
-        <p:txBody>
-          <a:bodyPr wrap="square">
-            <a:spAutoFit/>
-          </a:bodyPr>
-          <a:lstStyle/>
-          <a:p>
-            <a:pPr algn="ctr"/>
-            <a:r>
-              <a:rPr sz="950" b="0" i="1">
-                <a:solidFill>
-                  <a:srgbClr val="616161"/>
-                </a:solidFill>
-                <a:latin typeface="Calibri"/>
-              </a:rPr>
-              <a:t>máxima histórica da série</a:t>
-            </a:r>
-          </a:p>
-        </p:txBody>
-      </p:sp>
-      <p:sp>
-        <p:nvSpPr>
-          <p:cNvPr id="11" name="Rectangle 10"/>
+          <p:cNvPr id="6" name="Rectangle 5"/>
           <p:cNvSpPr/>
           <p:nvPr/>
         </p:nvSpPr>
         <p:spPr>
           <a:xfrm>
-            <a:off x="3200400" y="4754880"/>
-            <a:ext cx="2743200" cy="1234440"/>
+            <a:off x="274320" y="1097280"/>
+            <a:ext cx="3749039" cy="502920"/>
           </a:xfrm>
           <a:prstGeom prst="rect">
             <a:avLst/>
           </a:prstGeom>
           <a:solidFill>
-            <a:srgbClr val="FFEBEE"/>
+            <a:srgbClr val="C62828"/>
           </a:solidFill>
-          <a:ln w="19050">
-            <a:solidFill>
-              <a:srgbClr val="C62828"/>
-            </a:solidFill>
-          </a:ln>
+          <a:ln/>
         </p:spPr>
         <p:style>
           <a:lnRef idx="1">
@@ -5418,131 +4891,94 @@
       </p:sp>
       <p:sp>
         <p:nvSpPr>
-          <p:cNvPr id="12" name="TextBox 11"/>
-          <p:cNvSpPr txBox="1"/>
-          <p:nvPr/>
-        </p:nvSpPr>
-        <p:spPr>
-          <a:xfrm>
-            <a:off x="3291840" y="4828032"/>
-            <a:ext cx="2560320" cy="658368"/>
-          </a:xfrm>
-          <a:prstGeom prst="rect">
-            <a:avLst/>
-          </a:prstGeom>
-          <a:noFill/>
-        </p:spPr>
-        <p:txBody>
-          <a:bodyPr wrap="square">
-            <a:spAutoFit/>
-          </a:bodyPr>
-          <a:lstStyle/>
-          <a:p>
-            <a:pPr algn="ctr"/>
-            <a:r>
-              <a:rPr sz="3400" b="1" i="0">
-                <a:solidFill>
-                  <a:srgbClr val="C62828"/>
-                </a:solidFill>
-                <a:latin typeface="Calibri"/>
-              </a:rPr>
-              <a:t>R$1.283</a:t>
-            </a:r>
-          </a:p>
-        </p:txBody>
-      </p:sp>
-      <p:sp>
-        <p:nvSpPr>
-          <p:cNvPr id="13" name="TextBox 12"/>
-          <p:cNvSpPr txBox="1"/>
-          <p:nvPr/>
-        </p:nvSpPr>
-        <p:spPr>
-          <a:xfrm>
-            <a:off x="3291840" y="5468112"/>
-            <a:ext cx="2560320" cy="320040"/>
-          </a:xfrm>
-          <a:prstGeom prst="rect">
-            <a:avLst/>
-          </a:prstGeom>
-          <a:noFill/>
-        </p:spPr>
-        <p:txBody>
-          <a:bodyPr wrap="square">
-            <a:spAutoFit/>
-          </a:bodyPr>
-          <a:lstStyle/>
-          <a:p>
-            <a:pPr algn="ctr"/>
-            <a:r>
-              <a:rPr sz="1150" b="1" i="0">
+          <p:cNvPr id="7" name="TextBox 6"/>
+          <p:cNvSpPr txBox="1"/>
+          <p:nvPr/>
+        </p:nvSpPr>
+        <p:spPr>
+          <a:xfrm>
+            <a:off x="384048" y="1124712"/>
+            <a:ext cx="3529584" cy="457200"/>
+          </a:xfrm>
+          <a:prstGeom prst="rect">
+            <a:avLst/>
+          </a:prstGeom>
+          <a:noFill/>
+        </p:spPr>
+        <p:txBody>
+          <a:bodyPr wrap="square">
+            <a:spAutoFit/>
+          </a:bodyPr>
+          <a:lstStyle/>
+          <a:p>
+            <a:pPr algn="l"/>
+            <a:r>
+              <a:rPr sz="1500" b="1" i="0">
+                <a:solidFill>
+                  <a:srgbClr val="FFFFFF"/>
+                </a:solidFill>
+                <a:latin typeface="Calibri"/>
+              </a:rPr>
+              <a:t>Abrir as Portas</a:t>
+            </a:r>
+          </a:p>
+        </p:txBody>
+      </p:sp>
+      <p:sp>
+        <p:nvSpPr>
+          <p:cNvPr id="8" name="TextBox 7"/>
+          <p:cNvSpPr txBox="1"/>
+          <p:nvPr/>
+        </p:nvSpPr>
+        <p:spPr>
+          <a:xfrm>
+            <a:off x="457200" y="1691640"/>
+            <a:ext cx="3383280" cy="1097280"/>
+          </a:xfrm>
+          <a:prstGeom prst="rect">
+            <a:avLst/>
+          </a:prstGeom>
+          <a:noFill/>
+        </p:spPr>
+        <p:txBody>
+          <a:bodyPr wrap="square">
+            <a:spAutoFit/>
+          </a:bodyPr>
+          <a:lstStyle/>
+          <a:p>
+            <a:pPr algn="l"/>
+            <a:r>
+              <a:rPr sz="1200" b="0" i="0">
                 <a:solidFill>
                   <a:srgbClr val="212121"/>
                 </a:solidFill>
                 <a:latin typeface="Calibri"/>
               </a:rPr>
-              <a:t>renda real 2025</a:t>
-            </a:r>
-          </a:p>
-        </p:txBody>
-      </p:sp>
-      <p:sp>
-        <p:nvSpPr>
-          <p:cNvPr id="14" name="TextBox 13"/>
-          <p:cNvSpPr txBox="1"/>
-          <p:nvPr/>
-        </p:nvSpPr>
-        <p:spPr>
-          <a:xfrm>
-            <a:off x="3291840" y="5779008"/>
-            <a:ext cx="2560320" cy="292608"/>
-          </a:xfrm>
-          <a:prstGeom prst="rect">
-            <a:avLst/>
-          </a:prstGeom>
-          <a:noFill/>
-        </p:spPr>
-        <p:txBody>
-          <a:bodyPr wrap="square">
-            <a:spAutoFit/>
-          </a:bodyPr>
-          <a:lstStyle/>
-          <a:p>
-            <a:pPr algn="ctr"/>
-            <a:r>
-              <a:rPr sz="950" b="0" i="1">
-                <a:solidFill>
-                  <a:srgbClr val="616161"/>
-                </a:solidFill>
-                <a:latin typeface="Calibri"/>
-              </a:rPr>
-              <a:t>queda vs R$1.345 em 2024</a:t>
-            </a:r>
-          </a:p>
-        </p:txBody>
-      </p:sp>
-      <p:sp>
-        <p:nvSpPr>
-          <p:cNvPr id="15" name="Rectangle 14"/>
+              <a:t>Ação 1:
+Cotas de acesso a cargos
+qualificados (meta: IR ≥ 0,80)</a:t>
+            </a:r>
+          </a:p>
+        </p:txBody>
+      </p:sp>
+      <p:sp>
+        <p:nvSpPr>
+          <p:cNvPr id="9" name="Rectangle 8"/>
           <p:cNvSpPr/>
           <p:nvPr/>
         </p:nvSpPr>
         <p:spPr>
           <a:xfrm>
-            <a:off x="6126480" y="4754880"/>
-            <a:ext cx="2743200" cy="1234440"/>
+            <a:off x="457200" y="2834640"/>
+            <a:ext cx="3383280" cy="18288"/>
           </a:xfrm>
           <a:prstGeom prst="rect">
             <a:avLst/>
           </a:prstGeom>
           <a:solidFill>
-            <a:srgbClr val="FFEBEE"/>
+            <a:srgbClr val="C62828"/>
           </a:solidFill>
-          <a:ln w="19050">
-            <a:solidFill>
-              <a:srgbClr val="C62828"/>
-            </a:solidFill>
-          </a:ln>
+          <a:ln/>
         </p:spPr>
         <p:style>
           <a:lnRef idx="1">
@@ -5568,132 +5004,60 @@
       </p:sp>
       <p:sp>
         <p:nvSpPr>
-          <p:cNvPr id="16" name="TextBox 15"/>
-          <p:cNvSpPr txBox="1"/>
-          <p:nvPr/>
-        </p:nvSpPr>
-        <p:spPr>
-          <a:xfrm>
-            <a:off x="6217920" y="4828032"/>
-            <a:ext cx="2560320" cy="658368"/>
-          </a:xfrm>
-          <a:prstGeom prst="rect">
-            <a:avLst/>
-          </a:prstGeom>
-          <a:noFill/>
-        </p:spPr>
-        <p:txBody>
-          <a:bodyPr wrap="square">
-            <a:spAutoFit/>
-          </a:bodyPr>
-          <a:lstStyle/>
-          <a:p>
-            <a:pPr algn="ctr"/>
-            <a:r>
-              <a:rPr sz="3400" b="1" i="0">
-                <a:solidFill>
-                  <a:srgbClr val="C62828"/>
-                </a:solidFill>
-                <a:latin typeface="Calibri"/>
-              </a:rPr>
-              <a:t>11%</a:t>
-            </a:r>
-          </a:p>
-        </p:txBody>
-      </p:sp>
-      <p:sp>
-        <p:nvSpPr>
-          <p:cNvPr id="17" name="TextBox 16"/>
-          <p:cNvSpPr txBox="1"/>
-          <p:nvPr/>
-        </p:nvSpPr>
-        <p:spPr>
-          <a:xfrm>
-            <a:off x="6217920" y="5468112"/>
-            <a:ext cx="2560320" cy="320040"/>
-          </a:xfrm>
-          <a:prstGeom prst="rect">
-            <a:avLst/>
-          </a:prstGeom>
-          <a:noFill/>
-        </p:spPr>
-        <p:txBody>
-          <a:bodyPr wrap="square">
-            <a:spAutoFit/>
-          </a:bodyPr>
-          <a:lstStyle/>
-          <a:p>
-            <a:pPr algn="ctr"/>
-            <a:r>
-              <a:rPr sz="1150" b="1" i="0">
+          <p:cNvPr id="10" name="TextBox 9"/>
+          <p:cNvSpPr txBox="1"/>
+          <p:nvPr/>
+        </p:nvSpPr>
+        <p:spPr>
+          <a:xfrm>
+            <a:off x="457200" y="2926080"/>
+            <a:ext cx="3383280" cy="1097280"/>
+          </a:xfrm>
+          <a:prstGeom prst="rect">
+            <a:avLst/>
+          </a:prstGeom>
+          <a:noFill/>
+        </p:spPr>
+        <p:txBody>
+          <a:bodyPr wrap="square">
+            <a:spAutoFit/>
+          </a:bodyPr>
+          <a:lstStyle/>
+          <a:p>
+            <a:pPr algn="l"/>
+            <a:r>
+              <a:rPr sz="1200" b="0" i="0">
                 <a:solidFill>
                   <a:srgbClr val="212121"/>
                 </a:solidFill>
                 <a:latin typeface="Calibri"/>
               </a:rPr>
-              <a:t>negros em alta
-qualificação</a:t>
-            </a:r>
-          </a:p>
-        </p:txBody>
-      </p:sp>
-      <p:sp>
-        <p:nvSpPr>
-          <p:cNvPr id="18" name="TextBox 17"/>
-          <p:cNvSpPr txBox="1"/>
-          <p:nvPr/>
-        </p:nvSpPr>
-        <p:spPr>
-          <a:xfrm>
-            <a:off x="6217920" y="5779008"/>
-            <a:ext cx="2560320" cy="292608"/>
-          </a:xfrm>
-          <a:prstGeom prst="rect">
-            <a:avLst/>
-          </a:prstGeom>
-          <a:noFill/>
-        </p:spPr>
-        <p:txBody>
-          <a:bodyPr wrap="square">
-            <a:spAutoFit/>
-          </a:bodyPr>
-          <a:lstStyle/>
-          <a:p>
-            <a:pPr algn="ctr"/>
-            <a:r>
-              <a:rPr sz="950" b="0" i="1">
-                <a:solidFill>
-                  <a:srgbClr val="616161"/>
-                </a:solidFill>
-                <a:latin typeface="Calibri"/>
-              </a:rPr>
-              <a:t>brancos: 22,4%</a:t>
-            </a:r>
-          </a:p>
-        </p:txBody>
-      </p:sp>
-      <p:sp>
-        <p:nvSpPr>
-          <p:cNvPr id="19" name="Rectangle 18"/>
+              <a:t>Ação 2:
+Formação profissional com
+recorte racial e bolsas de
+residência em empresas premium</a:t>
+            </a:r>
+          </a:p>
+        </p:txBody>
+      </p:sp>
+      <p:sp>
+        <p:nvSpPr>
+          <p:cNvPr id="11" name="Rectangle 10"/>
           <p:cNvSpPr/>
           <p:nvPr/>
         </p:nvSpPr>
         <p:spPr>
           <a:xfrm>
-            <a:off x="9052560" y="4754880"/>
-            <a:ext cx="2743200" cy="1234440"/>
+            <a:off x="365760" y="4114800"/>
+            <a:ext cx="3566160" cy="18288"/>
           </a:xfrm>
           <a:prstGeom prst="rect">
             <a:avLst/>
           </a:prstGeom>
           <a:solidFill>
-            <a:srgbClr val="FFF9E7"/>
+            <a:srgbClr val="C62828"/>
           </a:solidFill>
-          <a:ln w="19050">
-            <a:solidFill>
-              <a:srgbClr val="FF8F00"/>
-            </a:solidFill>
-          </a:ln>
+          <a:ln/>
         </p:spPr>
         <p:style>
           <a:lnRef idx="1">
@@ -5719,130 +5083,60 @@
       </p:sp>
       <p:sp>
         <p:nvSpPr>
-          <p:cNvPr id="20" name="TextBox 19"/>
-          <p:cNvSpPr txBox="1"/>
-          <p:nvPr/>
-        </p:nvSpPr>
-        <p:spPr>
-          <a:xfrm>
-            <a:off x="9144000" y="4828032"/>
-            <a:ext cx="2560320" cy="658368"/>
-          </a:xfrm>
-          <a:prstGeom prst="rect">
-            <a:avLst/>
-          </a:prstGeom>
-          <a:noFill/>
-        </p:spPr>
-        <p:txBody>
-          <a:bodyPr wrap="square">
-            <a:spAutoFit/>
-          </a:bodyPr>
-          <a:lstStyle/>
-          <a:p>
-            <a:pPr algn="ctr"/>
-            <a:r>
-              <a:rPr sz="3400" b="1" i="0">
-                <a:solidFill>
-                  <a:srgbClr val="FF8F00"/>
-                </a:solidFill>
-                <a:latin typeface="Calibri"/>
-              </a:rPr>
-              <a:t>+100</a:t>
-            </a:r>
-          </a:p>
-        </p:txBody>
-      </p:sp>
-      <p:sp>
-        <p:nvSpPr>
-          <p:cNvPr id="21" name="TextBox 20"/>
-          <p:cNvSpPr txBox="1"/>
-          <p:nvPr/>
-        </p:nvSpPr>
-        <p:spPr>
-          <a:xfrm>
-            <a:off x="9144000" y="5468112"/>
-            <a:ext cx="2560320" cy="320040"/>
-          </a:xfrm>
-          <a:prstGeom prst="rect">
-            <a:avLst/>
-          </a:prstGeom>
-          <a:noFill/>
-        </p:spPr>
-        <p:txBody>
-          <a:bodyPr wrap="square">
-            <a:spAutoFit/>
-          </a:bodyPr>
-          <a:lstStyle/>
-          <a:p>
-            <a:pPr algn="ctr"/>
-            <a:r>
-              <a:rPr sz="1150" b="1" i="0">
-                <a:solidFill>
-                  <a:srgbClr val="212121"/>
-                </a:solidFill>
-                <a:latin typeface="Calibri"/>
-              </a:rPr>
-              <a:t>anos para fechar
-o gap</a:t>
-            </a:r>
-          </a:p>
-        </p:txBody>
-      </p:sp>
-      <p:sp>
-        <p:nvSpPr>
-          <p:cNvPr id="22" name="TextBox 21"/>
-          <p:cNvSpPr txBox="1"/>
-          <p:nvPr/>
-        </p:nvSpPr>
-        <p:spPr>
-          <a:xfrm>
-            <a:off x="9144000" y="5779008"/>
-            <a:ext cx="2560320" cy="292608"/>
-          </a:xfrm>
-          <a:prstGeom prst="rect">
-            <a:avLst/>
-          </a:prstGeom>
-          <a:noFill/>
-        </p:spPr>
-        <p:txBody>
-          <a:bodyPr wrap="square">
-            <a:spAutoFit/>
-          </a:bodyPr>
-          <a:lstStyle/>
-          <a:p>
-            <a:pPr algn="ctr"/>
-            <a:r>
-              <a:rPr sz="950" b="0" i="1">
-                <a:solidFill>
-                  <a:srgbClr val="616161"/>
-                </a:solidFill>
-                <a:latin typeface="Calibri"/>
-              </a:rPr>
-              <a:t>no ritmo atual</a:t>
-            </a:r>
-          </a:p>
-        </p:txBody>
-      </p:sp>
-      <p:sp>
-        <p:nvSpPr>
-          <p:cNvPr id="23" name="Rectangle 22"/>
+          <p:cNvPr id="12" name="TextBox 11"/>
+          <p:cNvSpPr txBox="1"/>
+          <p:nvPr/>
+        </p:nvSpPr>
+        <p:spPr>
+          <a:xfrm>
+            <a:off x="411480" y="4206240"/>
+            <a:ext cx="3474720" cy="640080"/>
+          </a:xfrm>
+          <a:prstGeom prst="rect">
+            <a:avLst/>
+          </a:prstGeom>
+          <a:noFill/>
+        </p:spPr>
+        <p:txBody>
+          <a:bodyPr wrap="square">
+            <a:spAutoFit/>
+          </a:bodyPr>
+          <a:lstStyle/>
+          <a:p>
+            <a:pPr algn="l"/>
+            <a:r>
+              <a:rPr sz="1100" b="1" i="1">
+                <a:solidFill>
+                  <a:srgbClr val="C62828"/>
+                </a:solidFill>
+                <a:latin typeface="Calibri"/>
+              </a:rPr>
+              <a:t>Atacar onde os dados apontam:
+barreiras de ACESSO, não só salário</a:t>
+            </a:r>
+          </a:p>
+        </p:txBody>
+      </p:sp>
+      <p:sp>
+        <p:nvSpPr>
+          <p:cNvPr id="13" name="Rectangle 12"/>
           <p:cNvSpPr/>
           <p:nvPr/>
         </p:nvSpPr>
         <p:spPr>
           <a:xfrm>
-            <a:off x="274320" y="6309360"/>
-            <a:ext cx="11612880" cy="402336"/>
+            <a:off x="4251959" y="1097280"/>
+            <a:ext cx="3749039" cy="5349240"/>
           </a:xfrm>
           <a:prstGeom prst="rect">
             <a:avLst/>
           </a:prstGeom>
           <a:solidFill>
-            <a:srgbClr val="FFF9E7"/>
+            <a:srgbClr val="F5F5F5"/>
           </a:solidFill>
-          <a:ln w="15240">
+          <a:ln w="25400">
             <a:solidFill>
-              <a:srgbClr val="FF8F00"/>
+              <a:srgbClr val="1565C0"/>
             </a:solidFill>
           </a:ln>
         </p:spPr>
@@ -5870,55 +5164,20 @@
       </p:sp>
       <p:sp>
         <p:nvSpPr>
-          <p:cNvPr id="24" name="TextBox 23"/>
-          <p:cNvSpPr txBox="1"/>
-          <p:nvPr/>
-        </p:nvSpPr>
-        <p:spPr>
-          <a:xfrm>
-            <a:off x="411480" y="6400800"/>
-            <a:ext cx="11338560" cy="219456"/>
-          </a:xfrm>
-          <a:prstGeom prst="rect">
-            <a:avLst/>
-          </a:prstGeom>
-          <a:noFill/>
-        </p:spPr>
-        <p:txBody>
-          <a:bodyPr wrap="square">
-            <a:spAutoFit/>
-          </a:bodyPr>
-          <a:lstStyle/>
-          <a:p>
-            <a:pPr algn="ctr"/>
-            <a:r>
-              <a:rPr sz="1300" b="1" i="0">
-                <a:solidFill>
-                  <a:srgbClr val="1B2A4A"/>
-                </a:solidFill>
-                <a:latin typeface="Calibri"/>
-              </a:rPr>
-              <a:t>O Brasil está a produzir emprego, mas não prosperidade igualitária. Pleno emprego com segregação ocupacional é o cenário atual — e não se resolve sozinho.</a:t>
-            </a:r>
-          </a:p>
-        </p:txBody>
-      </p:sp>
-      <p:sp>
-        <p:nvSpPr>
-          <p:cNvPr id="25" name="Rectangle 24"/>
+          <p:cNvPr id="14" name="Rectangle 13"/>
           <p:cNvSpPr/>
           <p:nvPr/>
         </p:nvSpPr>
         <p:spPr>
           <a:xfrm>
-            <a:off x="0" y="6629400"/>
-            <a:ext cx="12188952" cy="228600"/>
+            <a:off x="4251959" y="1097280"/>
+            <a:ext cx="3749039" cy="502920"/>
           </a:xfrm>
           <a:prstGeom prst="rect">
             <a:avLst/>
           </a:prstGeom>
           <a:solidFill>
-            <a:srgbClr val="1B2A4A"/>
+            <a:srgbClr val="1565C0"/>
           </a:solidFill>
           <a:ln/>
         </p:spPr>
@@ -5946,7 +5205,626 @@
       </p:sp>
       <p:sp>
         <p:nvSpPr>
+          <p:cNvPr id="15" name="TextBox 14"/>
+          <p:cNvSpPr txBox="1"/>
+          <p:nvPr/>
+        </p:nvSpPr>
+        <p:spPr>
+          <a:xfrm>
+            <a:off x="4361687" y="1124712"/>
+            <a:ext cx="3529584" cy="457200"/>
+          </a:xfrm>
+          <a:prstGeom prst="rect">
+            <a:avLst/>
+          </a:prstGeom>
+          <a:noFill/>
+        </p:spPr>
+        <p:txBody>
+          <a:bodyPr wrap="square">
+            <a:spAutoFit/>
+          </a:bodyPr>
+          <a:lstStyle/>
+          <a:p>
+            <a:pPr algn="l"/>
+            <a:r>
+              <a:rPr sz="1500" b="1" i="0">
+                <a:solidFill>
+                  <a:srgbClr val="FFFFFF"/>
+                </a:solidFill>
+                <a:latin typeface="Calibri"/>
+              </a:rPr>
+              <a:t>Pagar Igual</a:t>
+            </a:r>
+          </a:p>
+        </p:txBody>
+      </p:sp>
+      <p:sp>
+        <p:nvSpPr>
+          <p:cNvPr id="16" name="TextBox 15"/>
+          <p:cNvSpPr txBox="1"/>
+          <p:nvPr/>
+        </p:nvSpPr>
+        <p:spPr>
+          <a:xfrm>
+            <a:off x="4434839" y="1691640"/>
+            <a:ext cx="3383280" cy="1097280"/>
+          </a:xfrm>
+          <a:prstGeom prst="rect">
+            <a:avLst/>
+          </a:prstGeom>
+          <a:noFill/>
+        </p:spPr>
+        <p:txBody>
+          <a:bodyPr wrap="square">
+            <a:spAutoFit/>
+          </a:bodyPr>
+          <a:lstStyle/>
+          <a:p>
+            <a:pPr algn="l"/>
+            <a:r>
+              <a:rPr sz="1200" b="0" i="0">
+                <a:solidFill>
+                  <a:srgbClr val="212121"/>
+                </a:solidFill>
+                <a:latin typeface="Calibri"/>
+              </a:rPr>
+              <a:t>Ação 1:
+Transparência salarial por raça
+obrigatória (empresas &gt; 100 fun.)</a:t>
+            </a:r>
+          </a:p>
+        </p:txBody>
+      </p:sp>
+      <p:sp>
+        <p:nvSpPr>
+          <p:cNvPr id="17" name="Rectangle 16"/>
+          <p:cNvSpPr/>
+          <p:nvPr/>
+        </p:nvSpPr>
+        <p:spPr>
+          <a:xfrm>
+            <a:off x="4434839" y="2834640"/>
+            <a:ext cx="3383280" cy="18288"/>
+          </a:xfrm>
+          <a:prstGeom prst="rect">
+            <a:avLst/>
+          </a:prstGeom>
+          <a:solidFill>
+            <a:srgbClr val="1565C0"/>
+          </a:solidFill>
+          <a:ln/>
+        </p:spPr>
+        <p:style>
+          <a:lnRef idx="1">
+            <a:schemeClr val="accent1"/>
+          </a:lnRef>
+          <a:fillRef idx="3">
+            <a:schemeClr val="accent1"/>
+          </a:fillRef>
+          <a:effectRef idx="2">
+            <a:schemeClr val="accent1"/>
+          </a:effectRef>
+          <a:fontRef idx="minor">
+            <a:schemeClr val="lt1"/>
+          </a:fontRef>
+        </p:style>
+        <p:txBody>
+          <a:bodyPr rtlCol="0" anchor="ctr"/>
+          <a:lstStyle/>
+          <a:p>
+            <a:pPr algn="ctr"/>
+          </a:p>
+        </p:txBody>
+      </p:sp>
+      <p:sp>
+        <p:nvSpPr>
+          <p:cNvPr id="18" name="TextBox 17"/>
+          <p:cNvSpPr txBox="1"/>
+          <p:nvPr/>
+        </p:nvSpPr>
+        <p:spPr>
+          <a:xfrm>
+            <a:off x="4434839" y="2926080"/>
+            <a:ext cx="3383280" cy="1097280"/>
+          </a:xfrm>
+          <a:prstGeom prst="rect">
+            <a:avLst/>
+          </a:prstGeom>
+          <a:noFill/>
+        </p:spPr>
+        <p:txBody>
+          <a:bodyPr wrap="square">
+            <a:spAutoFit/>
+          </a:bodyPr>
+          <a:lstStyle/>
+          <a:p>
+            <a:pPr algn="l"/>
+            <a:r>
+              <a:rPr sz="1200" b="0" i="0">
+                <a:solidFill>
+                  <a:srgbClr val="212121"/>
+                </a:solidFill>
+                <a:latin typeface="Calibri"/>
+              </a:rPr>
+              <a:t>Ação 2:
+Auditoria de igual pagamento
+por trabalho igual com
+penalidades progressivas</a:t>
+            </a:r>
+          </a:p>
+        </p:txBody>
+      </p:sp>
+      <p:sp>
+        <p:nvSpPr>
+          <p:cNvPr id="19" name="Rectangle 18"/>
+          <p:cNvSpPr/>
+          <p:nvPr/>
+        </p:nvSpPr>
+        <p:spPr>
+          <a:xfrm>
+            <a:off x="4343399" y="4114800"/>
+            <a:ext cx="3566160" cy="18288"/>
+          </a:xfrm>
+          <a:prstGeom prst="rect">
+            <a:avLst/>
+          </a:prstGeom>
+          <a:solidFill>
+            <a:srgbClr val="1565C0"/>
+          </a:solidFill>
+          <a:ln/>
+        </p:spPr>
+        <p:style>
+          <a:lnRef idx="1">
+            <a:schemeClr val="accent1"/>
+          </a:lnRef>
+          <a:fillRef idx="3">
+            <a:schemeClr val="accent1"/>
+          </a:fillRef>
+          <a:effectRef idx="2">
+            <a:schemeClr val="accent1"/>
+          </a:effectRef>
+          <a:fontRef idx="minor">
+            <a:schemeClr val="lt1"/>
+          </a:fontRef>
+        </p:style>
+        <p:txBody>
+          <a:bodyPr rtlCol="0" anchor="ctr"/>
+          <a:lstStyle/>
+          <a:p>
+            <a:pPr algn="ctr"/>
+          </a:p>
+        </p:txBody>
+      </p:sp>
+      <p:sp>
+        <p:nvSpPr>
+          <p:cNvPr id="20" name="TextBox 19"/>
+          <p:cNvSpPr txBox="1"/>
+          <p:nvPr/>
+        </p:nvSpPr>
+        <p:spPr>
+          <a:xfrm>
+            <a:off x="4389119" y="4206240"/>
+            <a:ext cx="3474720" cy="640080"/>
+          </a:xfrm>
+          <a:prstGeom prst="rect">
+            <a:avLst/>
+          </a:prstGeom>
+          <a:noFill/>
+        </p:spPr>
+        <p:txBody>
+          <a:bodyPr wrap="square">
+            <a:spAutoFit/>
+          </a:bodyPr>
+          <a:lstStyle/>
+          <a:p>
+            <a:pPr algn="l"/>
+            <a:r>
+              <a:rPr sz="1100" b="1" i="1">
+                <a:solidFill>
+                  <a:srgbClr val="1565C0"/>
+                </a:solidFill>
+                <a:latin typeface="Calibri"/>
+              </a:rPr>
+              <a:t>O gap residual de 6,2% é real
+e mensurável — e deve ser eliminado</a:t>
+            </a:r>
+          </a:p>
+        </p:txBody>
+      </p:sp>
+      <p:sp>
+        <p:nvSpPr>
+          <p:cNvPr id="21" name="Rectangle 20"/>
+          <p:cNvSpPr/>
+          <p:nvPr/>
+        </p:nvSpPr>
+        <p:spPr>
+          <a:xfrm>
+            <a:off x="8229598" y="1097280"/>
+            <a:ext cx="3749039" cy="5349240"/>
+          </a:xfrm>
+          <a:prstGeom prst="rect">
+            <a:avLst/>
+          </a:prstGeom>
+          <a:solidFill>
+            <a:srgbClr val="F5F5F5"/>
+          </a:solidFill>
+          <a:ln w="25400">
+            <a:solidFill>
+              <a:srgbClr val="2E7D32"/>
+            </a:solidFill>
+          </a:ln>
+        </p:spPr>
+        <p:style>
+          <a:lnRef idx="1">
+            <a:schemeClr val="accent1"/>
+          </a:lnRef>
+          <a:fillRef idx="3">
+            <a:schemeClr val="accent1"/>
+          </a:fillRef>
+          <a:effectRef idx="2">
+            <a:schemeClr val="accent1"/>
+          </a:effectRef>
+          <a:fontRef idx="minor">
+            <a:schemeClr val="lt1"/>
+          </a:fontRef>
+        </p:style>
+        <p:txBody>
+          <a:bodyPr rtlCol="0" anchor="ctr"/>
+          <a:lstStyle/>
+          <a:p>
+            <a:pPr algn="ctr"/>
+          </a:p>
+        </p:txBody>
+      </p:sp>
+      <p:sp>
+        <p:nvSpPr>
+          <p:cNvPr id="22" name="Rectangle 21"/>
+          <p:cNvSpPr/>
+          <p:nvPr/>
+        </p:nvSpPr>
+        <p:spPr>
+          <a:xfrm>
+            <a:off x="8229598" y="1097280"/>
+            <a:ext cx="3749039" cy="502920"/>
+          </a:xfrm>
+          <a:prstGeom prst="rect">
+            <a:avLst/>
+          </a:prstGeom>
+          <a:solidFill>
+            <a:srgbClr val="2E7D32"/>
+          </a:solidFill>
+          <a:ln/>
+        </p:spPr>
+        <p:style>
+          <a:lnRef idx="1">
+            <a:schemeClr val="accent1"/>
+          </a:lnRef>
+          <a:fillRef idx="3">
+            <a:schemeClr val="accent1"/>
+          </a:fillRef>
+          <a:effectRef idx="2">
+            <a:schemeClr val="accent1"/>
+          </a:effectRef>
+          <a:fontRef idx="minor">
+            <a:schemeClr val="lt1"/>
+          </a:fontRef>
+        </p:style>
+        <p:txBody>
+          <a:bodyPr rtlCol="0" anchor="ctr"/>
+          <a:lstStyle/>
+          <a:p>
+            <a:pPr algn="ctr"/>
+          </a:p>
+        </p:txBody>
+      </p:sp>
+      <p:sp>
+        <p:nvSpPr>
+          <p:cNvPr id="23" name="TextBox 22"/>
+          <p:cNvSpPr txBox="1"/>
+          <p:nvPr/>
+        </p:nvSpPr>
+        <p:spPr>
+          <a:xfrm>
+            <a:off x="8339326" y="1124712"/>
+            <a:ext cx="3529584" cy="457200"/>
+          </a:xfrm>
+          <a:prstGeom prst="rect">
+            <a:avLst/>
+          </a:prstGeom>
+          <a:noFill/>
+        </p:spPr>
+        <p:txBody>
+          <a:bodyPr wrap="square">
+            <a:spAutoFit/>
+          </a:bodyPr>
+          <a:lstStyle/>
+          <a:p>
+            <a:pPr algn="l"/>
+            <a:r>
+              <a:rPr sz="1500" b="1" i="0">
+                <a:solidFill>
+                  <a:srgbClr val="FFFFFF"/>
+                </a:solidFill>
+                <a:latin typeface="Calibri"/>
+              </a:rPr>
+              <a:t>Ampliar as Redes</a:t>
+            </a:r>
+          </a:p>
+        </p:txBody>
+      </p:sp>
+      <p:sp>
+        <p:nvSpPr>
+          <p:cNvPr id="24" name="TextBox 23"/>
+          <p:cNvSpPr txBox="1"/>
+          <p:nvPr/>
+        </p:nvSpPr>
+        <p:spPr>
+          <a:xfrm>
+            <a:off x="8412478" y="1691640"/>
+            <a:ext cx="3383280" cy="1097280"/>
+          </a:xfrm>
+          <a:prstGeom prst="rect">
+            <a:avLst/>
+          </a:prstGeom>
+          <a:noFill/>
+        </p:spPr>
+        <p:txBody>
+          <a:bodyPr wrap="square">
+            <a:spAutoFit/>
+          </a:bodyPr>
+          <a:lstStyle/>
+          <a:p>
+            <a:pPr algn="l"/>
+            <a:r>
+              <a:rPr sz="1200" b="0" i="0">
+                <a:solidFill>
+                  <a:srgbClr val="212121"/>
+                </a:solidFill>
+                <a:latin typeface="Calibri"/>
+              </a:rPr>
+              <a:t>Ação 1:
+Mentoria estruturada para elevar
+a posição de negros nas redes
+profissionais</a:t>
+            </a:r>
+          </a:p>
+        </p:txBody>
+      </p:sp>
+      <p:sp>
+        <p:nvSpPr>
+          <p:cNvPr id="25" name="Rectangle 24"/>
+          <p:cNvSpPr/>
+          <p:nvPr/>
+        </p:nvSpPr>
+        <p:spPr>
+          <a:xfrm>
+            <a:off x="8412478" y="2834640"/>
+            <a:ext cx="3383280" cy="18288"/>
+          </a:xfrm>
+          <a:prstGeom prst="rect">
+            <a:avLst/>
+          </a:prstGeom>
+          <a:solidFill>
+            <a:srgbClr val="2E7D32"/>
+          </a:solidFill>
+          <a:ln/>
+        </p:spPr>
+        <p:style>
+          <a:lnRef idx="1">
+            <a:schemeClr val="accent1"/>
+          </a:lnRef>
+          <a:fillRef idx="3">
+            <a:schemeClr val="accent1"/>
+          </a:fillRef>
+          <a:effectRef idx="2">
+            <a:schemeClr val="accent1"/>
+          </a:effectRef>
+          <a:fontRef idx="minor">
+            <a:schemeClr val="lt1"/>
+          </a:fontRef>
+        </p:style>
+        <p:txBody>
+          <a:bodyPr rtlCol="0" anchor="ctr"/>
+          <a:lstStyle/>
+          <a:p>
+            <a:pPr algn="ctr"/>
+          </a:p>
+        </p:txBody>
+      </p:sp>
+      <p:sp>
+        <p:nvSpPr>
           <p:cNvPr id="26" name="TextBox 25"/>
+          <p:cNvSpPr txBox="1"/>
+          <p:nvPr/>
+        </p:nvSpPr>
+        <p:spPr>
+          <a:xfrm>
+            <a:off x="8412478" y="2926080"/>
+            <a:ext cx="3383280" cy="1097280"/>
+          </a:xfrm>
+          <a:prstGeom prst="rect">
+            <a:avLst/>
+          </a:prstGeom>
+          <a:noFill/>
+        </p:spPr>
+        <p:txBody>
+          <a:bodyPr wrap="square">
+            <a:spAutoFit/>
+          </a:bodyPr>
+          <a:lstStyle/>
+          <a:p>
+            <a:pPr algn="l"/>
+            <a:r>
+              <a:rPr sz="1200" b="0" i="0">
+                <a:solidFill>
+                  <a:srgbClr val="212121"/>
+                </a:solidFill>
+                <a:latin typeface="Calibri"/>
+              </a:rPr>
+              <a:t>Ação 2:
+30% dos cargos de liderança
+(DAS + corporativo) para negros
+até 2030</a:t>
+            </a:r>
+          </a:p>
+        </p:txBody>
+      </p:sp>
+      <p:sp>
+        <p:nvSpPr>
+          <p:cNvPr id="27" name="Rectangle 26"/>
+          <p:cNvSpPr/>
+          <p:nvPr/>
+        </p:nvSpPr>
+        <p:spPr>
+          <a:xfrm>
+            <a:off x="8321038" y="4114800"/>
+            <a:ext cx="3566160" cy="18288"/>
+          </a:xfrm>
+          <a:prstGeom prst="rect">
+            <a:avLst/>
+          </a:prstGeom>
+          <a:solidFill>
+            <a:srgbClr val="2E7D32"/>
+          </a:solidFill>
+          <a:ln/>
+        </p:spPr>
+        <p:style>
+          <a:lnRef idx="1">
+            <a:schemeClr val="accent1"/>
+          </a:lnRef>
+          <a:fillRef idx="3">
+            <a:schemeClr val="accent1"/>
+          </a:fillRef>
+          <a:effectRef idx="2">
+            <a:schemeClr val="accent1"/>
+          </a:effectRef>
+          <a:fontRef idx="minor">
+            <a:schemeClr val="lt1"/>
+          </a:fontRef>
+        </p:style>
+        <p:txBody>
+          <a:bodyPr rtlCol="0" anchor="ctr"/>
+          <a:lstStyle/>
+          <a:p>
+            <a:pPr algn="ctr"/>
+          </a:p>
+        </p:txBody>
+      </p:sp>
+      <p:sp>
+        <p:nvSpPr>
+          <p:cNvPr id="28" name="TextBox 27"/>
+          <p:cNvSpPr txBox="1"/>
+          <p:nvPr/>
+        </p:nvSpPr>
+        <p:spPr>
+          <a:xfrm>
+            <a:off x="8366758" y="4206240"/>
+            <a:ext cx="3474720" cy="640080"/>
+          </a:xfrm>
+          <a:prstGeom prst="rect">
+            <a:avLst/>
+          </a:prstGeom>
+          <a:noFill/>
+        </p:spPr>
+        <p:txBody>
+          <a:bodyPr wrap="square">
+            <a:spAutoFit/>
+          </a:bodyPr>
+          <a:lstStyle/>
+          <a:p>
+            <a:pPr algn="l"/>
+            <a:r>
+              <a:rPr sz="1100" b="1" i="1">
+                <a:solidFill>
+                  <a:srgbClr val="2E7D32"/>
+                </a:solidFill>
+                <a:latin typeface="Calibri"/>
+              </a:rPr>
+              <a:t>Sem acesso às redes que convertem
+diplomas em empregos, nada muda</a:t>
+            </a:r>
+          </a:p>
+        </p:txBody>
+      </p:sp>
+      <p:sp>
+        <p:nvSpPr>
+          <p:cNvPr id="29" name="TextBox 28"/>
+          <p:cNvSpPr txBox="1"/>
+          <p:nvPr/>
+        </p:nvSpPr>
+        <p:spPr>
+          <a:xfrm>
+            <a:off x="274320" y="6355080"/>
+            <a:ext cx="11612880" cy="347472"/>
+          </a:xfrm>
+          <a:prstGeom prst="rect">
+            <a:avLst/>
+          </a:prstGeom>
+          <a:noFill/>
+        </p:spPr>
+        <p:txBody>
+          <a:bodyPr wrap="square">
+            <a:spAutoFit/>
+          </a:bodyPr>
+          <a:lstStyle/>
+          <a:p>
+            <a:pPr algn="ctr"/>
+            <a:r>
+              <a:rPr sz="1300" b="1" i="0">
+                <a:solidFill>
+                  <a:srgbClr val="C62828"/>
+                </a:solidFill>
+                <a:latin typeface="Calibri"/>
+              </a:rPr>
+              <a:t>⚠  Sem ação simultânea nos três eixos, fechar o gap levará mais de 100 anos no ritmo atual.</a:t>
+            </a:r>
+          </a:p>
+        </p:txBody>
+      </p:sp>
+      <p:sp>
+        <p:nvSpPr>
+          <p:cNvPr id="30" name="Rectangle 29"/>
+          <p:cNvSpPr/>
+          <p:nvPr/>
+        </p:nvSpPr>
+        <p:spPr>
+          <a:xfrm>
+            <a:off x="0" y="6629400"/>
+            <a:ext cx="12188952" cy="228600"/>
+          </a:xfrm>
+          <a:prstGeom prst="rect">
+            <a:avLst/>
+          </a:prstGeom>
+          <a:solidFill>
+            <a:srgbClr val="1B2A4A"/>
+          </a:solidFill>
+          <a:ln/>
+        </p:spPr>
+        <p:style>
+          <a:lnRef idx="1">
+            <a:schemeClr val="accent1"/>
+          </a:lnRef>
+          <a:fillRef idx="3">
+            <a:schemeClr val="accent1"/>
+          </a:fillRef>
+          <a:effectRef idx="2">
+            <a:schemeClr val="accent1"/>
+          </a:effectRef>
+          <a:fontRef idx="minor">
+            <a:schemeClr val="lt1"/>
+          </a:fontRef>
+        </p:style>
+        <p:txBody>
+          <a:bodyPr rtlCol="0" anchor="ctr"/>
+          <a:lstStyle/>
+          <a:p>
+            <a:pPr algn="ctr"/>
+          </a:p>
+        </p:txBody>
+      </p:sp>
+      <p:sp>
+        <p:nvSpPr>
+          <p:cNvPr id="31" name="TextBox 30"/>
           <p:cNvSpPr txBox="1"/>
           <p:nvPr/>
         </p:nvSpPr>
@@ -5981,7 +5859,7 @@
       </p:sp>
       <p:sp>
         <p:nvSpPr>
-          <p:cNvPr id="27" name="TextBox 26"/>
+          <p:cNvPr id="32" name="TextBox 31"/>
           <p:cNvSpPr txBox="1"/>
           <p:nvPr/>
         </p:nvSpPr>
@@ -6009,7 +5887,7 @@
                 </a:solidFill>
                 <a:latin typeface="Calibri"/>
               </a:rPr>
-              <a:t>11/12</a:t>
+              <a:t>11/13</a:t>
             </a:r>
           </a:p>
         </p:txBody>
@@ -6041,6 +5919,976 @@
         <p:spPr>
           <a:xfrm>
             <a:off x="0" y="0"/>
+            <a:ext cx="12188952" cy="960120"/>
+          </a:xfrm>
+          <a:prstGeom prst="rect">
+            <a:avLst/>
+          </a:prstGeom>
+          <a:solidFill>
+            <a:srgbClr val="1B2A4A"/>
+          </a:solidFill>
+          <a:ln/>
+        </p:spPr>
+        <p:style>
+          <a:lnRef idx="1">
+            <a:schemeClr val="accent1"/>
+          </a:lnRef>
+          <a:fillRef idx="3">
+            <a:schemeClr val="accent1"/>
+          </a:fillRef>
+          <a:effectRef idx="2">
+            <a:schemeClr val="accent1"/>
+          </a:effectRef>
+          <a:fontRef idx="minor">
+            <a:schemeClr val="lt1"/>
+          </a:fontRef>
+        </p:style>
+        <p:txBody>
+          <a:bodyPr rtlCol="0" anchor="ctr"/>
+          <a:lstStyle/>
+          <a:p>
+            <a:pPr algn="ctr"/>
+          </a:p>
+        </p:txBody>
+      </p:sp>
+      <p:sp>
+        <p:nvSpPr>
+          <p:cNvPr id="3" name="TextBox 2"/>
+          <p:cNvSpPr txBox="1"/>
+          <p:nvPr/>
+        </p:nvSpPr>
+        <p:spPr>
+          <a:xfrm>
+            <a:off x="320040" y="73152"/>
+            <a:ext cx="11247120" cy="502920"/>
+          </a:xfrm>
+          <a:prstGeom prst="rect">
+            <a:avLst/>
+          </a:prstGeom>
+          <a:noFill/>
+        </p:spPr>
+        <p:txBody>
+          <a:bodyPr wrap="square">
+            <a:spAutoFit/>
+          </a:bodyPr>
+          <a:lstStyle/>
+          <a:p>
+            <a:pPr algn="l"/>
+            <a:r>
+              <a:rPr sz="2600" b="1" i="0">
+                <a:solidFill>
+                  <a:srgbClr val="FFFFFF"/>
+                </a:solidFill>
+                <a:latin typeface="Calibri"/>
+              </a:rPr>
+              <a:t>A Urgência — O Que Está em Jogo</a:t>
+            </a:r>
+          </a:p>
+        </p:txBody>
+      </p:sp>
+      <p:sp>
+        <p:nvSpPr>
+          <p:cNvPr id="4" name="TextBox 3"/>
+          <p:cNvSpPr txBox="1"/>
+          <p:nvPr/>
+        </p:nvSpPr>
+        <p:spPr>
+          <a:xfrm>
+            <a:off x="320040" y="576072"/>
+            <a:ext cx="11247120" cy="320040"/>
+          </a:xfrm>
+          <a:prstGeom prst="rect">
+            <a:avLst/>
+          </a:prstGeom>
+          <a:noFill/>
+        </p:spPr>
+        <p:txBody>
+          <a:bodyPr wrap="square">
+            <a:spAutoFit/>
+          </a:bodyPr>
+          <a:lstStyle/>
+          <a:p>
+            <a:pPr algn="l"/>
+            <a:r>
+              <a:rPr sz="1300" b="0" i="0">
+                <a:solidFill>
+                  <a:srgbClr val="BBDEFB"/>
+                </a:solidFill>
+                <a:latin typeface="Calibri"/>
+              </a:rPr>
+              <a:t>Pleno emprego sem prosperidade: 94,4% empregados, renda real estagnada</a:t>
+            </a:r>
+          </a:p>
+        </p:txBody>
+      </p:sp>
+      <p:pic>
+        <p:nvPicPr>
+          <p:cNvPr id="5" name="Picture 4" descr="estado_h4_tendencia.png"/>
+          <p:cNvPicPr>
+            <a:picLocks noChangeAspect="1"/>
+          </p:cNvPicPr>
+          <p:nvPr/>
+        </p:nvPicPr>
+        <p:blipFill>
+          <a:blip r:embed="rId2"/>
+          <a:stretch>
+            <a:fillRect/>
+          </a:stretch>
+        </p:blipFill>
+        <p:spPr>
+          <a:xfrm>
+            <a:off x="274320" y="1097280"/>
+            <a:ext cx="5669280" cy="2387374"/>
+          </a:xfrm>
+          <a:prstGeom prst="rect">
+            <a:avLst/>
+          </a:prstGeom>
+        </p:spPr>
+      </p:pic>
+      <p:pic>
+        <p:nvPicPr>
+          <p:cNvPr id="6" name="Picture 5" descr="estado_h5_armadilha.png"/>
+          <p:cNvPicPr>
+            <a:picLocks noChangeAspect="1"/>
+          </p:cNvPicPr>
+          <p:nvPr/>
+        </p:nvPicPr>
+        <p:blipFill>
+          <a:blip r:embed="rId3"/>
+          <a:stretch>
+            <a:fillRect/>
+          </a:stretch>
+        </p:blipFill>
+        <p:spPr>
+          <a:xfrm>
+            <a:off x="6126480" y="1097280"/>
+            <a:ext cx="5760720" cy="2423207"/>
+          </a:xfrm>
+          <a:prstGeom prst="rect">
+            <a:avLst/>
+          </a:prstGeom>
+        </p:spPr>
+      </p:pic>
+      <p:sp>
+        <p:nvSpPr>
+          <p:cNvPr id="7" name="Rectangle 6"/>
+          <p:cNvSpPr/>
+          <p:nvPr/>
+        </p:nvSpPr>
+        <p:spPr>
+          <a:xfrm>
+            <a:off x="274320" y="4754880"/>
+            <a:ext cx="2743200" cy="1234440"/>
+          </a:xfrm>
+          <a:prstGeom prst="rect">
+            <a:avLst/>
+          </a:prstGeom>
+          <a:solidFill>
+            <a:srgbClr val="E8F5E9"/>
+          </a:solidFill>
+          <a:ln w="19050">
+            <a:solidFill>
+              <a:srgbClr val="2E7D32"/>
+            </a:solidFill>
+          </a:ln>
+        </p:spPr>
+        <p:style>
+          <a:lnRef idx="1">
+            <a:schemeClr val="accent1"/>
+          </a:lnRef>
+          <a:fillRef idx="3">
+            <a:schemeClr val="accent1"/>
+          </a:fillRef>
+          <a:effectRef idx="2">
+            <a:schemeClr val="accent1"/>
+          </a:effectRef>
+          <a:fontRef idx="minor">
+            <a:schemeClr val="lt1"/>
+          </a:fontRef>
+        </p:style>
+        <p:txBody>
+          <a:bodyPr rtlCol="0" anchor="ctr"/>
+          <a:lstStyle/>
+          <a:p>
+            <a:pPr algn="ctr"/>
+          </a:p>
+        </p:txBody>
+      </p:sp>
+      <p:sp>
+        <p:nvSpPr>
+          <p:cNvPr id="8" name="TextBox 7"/>
+          <p:cNvSpPr txBox="1"/>
+          <p:nvPr/>
+        </p:nvSpPr>
+        <p:spPr>
+          <a:xfrm>
+            <a:off x="365760" y="4828032"/>
+            <a:ext cx="2560320" cy="658368"/>
+          </a:xfrm>
+          <a:prstGeom prst="rect">
+            <a:avLst/>
+          </a:prstGeom>
+          <a:noFill/>
+        </p:spPr>
+        <p:txBody>
+          <a:bodyPr wrap="square">
+            <a:spAutoFit/>
+          </a:bodyPr>
+          <a:lstStyle/>
+          <a:p>
+            <a:pPr algn="ctr"/>
+            <a:r>
+              <a:rPr sz="3400" b="1" i="0">
+                <a:solidFill>
+                  <a:srgbClr val="2E7D32"/>
+                </a:solidFill>
+                <a:latin typeface="Calibri"/>
+              </a:rPr>
+              <a:t>94,4%</a:t>
+            </a:r>
+          </a:p>
+        </p:txBody>
+      </p:sp>
+      <p:sp>
+        <p:nvSpPr>
+          <p:cNvPr id="9" name="TextBox 8"/>
+          <p:cNvSpPr txBox="1"/>
+          <p:nvPr/>
+        </p:nvSpPr>
+        <p:spPr>
+          <a:xfrm>
+            <a:off x="365760" y="5468112"/>
+            <a:ext cx="2560320" cy="320040"/>
+          </a:xfrm>
+          <a:prstGeom prst="rect">
+            <a:avLst/>
+          </a:prstGeom>
+          <a:noFill/>
+        </p:spPr>
+        <p:txBody>
+          <a:bodyPr wrap="square">
+            <a:spAutoFit/>
+          </a:bodyPr>
+          <a:lstStyle/>
+          <a:p>
+            <a:pPr algn="ctr"/>
+            <a:r>
+              <a:rPr sz="1150" b="1" i="0">
+                <a:solidFill>
+                  <a:srgbClr val="212121"/>
+                </a:solidFill>
+                <a:latin typeface="Calibri"/>
+              </a:rPr>
+              <a:t>emprego em 2025</a:t>
+            </a:r>
+          </a:p>
+        </p:txBody>
+      </p:sp>
+      <p:sp>
+        <p:nvSpPr>
+          <p:cNvPr id="10" name="TextBox 9"/>
+          <p:cNvSpPr txBox="1"/>
+          <p:nvPr/>
+        </p:nvSpPr>
+        <p:spPr>
+          <a:xfrm>
+            <a:off x="365760" y="5779008"/>
+            <a:ext cx="2560320" cy="292608"/>
+          </a:xfrm>
+          <a:prstGeom prst="rect">
+            <a:avLst/>
+          </a:prstGeom>
+          <a:noFill/>
+        </p:spPr>
+        <p:txBody>
+          <a:bodyPr wrap="square">
+            <a:spAutoFit/>
+          </a:bodyPr>
+          <a:lstStyle/>
+          <a:p>
+            <a:pPr algn="ctr"/>
+            <a:r>
+              <a:rPr sz="950" b="0" i="1">
+                <a:solidFill>
+                  <a:srgbClr val="616161"/>
+                </a:solidFill>
+                <a:latin typeface="Calibri"/>
+              </a:rPr>
+              <a:t>máxima histórica da série</a:t>
+            </a:r>
+          </a:p>
+        </p:txBody>
+      </p:sp>
+      <p:sp>
+        <p:nvSpPr>
+          <p:cNvPr id="11" name="Rectangle 10"/>
+          <p:cNvSpPr/>
+          <p:nvPr/>
+        </p:nvSpPr>
+        <p:spPr>
+          <a:xfrm>
+            <a:off x="3200400" y="4754880"/>
+            <a:ext cx="2743200" cy="1234440"/>
+          </a:xfrm>
+          <a:prstGeom prst="rect">
+            <a:avLst/>
+          </a:prstGeom>
+          <a:solidFill>
+            <a:srgbClr val="FFEBEE"/>
+          </a:solidFill>
+          <a:ln w="19050">
+            <a:solidFill>
+              <a:srgbClr val="C62828"/>
+            </a:solidFill>
+          </a:ln>
+        </p:spPr>
+        <p:style>
+          <a:lnRef idx="1">
+            <a:schemeClr val="accent1"/>
+          </a:lnRef>
+          <a:fillRef idx="3">
+            <a:schemeClr val="accent1"/>
+          </a:fillRef>
+          <a:effectRef idx="2">
+            <a:schemeClr val="accent1"/>
+          </a:effectRef>
+          <a:fontRef idx="minor">
+            <a:schemeClr val="lt1"/>
+          </a:fontRef>
+        </p:style>
+        <p:txBody>
+          <a:bodyPr rtlCol="0" anchor="ctr"/>
+          <a:lstStyle/>
+          <a:p>
+            <a:pPr algn="ctr"/>
+          </a:p>
+        </p:txBody>
+      </p:sp>
+      <p:sp>
+        <p:nvSpPr>
+          <p:cNvPr id="12" name="TextBox 11"/>
+          <p:cNvSpPr txBox="1"/>
+          <p:nvPr/>
+        </p:nvSpPr>
+        <p:spPr>
+          <a:xfrm>
+            <a:off x="3291840" y="4828032"/>
+            <a:ext cx="2560320" cy="658368"/>
+          </a:xfrm>
+          <a:prstGeom prst="rect">
+            <a:avLst/>
+          </a:prstGeom>
+          <a:noFill/>
+        </p:spPr>
+        <p:txBody>
+          <a:bodyPr wrap="square">
+            <a:spAutoFit/>
+          </a:bodyPr>
+          <a:lstStyle/>
+          <a:p>
+            <a:pPr algn="ctr"/>
+            <a:r>
+              <a:rPr sz="3400" b="1" i="0">
+                <a:solidFill>
+                  <a:srgbClr val="C62828"/>
+                </a:solidFill>
+                <a:latin typeface="Calibri"/>
+              </a:rPr>
+              <a:t>R$1.283</a:t>
+            </a:r>
+          </a:p>
+        </p:txBody>
+      </p:sp>
+      <p:sp>
+        <p:nvSpPr>
+          <p:cNvPr id="13" name="TextBox 12"/>
+          <p:cNvSpPr txBox="1"/>
+          <p:nvPr/>
+        </p:nvSpPr>
+        <p:spPr>
+          <a:xfrm>
+            <a:off x="3291840" y="5468112"/>
+            <a:ext cx="2560320" cy="320040"/>
+          </a:xfrm>
+          <a:prstGeom prst="rect">
+            <a:avLst/>
+          </a:prstGeom>
+          <a:noFill/>
+        </p:spPr>
+        <p:txBody>
+          <a:bodyPr wrap="square">
+            <a:spAutoFit/>
+          </a:bodyPr>
+          <a:lstStyle/>
+          <a:p>
+            <a:pPr algn="ctr"/>
+            <a:r>
+              <a:rPr sz="1150" b="1" i="0">
+                <a:solidFill>
+                  <a:srgbClr val="212121"/>
+                </a:solidFill>
+                <a:latin typeface="Calibri"/>
+              </a:rPr>
+              <a:t>renda real 2025</a:t>
+            </a:r>
+          </a:p>
+        </p:txBody>
+      </p:sp>
+      <p:sp>
+        <p:nvSpPr>
+          <p:cNvPr id="14" name="TextBox 13"/>
+          <p:cNvSpPr txBox="1"/>
+          <p:nvPr/>
+        </p:nvSpPr>
+        <p:spPr>
+          <a:xfrm>
+            <a:off x="3291840" y="5779008"/>
+            <a:ext cx="2560320" cy="292608"/>
+          </a:xfrm>
+          <a:prstGeom prst="rect">
+            <a:avLst/>
+          </a:prstGeom>
+          <a:noFill/>
+        </p:spPr>
+        <p:txBody>
+          <a:bodyPr wrap="square">
+            <a:spAutoFit/>
+          </a:bodyPr>
+          <a:lstStyle/>
+          <a:p>
+            <a:pPr algn="ctr"/>
+            <a:r>
+              <a:rPr sz="950" b="0" i="1">
+                <a:solidFill>
+                  <a:srgbClr val="616161"/>
+                </a:solidFill>
+                <a:latin typeface="Calibri"/>
+              </a:rPr>
+              <a:t>queda vs R$1.345 em 2024</a:t>
+            </a:r>
+          </a:p>
+        </p:txBody>
+      </p:sp>
+      <p:sp>
+        <p:nvSpPr>
+          <p:cNvPr id="15" name="Rectangle 14"/>
+          <p:cNvSpPr/>
+          <p:nvPr/>
+        </p:nvSpPr>
+        <p:spPr>
+          <a:xfrm>
+            <a:off x="6126480" y="4754880"/>
+            <a:ext cx="2743200" cy="1234440"/>
+          </a:xfrm>
+          <a:prstGeom prst="rect">
+            <a:avLst/>
+          </a:prstGeom>
+          <a:solidFill>
+            <a:srgbClr val="FFEBEE"/>
+          </a:solidFill>
+          <a:ln w="19050">
+            <a:solidFill>
+              <a:srgbClr val="C62828"/>
+            </a:solidFill>
+          </a:ln>
+        </p:spPr>
+        <p:style>
+          <a:lnRef idx="1">
+            <a:schemeClr val="accent1"/>
+          </a:lnRef>
+          <a:fillRef idx="3">
+            <a:schemeClr val="accent1"/>
+          </a:fillRef>
+          <a:effectRef idx="2">
+            <a:schemeClr val="accent1"/>
+          </a:effectRef>
+          <a:fontRef idx="minor">
+            <a:schemeClr val="lt1"/>
+          </a:fontRef>
+        </p:style>
+        <p:txBody>
+          <a:bodyPr rtlCol="0" anchor="ctr"/>
+          <a:lstStyle/>
+          <a:p>
+            <a:pPr algn="ctr"/>
+          </a:p>
+        </p:txBody>
+      </p:sp>
+      <p:sp>
+        <p:nvSpPr>
+          <p:cNvPr id="16" name="TextBox 15"/>
+          <p:cNvSpPr txBox="1"/>
+          <p:nvPr/>
+        </p:nvSpPr>
+        <p:spPr>
+          <a:xfrm>
+            <a:off x="6217920" y="4828032"/>
+            <a:ext cx="2560320" cy="658368"/>
+          </a:xfrm>
+          <a:prstGeom prst="rect">
+            <a:avLst/>
+          </a:prstGeom>
+          <a:noFill/>
+        </p:spPr>
+        <p:txBody>
+          <a:bodyPr wrap="square">
+            <a:spAutoFit/>
+          </a:bodyPr>
+          <a:lstStyle/>
+          <a:p>
+            <a:pPr algn="ctr"/>
+            <a:r>
+              <a:rPr sz="3400" b="1" i="0">
+                <a:solidFill>
+                  <a:srgbClr val="C62828"/>
+                </a:solidFill>
+                <a:latin typeface="Calibri"/>
+              </a:rPr>
+              <a:t>11%</a:t>
+            </a:r>
+          </a:p>
+        </p:txBody>
+      </p:sp>
+      <p:sp>
+        <p:nvSpPr>
+          <p:cNvPr id="17" name="TextBox 16"/>
+          <p:cNvSpPr txBox="1"/>
+          <p:nvPr/>
+        </p:nvSpPr>
+        <p:spPr>
+          <a:xfrm>
+            <a:off x="6217920" y="5468112"/>
+            <a:ext cx="2560320" cy="320040"/>
+          </a:xfrm>
+          <a:prstGeom prst="rect">
+            <a:avLst/>
+          </a:prstGeom>
+          <a:noFill/>
+        </p:spPr>
+        <p:txBody>
+          <a:bodyPr wrap="square">
+            <a:spAutoFit/>
+          </a:bodyPr>
+          <a:lstStyle/>
+          <a:p>
+            <a:pPr algn="ctr"/>
+            <a:r>
+              <a:rPr sz="1150" b="1" i="0">
+                <a:solidFill>
+                  <a:srgbClr val="212121"/>
+                </a:solidFill>
+                <a:latin typeface="Calibri"/>
+              </a:rPr>
+              <a:t>negros em alta
+qualificação</a:t>
+            </a:r>
+          </a:p>
+        </p:txBody>
+      </p:sp>
+      <p:sp>
+        <p:nvSpPr>
+          <p:cNvPr id="18" name="TextBox 17"/>
+          <p:cNvSpPr txBox="1"/>
+          <p:nvPr/>
+        </p:nvSpPr>
+        <p:spPr>
+          <a:xfrm>
+            <a:off x="6217920" y="5779008"/>
+            <a:ext cx="2560320" cy="292608"/>
+          </a:xfrm>
+          <a:prstGeom prst="rect">
+            <a:avLst/>
+          </a:prstGeom>
+          <a:noFill/>
+        </p:spPr>
+        <p:txBody>
+          <a:bodyPr wrap="square">
+            <a:spAutoFit/>
+          </a:bodyPr>
+          <a:lstStyle/>
+          <a:p>
+            <a:pPr algn="ctr"/>
+            <a:r>
+              <a:rPr sz="950" b="0" i="1">
+                <a:solidFill>
+                  <a:srgbClr val="616161"/>
+                </a:solidFill>
+                <a:latin typeface="Calibri"/>
+              </a:rPr>
+              <a:t>brancos: 22,4%</a:t>
+            </a:r>
+          </a:p>
+        </p:txBody>
+      </p:sp>
+      <p:sp>
+        <p:nvSpPr>
+          <p:cNvPr id="19" name="Rectangle 18"/>
+          <p:cNvSpPr/>
+          <p:nvPr/>
+        </p:nvSpPr>
+        <p:spPr>
+          <a:xfrm>
+            <a:off x="9052560" y="4754880"/>
+            <a:ext cx="2743200" cy="1234440"/>
+          </a:xfrm>
+          <a:prstGeom prst="rect">
+            <a:avLst/>
+          </a:prstGeom>
+          <a:solidFill>
+            <a:srgbClr val="FFF9E7"/>
+          </a:solidFill>
+          <a:ln w="19050">
+            <a:solidFill>
+              <a:srgbClr val="FF8F00"/>
+            </a:solidFill>
+          </a:ln>
+        </p:spPr>
+        <p:style>
+          <a:lnRef idx="1">
+            <a:schemeClr val="accent1"/>
+          </a:lnRef>
+          <a:fillRef idx="3">
+            <a:schemeClr val="accent1"/>
+          </a:fillRef>
+          <a:effectRef idx="2">
+            <a:schemeClr val="accent1"/>
+          </a:effectRef>
+          <a:fontRef idx="minor">
+            <a:schemeClr val="lt1"/>
+          </a:fontRef>
+        </p:style>
+        <p:txBody>
+          <a:bodyPr rtlCol="0" anchor="ctr"/>
+          <a:lstStyle/>
+          <a:p>
+            <a:pPr algn="ctr"/>
+          </a:p>
+        </p:txBody>
+      </p:sp>
+      <p:sp>
+        <p:nvSpPr>
+          <p:cNvPr id="20" name="TextBox 19"/>
+          <p:cNvSpPr txBox="1"/>
+          <p:nvPr/>
+        </p:nvSpPr>
+        <p:spPr>
+          <a:xfrm>
+            <a:off x="9144000" y="4828032"/>
+            <a:ext cx="2560320" cy="658368"/>
+          </a:xfrm>
+          <a:prstGeom prst="rect">
+            <a:avLst/>
+          </a:prstGeom>
+          <a:noFill/>
+        </p:spPr>
+        <p:txBody>
+          <a:bodyPr wrap="square">
+            <a:spAutoFit/>
+          </a:bodyPr>
+          <a:lstStyle/>
+          <a:p>
+            <a:pPr algn="ctr"/>
+            <a:r>
+              <a:rPr sz="3400" b="1" i="0">
+                <a:solidFill>
+                  <a:srgbClr val="FF8F00"/>
+                </a:solidFill>
+                <a:latin typeface="Calibri"/>
+              </a:rPr>
+              <a:t>+100</a:t>
+            </a:r>
+          </a:p>
+        </p:txBody>
+      </p:sp>
+      <p:sp>
+        <p:nvSpPr>
+          <p:cNvPr id="21" name="TextBox 20"/>
+          <p:cNvSpPr txBox="1"/>
+          <p:nvPr/>
+        </p:nvSpPr>
+        <p:spPr>
+          <a:xfrm>
+            <a:off x="9144000" y="5468112"/>
+            <a:ext cx="2560320" cy="320040"/>
+          </a:xfrm>
+          <a:prstGeom prst="rect">
+            <a:avLst/>
+          </a:prstGeom>
+          <a:noFill/>
+        </p:spPr>
+        <p:txBody>
+          <a:bodyPr wrap="square">
+            <a:spAutoFit/>
+          </a:bodyPr>
+          <a:lstStyle/>
+          <a:p>
+            <a:pPr algn="ctr"/>
+            <a:r>
+              <a:rPr sz="1150" b="1" i="0">
+                <a:solidFill>
+                  <a:srgbClr val="212121"/>
+                </a:solidFill>
+                <a:latin typeface="Calibri"/>
+              </a:rPr>
+              <a:t>anos para fechar
+o gap</a:t>
+            </a:r>
+          </a:p>
+        </p:txBody>
+      </p:sp>
+      <p:sp>
+        <p:nvSpPr>
+          <p:cNvPr id="22" name="TextBox 21"/>
+          <p:cNvSpPr txBox="1"/>
+          <p:nvPr/>
+        </p:nvSpPr>
+        <p:spPr>
+          <a:xfrm>
+            <a:off x="9144000" y="5779008"/>
+            <a:ext cx="2560320" cy="292608"/>
+          </a:xfrm>
+          <a:prstGeom prst="rect">
+            <a:avLst/>
+          </a:prstGeom>
+          <a:noFill/>
+        </p:spPr>
+        <p:txBody>
+          <a:bodyPr wrap="square">
+            <a:spAutoFit/>
+          </a:bodyPr>
+          <a:lstStyle/>
+          <a:p>
+            <a:pPr algn="ctr"/>
+            <a:r>
+              <a:rPr sz="950" b="0" i="1">
+                <a:solidFill>
+                  <a:srgbClr val="616161"/>
+                </a:solidFill>
+                <a:latin typeface="Calibri"/>
+              </a:rPr>
+              <a:t>no ritmo atual</a:t>
+            </a:r>
+          </a:p>
+        </p:txBody>
+      </p:sp>
+      <p:sp>
+        <p:nvSpPr>
+          <p:cNvPr id="23" name="Rectangle 22"/>
+          <p:cNvSpPr/>
+          <p:nvPr/>
+        </p:nvSpPr>
+        <p:spPr>
+          <a:xfrm>
+            <a:off x="274320" y="6309360"/>
+            <a:ext cx="11612880" cy="402336"/>
+          </a:xfrm>
+          <a:prstGeom prst="rect">
+            <a:avLst/>
+          </a:prstGeom>
+          <a:solidFill>
+            <a:srgbClr val="FFF9E7"/>
+          </a:solidFill>
+          <a:ln w="15240">
+            <a:solidFill>
+              <a:srgbClr val="FF8F00"/>
+            </a:solidFill>
+          </a:ln>
+        </p:spPr>
+        <p:style>
+          <a:lnRef idx="1">
+            <a:schemeClr val="accent1"/>
+          </a:lnRef>
+          <a:fillRef idx="3">
+            <a:schemeClr val="accent1"/>
+          </a:fillRef>
+          <a:effectRef idx="2">
+            <a:schemeClr val="accent1"/>
+          </a:effectRef>
+          <a:fontRef idx="minor">
+            <a:schemeClr val="lt1"/>
+          </a:fontRef>
+        </p:style>
+        <p:txBody>
+          <a:bodyPr rtlCol="0" anchor="ctr"/>
+          <a:lstStyle/>
+          <a:p>
+            <a:pPr algn="ctr"/>
+          </a:p>
+        </p:txBody>
+      </p:sp>
+      <p:sp>
+        <p:nvSpPr>
+          <p:cNvPr id="24" name="TextBox 23"/>
+          <p:cNvSpPr txBox="1"/>
+          <p:nvPr/>
+        </p:nvSpPr>
+        <p:spPr>
+          <a:xfrm>
+            <a:off x="411480" y="6400800"/>
+            <a:ext cx="11338560" cy="219456"/>
+          </a:xfrm>
+          <a:prstGeom prst="rect">
+            <a:avLst/>
+          </a:prstGeom>
+          <a:noFill/>
+        </p:spPr>
+        <p:txBody>
+          <a:bodyPr wrap="square">
+            <a:spAutoFit/>
+          </a:bodyPr>
+          <a:lstStyle/>
+          <a:p>
+            <a:pPr algn="ctr"/>
+            <a:r>
+              <a:rPr sz="1300" b="1" i="0">
+                <a:solidFill>
+                  <a:srgbClr val="1B2A4A"/>
+                </a:solidFill>
+                <a:latin typeface="Calibri"/>
+              </a:rPr>
+              <a:t>O Brasil está a produzir emprego, mas não prosperidade igualitária. Pleno emprego com segregação ocupacional é o cenário atual — e não se resolve sozinho.</a:t>
+            </a:r>
+          </a:p>
+        </p:txBody>
+      </p:sp>
+      <p:sp>
+        <p:nvSpPr>
+          <p:cNvPr id="25" name="Rectangle 24"/>
+          <p:cNvSpPr/>
+          <p:nvPr/>
+        </p:nvSpPr>
+        <p:spPr>
+          <a:xfrm>
+            <a:off x="0" y="6629400"/>
+            <a:ext cx="12188952" cy="228600"/>
+          </a:xfrm>
+          <a:prstGeom prst="rect">
+            <a:avLst/>
+          </a:prstGeom>
+          <a:solidFill>
+            <a:srgbClr val="1B2A4A"/>
+          </a:solidFill>
+          <a:ln/>
+        </p:spPr>
+        <p:style>
+          <a:lnRef idx="1">
+            <a:schemeClr val="accent1"/>
+          </a:lnRef>
+          <a:fillRef idx="3">
+            <a:schemeClr val="accent1"/>
+          </a:fillRef>
+          <a:effectRef idx="2">
+            <a:schemeClr val="accent1"/>
+          </a:effectRef>
+          <a:fontRef idx="minor">
+            <a:schemeClr val="lt1"/>
+          </a:fontRef>
+        </p:style>
+        <p:txBody>
+          <a:bodyPr rtlCol="0" anchor="ctr"/>
+          <a:lstStyle/>
+          <a:p>
+            <a:pPr algn="ctr"/>
+          </a:p>
+        </p:txBody>
+      </p:sp>
+      <p:sp>
+        <p:nvSpPr>
+          <p:cNvPr id="26" name="TextBox 25"/>
+          <p:cNvSpPr txBox="1"/>
+          <p:nvPr/>
+        </p:nvSpPr>
+        <p:spPr>
+          <a:xfrm>
+            <a:off x="182880" y="6647688"/>
+            <a:ext cx="10515600" cy="201168"/>
+          </a:xfrm>
+          <a:prstGeom prst="rect">
+            <a:avLst/>
+          </a:prstGeom>
+          <a:noFill/>
+        </p:spPr>
+        <p:txBody>
+          <a:bodyPr wrap="square">
+            <a:spAutoFit/>
+          </a:bodyPr>
+          <a:lstStyle/>
+          <a:p>
+            <a:pPr algn="l"/>
+            <a:r>
+              <a:rPr sz="750" b="0" i="0">
+                <a:solidFill>
+                  <a:srgbClr val="BBDEFB"/>
+                </a:solidFill>
+                <a:latin typeface="Calibri"/>
+              </a:rPr>
+              <a:t>PNAD Contínua 2016–2025  |  15,9 milhões de observações  |  Ricardo Calheiros — MBA USP/ESALQ</a:t>
+            </a:r>
+          </a:p>
+        </p:txBody>
+      </p:sp>
+      <p:sp>
+        <p:nvSpPr>
+          <p:cNvPr id="27" name="TextBox 26"/>
+          <p:cNvSpPr txBox="1"/>
+          <p:nvPr/>
+        </p:nvSpPr>
+        <p:spPr>
+          <a:xfrm>
+            <a:off x="11704320" y="6647688"/>
+            <a:ext cx="457200" cy="201168"/>
+          </a:xfrm>
+          <a:prstGeom prst="rect">
+            <a:avLst/>
+          </a:prstGeom>
+          <a:noFill/>
+        </p:spPr>
+        <p:txBody>
+          <a:bodyPr wrap="square">
+            <a:spAutoFit/>
+          </a:bodyPr>
+          <a:lstStyle/>
+          <a:p>
+            <a:pPr algn="r"/>
+            <a:r>
+              <a:rPr sz="750" b="0" i="0">
+                <a:solidFill>
+                  <a:srgbClr val="FFFFFF"/>
+                </a:solidFill>
+                <a:latin typeface="Calibri"/>
+              </a:rPr>
+              <a:t>12/13</a:t>
+            </a:r>
+          </a:p>
+        </p:txBody>
+      </p:sp>
+    </p:spTree>
+  </p:cSld>
+  <p:clrMapOvr>
+    <a:masterClrMapping/>
+  </p:clrMapOvr>
+</p:sld>
+</file>
+
+<file path=ppt/slides/slide13.xml><?xml version="1.0" encoding="utf-8"?>
+<p:sld xmlns:a="http://schemas.openxmlformats.org/drawingml/2006/main" xmlns:p="http://schemas.openxmlformats.org/presentationml/2006/main" xmlns:r="http://schemas.openxmlformats.org/officeDocument/2006/relationships">
+  <p:cSld>
+    <p:spTree>
+      <p:nvGrpSpPr>
+        <p:cNvPr id="1" name=""/>
+        <p:cNvGrpSpPr/>
+        <p:nvPr/>
+      </p:nvGrpSpPr>
+      <p:grpSpPr/>
+      <p:sp>
+        <p:nvSpPr>
+          <p:cNvPr id="2" name="Rectangle 1"/>
+          <p:cNvSpPr/>
+          <p:nvPr/>
+        </p:nvSpPr>
+        <p:spPr>
+          <a:xfrm>
+            <a:off x="0" y="0"/>
             <a:ext cx="12188952" cy="6858000"/>
           </a:xfrm>
           <a:prstGeom prst="rect">
@@ -6335,7 +7183,7 @@
                 </a:solidFill>
                 <a:latin typeface="Calibri"/>
               </a:rPr>
-              <a:t>25%</a:t>
+              <a:t>31%</a:t>
             </a:r>
           </a:p>
         </p:txBody>
@@ -6824,7 +7672,7 @@
                 </a:solidFill>
                 <a:latin typeface="Calibri"/>
               </a:rPr>
-              <a:t>12/12</a:t>
+              <a:t>13/13</a:t>
             </a:r>
           </a:p>
         </p:txBody>
@@ -7797,7 +8645,7 @@
                 </a:solidFill>
                 <a:latin typeface="Calibri"/>
               </a:rPr>
-              <a:t>2/12</a:t>
+              <a:t>2/13</a:t>
             </a:r>
           </a:p>
         </p:txBody>
@@ -8496,7 +9344,7 @@
                 </a:solidFill>
                 <a:latin typeface="Calibri"/>
               </a:rPr>
-              <a:t>3/12</a:t>
+              <a:t>3/13</a:t>
             </a:r>
           </a:p>
         </p:txBody>
@@ -9317,7 +10165,7 @@
                 </a:solidFill>
                 <a:latin typeface="Calibri"/>
               </a:rPr>
-              <a:t>4/12</a:t>
+              <a:t>4/13</a:t>
             </a:r>
           </a:p>
         </p:txBody>
@@ -9585,7 +10433,7 @@
                 </a:solidFill>
                 <a:latin typeface="Calibri"/>
               </a:rPr>
-              <a:t>25% menos chance</a:t>
+              <a:t>31% menos chance</a:t>
             </a:r>
           </a:p>
         </p:txBody>
@@ -9620,7 +10468,7 @@
                 </a:solidFill>
                 <a:latin typeface="Calibri"/>
               </a:rPr>
-              <a:t>Um trabalhador negro com exatamente as mesmas características que um branco tem 25% menos chance de estar em uma ocupação qualificada (gerente, engenheiro, advogado...)</a:t>
+              <a:t>Um trabalhador negro com exatamente as mesmas características que um branco tem 31% menos chance de estar em uma ocupação qualificada (gerente, engenheiro, advogado...)</a:t>
             </a:r>
           </a:p>
         </p:txBody>
@@ -9700,7 +10548,7 @@
                 </a:solidFill>
                 <a:latin typeface="Calibri"/>
               </a:rPr>
-              <a:t>−1,07 pontos percentuais</a:t>
+              <a:t>−4,8 pontos percentuais</a:t>
             </a:r>
           </a:p>
         </p:txBody>
@@ -9961,7 +10809,7 @@
                 </a:solidFill>
                 <a:latin typeface="Calibri"/>
               </a:rPr>
-              <a:t>5/12</a:t>
+              <a:t>5/13</a:t>
             </a:r>
           </a:p>
         </p:txBody>
@@ -10915,7 +11763,7 @@
                 </a:solidFill>
                 <a:latin typeface="Calibri"/>
               </a:rPr>
-              <a:t>6/12</a:t>
+              <a:t>6/13</a:t>
             </a:r>
           </a:p>
         </p:txBody>
@@ -11694,7 +12542,7 @@
                 </a:solidFill>
                 <a:latin typeface="Calibri"/>
               </a:rPr>
-              <a:t>7/12</a:t>
+              <a:t>7/13</a:t>
             </a:r>
           </a:p>
         </p:txBody>
@@ -12512,7 +13360,7 @@
                 </a:solidFill>
                 <a:latin typeface="Calibri"/>
               </a:rPr>
-              <a:t>8/12</a:t>
+              <a:t>8/13</a:t>
             </a:r>
           </a:p>
         </p:txBody>
@@ -13385,7 +14233,7 @@
                 </a:solidFill>
                 <a:latin typeface="Calibri"/>
               </a:rPr>
-              <a:t>9/12</a:t>
+              <a:t>9/13</a:t>
             </a:r>
           </a:p>
         </p:txBody>

--- a/apresentacao_executiva.pptx
+++ b/apresentacao_executiva.pptx
@@ -11586,7 +11586,7 @@
         <p:spPr>
           <a:xfrm>
             <a:off x="274320" y="5596128"/>
-            <a:ext cx="11612880" cy="566928"/>
+            <a:ext cx="11612880" cy="713232"/>
           </a:xfrm>
           <a:prstGeom prst="rect">
             <a:avLst/>
@@ -11631,7 +11631,7 @@
         <p:spPr>
           <a:xfrm>
             <a:off x="411480" y="5687568"/>
-            <a:ext cx="11338560" cy="384048"/>
+            <a:ext cx="11338560" cy="530352"/>
           </a:xfrm>
           <a:prstGeom prst="rect">
             <a:avLst/>
@@ -11652,7 +11652,7 @@
                 </a:solidFill>
                 <a:latin typeface="Calibri"/>
               </a:rPr>
-              <a:t>Ciclo de vida: o gap cresce de 9% (14–24 anos) para 37,5% (35–44 anos, pico de carreira) — o teto de vidro se fecha exatamente quando as promoções mais importam.</a:t>
+              <a:t>Ciclo de vida (raça): o gap cresce de 9% para 37,5% no pico da carreira. E há um teto de vidro de GÊNERO distinto: mulheres chegam às profissões qualificadas, mas não ao topo dos salários.</a:t>
             </a:r>
           </a:p>
         </p:txBody>

--- a/apresentacao_executiva.pptx
+++ b/apresentacao_executiva.pptx
@@ -4008,7 +4008,7 @@
         <p:spPr>
           <a:xfrm>
             <a:off x="457200" y="1417320"/>
-            <a:ext cx="3931920" cy="4397826"/>
+            <a:ext cx="3931920" cy="3809481"/>
           </a:xfrm>
           <a:prstGeom prst="rect">
             <a:avLst/>

--- a/apresentacao_executiva.pptx
+++ b/apresentacao_executiva.pptx
@@ -13019,7 +13019,7 @@
                 </a:solidFill>
                 <a:latin typeface="Calibri"/>
               </a:rPr>
-              <a:t>−25,2% público vs −29,2% privado</a:t>
+              <a:t>−28,3% público vs −34,5% privado</a:t>
             </a:r>
           </a:p>
         </p:txBody>
@@ -13169,7 +13169,7 @@
                 </a:solidFill>
                 <a:latin typeface="Calibri"/>
               </a:rPr>
-              <a:t>−20,8% público vs −16,9% privado</a:t>
+              <a:t>−20,9% público vs −18,6% privado</a:t>
             </a:r>
           </a:p>
         </p:txBody>

--- a/apresentacao_executiva.pptx
+++ b/apresentacao_executiva.pptx
@@ -10960,7 +10960,7 @@
         <p:spPr>
           <a:xfrm>
             <a:off x="274320" y="1097280"/>
-            <a:ext cx="6583680" cy="3509682"/>
+            <a:ext cx="6583680" cy="3505648"/>
           </a:xfrm>
           <a:prstGeom prst="rect">
             <a:avLst/>

--- a/apresentacao_executiva.pptx
+++ b/apresentacao_executiva.pptx
@@ -4166,7 +4166,7 @@
                 </a:solidFill>
                 <a:latin typeface="Calibri"/>
               </a:rPr>
-              <a:t>Chega a ~21% (DF) em alguns estados e cai a ~1% (MG) em outros. Não é o mesmo problema em todo lugar.</a:t>
+              <a:t>Chega a ~21% (DF) em alguns estados e cai a ~2% (MG) em outros. Não é o mesmo problema em todo lugar.</a:t>
             </a:r>
           </a:p>
         </p:txBody>
@@ -13019,7 +13019,7 @@
                 </a:solidFill>
                 <a:latin typeface="Calibri"/>
               </a:rPr>
-              <a:t>−28,3% público vs −34,5% privado</a:t>
+              <a:t>−28,1% público vs −34,3% privado</a:t>
             </a:r>
           </a:p>
         </p:txBody>
@@ -13169,7 +13169,7 @@
                 </a:solidFill>
                 <a:latin typeface="Calibri"/>
               </a:rPr>
-              <a:t>−20,9% público vs −18,6% privado</a:t>
+              <a:t>−21,2% público vs −18,9% privado</a:t>
             </a:r>
           </a:p>
         </p:txBody>

--- a/apresentacao_executiva.pptx
+++ b/apresentacao_executiva.pptx
@@ -10548,7 +10548,7 @@
                 </a:solidFill>
                 <a:latin typeface="Calibri"/>
               </a:rPr>
-              <a:t>−4,8 pontos percentuais</a:t>
+              <a:t>−4,7 pontos percentuais</a:t>
             </a:r>
           </a:p>
         </p:txBody>

--- a/apresentacao_executiva.pptx
+++ b/apresentacao_executiva.pptx
@@ -18,6 +18,7 @@
     <p:sldId id="266" r:id="rId17"/>
     <p:sldId id="267" r:id="rId18"/>
     <p:sldId id="268" r:id="rId19"/>
+    <p:sldId id="269" r:id="rId20"/>
   </p:sldIdLst>
   <p:sldSz cx="12188952" cy="6858000" type="screen4x3"/>
   <p:notesSz cx="6858000" cy="9144000"/>
@@ -3916,7 +3917,7 @@
                 </a:solidFill>
                 <a:latin typeface="Calibri"/>
               </a:rPr>
-              <a:t>O Racismo Tem Endereço — Varia Muito Entre Estados</a:t>
+              <a:t>O Custo para Todos Nós — Inclusão Produtiva como Oportunidade</a:t>
             </a:r>
           </a:p>
         </p:txBody>
@@ -3951,49 +3952,14 @@
                 </a:solidFill>
                 <a:latin typeface="Calibri"/>
               </a:rPr>
-              <a:t>A desvantagem racial é bem maior em alguns estados — e a política pode (e deve) focar onde mais dói</a:t>
-            </a:r>
-          </a:p>
-        </p:txBody>
-      </p:sp>
-      <p:sp>
-        <p:nvSpPr>
-          <p:cNvPr id="5" name="TextBox 4"/>
-          <p:cNvSpPr txBox="1"/>
-          <p:nvPr/>
-        </p:nvSpPr>
-        <p:spPr>
-          <a:xfrm>
-            <a:off x="365760" y="1051560"/>
-            <a:ext cx="11430000" cy="365760"/>
-          </a:xfrm>
-          <a:prstGeom prst="rect">
-            <a:avLst/>
-          </a:prstGeom>
-          <a:noFill/>
-        </p:spPr>
-        <p:txBody>
-          <a:bodyPr wrap="square">
-            <a:spAutoFit/>
-          </a:bodyPr>
-          <a:lstStyle/>
-          <a:p>
-            <a:pPr algn="l"/>
-            <a:r>
-              <a:rPr sz="1600" b="1" i="0">
-                <a:solidFill>
-                  <a:srgbClr val="1B2A4A"/>
-                </a:solidFill>
-                <a:latin typeface="Calibri"/>
-              </a:rPr>
-              <a:t>A mesma injustiça, em tamanhos muito diferentes pelo país:</a:t>
+              <a:t>Hsieh et al. (2019): discriminação racial e de gênero custou ao EUA 20–40% do crescimento 1960–2010</a:t>
             </a:r>
           </a:p>
         </p:txBody>
       </p:sp>
       <p:pic>
         <p:nvPicPr>
-          <p:cNvPr id="6" name="Picture 5" descr="mapa_po_regional.png"/>
+          <p:cNvPr id="5" name="Picture 4" descr="estado_h4_inclusao.png"/>
           <p:cNvPicPr>
             <a:picLocks noChangeAspect="1"/>
           </p:cNvPicPr>
@@ -4007,14 +3973,50 @@
         </p:blipFill>
         <p:spPr>
           <a:xfrm>
-            <a:off x="457200" y="1417320"/>
-            <a:ext cx="3931920" cy="3809481"/>
+            <a:off x="274320" y="1097280"/>
+            <a:ext cx="5943600" cy="2497233"/>
           </a:xfrm>
           <a:prstGeom prst="rect">
             <a:avLst/>
           </a:prstGeom>
         </p:spPr>
       </p:pic>
+      <p:sp>
+        <p:nvSpPr>
+          <p:cNvPr id="6" name="TextBox 5"/>
+          <p:cNvSpPr txBox="1"/>
+          <p:nvPr/>
+        </p:nvSpPr>
+        <p:spPr>
+          <a:xfrm>
+            <a:off x="6675120" y="1097280"/>
+            <a:ext cx="5303520" cy="594360"/>
+          </a:xfrm>
+          <a:prstGeom prst="rect">
+            <a:avLst/>
+          </a:prstGeom>
+          <a:noFill/>
+        </p:spPr>
+        <p:txBody>
+          <a:bodyPr wrap="square">
+            <a:spAutoFit/>
+          </a:bodyPr>
+          <a:lstStyle/>
+          <a:p>
+            <a:pPr algn="l"/>
+            <a:r>
+              <a:rPr sz="1600" b="1" i="0">
+                <a:solidFill>
+                  <a:srgbClr val="1B2A4A"/>
+                </a:solidFill>
+                <a:latin typeface="Calibri"/>
+              </a:rPr>
+              <a:t>O que aconteceria se negros tivessem
+acesso igual às melhores vagas?</a:t>
+            </a:r>
+          </a:p>
+        </p:txBody>
+      </p:sp>
       <p:sp>
         <p:nvSpPr>
           <p:cNvPr id="7" name="Rectangle 6"/>
@@ -4023,8 +4025,8 @@
         </p:nvSpPr>
         <p:spPr>
           <a:xfrm>
-            <a:off x="4937760" y="1417320"/>
-            <a:ext cx="6949440" cy="1371600"/>
+            <a:off x="6675120" y="1828800"/>
+            <a:ext cx="5303520" cy="1261872"/>
           </a:xfrm>
           <a:prstGeom prst="rect">
             <a:avLst/>
@@ -4068,8 +4070,8 @@
         </p:nvSpPr>
         <p:spPr>
           <a:xfrm>
-            <a:off x="4937760" y="1417320"/>
-            <a:ext cx="128016" cy="1371600"/>
+            <a:off x="6675120" y="1828800"/>
+            <a:ext cx="5303520" cy="365760"/>
           </a:xfrm>
           <a:prstGeom prst="rect">
             <a:avLst/>
@@ -4109,8 +4111,8 @@
         </p:nvSpPr>
         <p:spPr>
           <a:xfrm>
-            <a:off x="5138928" y="1481328"/>
-            <a:ext cx="6675120" cy="365760"/>
+            <a:off x="6812280" y="1865376"/>
+            <a:ext cx="5029200" cy="347472"/>
           </a:xfrm>
           <a:prstGeom prst="rect">
             <a:avLst/>
@@ -4125,27 +4127,62 @@
           <a:p>
             <a:pPr algn="l"/>
             <a:r>
-              <a:rPr sz="1350" b="1" i="0">
+              <a:rPr sz="1400" b="1" i="0">
+                <a:solidFill>
+                  <a:srgbClr val="FFFFFF"/>
+                </a:solidFill>
+                <a:latin typeface="Calibri"/>
+              </a:rPr>
+              <a:t>Hoje</a:t>
+            </a:r>
+          </a:p>
+        </p:txBody>
+      </p:sp>
+      <p:sp>
+        <p:nvSpPr>
+          <p:cNvPr id="10" name="TextBox 9"/>
+          <p:cNvSpPr txBox="1"/>
+          <p:nvPr/>
+        </p:nvSpPr>
+        <p:spPr>
+          <a:xfrm>
+            <a:off x="6812280" y="2240280"/>
+            <a:ext cx="5029200" cy="347472"/>
+          </a:xfrm>
+          <a:prstGeom prst="rect">
+            <a:avLst/>
+          </a:prstGeom>
+          <a:noFill/>
+        </p:spPr>
+        <p:txBody>
+          <a:bodyPr wrap="square">
+            <a:spAutoFit/>
+          </a:bodyPr>
+          <a:lstStyle/>
+          <a:p>
+            <a:pPr algn="l"/>
+            <a:r>
+              <a:rPr sz="1200" b="1" i="0">
                 <a:solidFill>
                   <a:srgbClr val="C62828"/>
                 </a:solidFill>
                 <a:latin typeface="Calibri"/>
               </a:rPr>
-              <a:t>O gap muda de estado para estado</a:t>
-            </a:r>
-          </a:p>
-        </p:txBody>
-      </p:sp>
-      <p:sp>
-        <p:nvSpPr>
-          <p:cNvPr id="10" name="TextBox 9"/>
-          <p:cNvSpPr txBox="1"/>
-          <p:nvPr/>
-        </p:nvSpPr>
-        <p:spPr>
-          <a:xfrm>
-            <a:off x="5138928" y="1892808"/>
-            <a:ext cx="6675120" cy="841248"/>
+              <a:t>Mediana salarial: R$2.000 (brancos) vs R$1.450 (negros) — gap de 27,5%</a:t>
+            </a:r>
+          </a:p>
+        </p:txBody>
+      </p:sp>
+      <p:sp>
+        <p:nvSpPr>
+          <p:cNvPr id="11" name="TextBox 10"/>
+          <p:cNvSpPr txBox="1"/>
+          <p:nvPr/>
+        </p:nvSpPr>
+        <p:spPr>
+          <a:xfrm>
+            <a:off x="6812280" y="2578608"/>
+            <a:ext cx="5029200" cy="347472"/>
           </a:xfrm>
           <a:prstGeom prst="rect">
             <a:avLst/>
@@ -4160,59 +4197,14 @@
           <a:p>
             <a:pPr algn="l"/>
             <a:r>
-              <a:rPr sz="1200" b="0" i="0">
-                <a:solidFill>
-                  <a:srgbClr val="212121"/>
-                </a:solidFill>
-                <a:latin typeface="Calibri"/>
-              </a:rPr>
-              <a:t>Chega a ~21% (DF) em alguns estados e cai a ~2% (MG) em outros. Não é o mesmo problema em todo lugar.</a:t>
-            </a:r>
-          </a:p>
-        </p:txBody>
-      </p:sp>
-      <p:sp>
-        <p:nvSpPr>
-          <p:cNvPr id="11" name="Rectangle 10"/>
-          <p:cNvSpPr/>
-          <p:nvPr/>
-        </p:nvSpPr>
-        <p:spPr>
-          <a:xfrm>
-            <a:off x="4937760" y="2898648"/>
-            <a:ext cx="6949440" cy="1371600"/>
-          </a:xfrm>
-          <a:prstGeom prst="rect">
-            <a:avLst/>
-          </a:prstGeom>
-          <a:solidFill>
-            <a:srgbClr val="F5F5F5"/>
-          </a:solidFill>
-          <a:ln w="25400">
-            <a:solidFill>
-              <a:srgbClr val="FF8F00"/>
-            </a:solidFill>
-          </a:ln>
-        </p:spPr>
-        <p:style>
-          <a:lnRef idx="1">
-            <a:schemeClr val="accent1"/>
-          </a:lnRef>
-          <a:fillRef idx="3">
-            <a:schemeClr val="accent1"/>
-          </a:fillRef>
-          <a:effectRef idx="2">
-            <a:schemeClr val="accent1"/>
-          </a:effectRef>
-          <a:fontRef idx="minor">
-            <a:schemeClr val="lt1"/>
-          </a:fontRef>
-        </p:style>
-        <p:txBody>
-          <a:bodyPr rtlCol="0" anchor="ctr"/>
-          <a:lstStyle/>
-          <a:p>
-            <a:pPr algn="ctr"/>
+              <a:rPr sz="1100" b="0" i="1">
+                <a:solidFill>
+                  <a:srgbClr val="616161"/>
+                </a:solidFill>
+                <a:latin typeface="Calibri"/>
+              </a:rPr>
+              <a:t>Gap médio de 37,5%; em cargos de alta qualificação: 11% negros vs 22% brancos</a:t>
+            </a:r>
           </a:p>
         </p:txBody>
       </p:sp>
@@ -4224,119 +4216,8 @@
         </p:nvSpPr>
         <p:spPr>
           <a:xfrm>
-            <a:off x="4937760" y="2898648"/>
-            <a:ext cx="128016" cy="1371600"/>
-          </a:xfrm>
-          <a:prstGeom prst="rect">
-            <a:avLst/>
-          </a:prstGeom>
-          <a:solidFill>
-            <a:srgbClr val="FF8F00"/>
-          </a:solidFill>
-          <a:ln/>
-        </p:spPr>
-        <p:style>
-          <a:lnRef idx="1">
-            <a:schemeClr val="accent1"/>
-          </a:lnRef>
-          <a:fillRef idx="3">
-            <a:schemeClr val="accent1"/>
-          </a:fillRef>
-          <a:effectRef idx="2">
-            <a:schemeClr val="accent1"/>
-          </a:effectRef>
-          <a:fontRef idx="minor">
-            <a:schemeClr val="lt1"/>
-          </a:fontRef>
-        </p:style>
-        <p:txBody>
-          <a:bodyPr rtlCol="0" anchor="ctr"/>
-          <a:lstStyle/>
-          <a:p>
-            <a:pPr algn="ctr"/>
-          </a:p>
-        </p:txBody>
-      </p:sp>
-      <p:sp>
-        <p:nvSpPr>
-          <p:cNvPr id="13" name="TextBox 12"/>
-          <p:cNvSpPr txBox="1"/>
-          <p:nvPr/>
-        </p:nvSpPr>
-        <p:spPr>
-          <a:xfrm>
-            <a:off x="5138928" y="2962656"/>
-            <a:ext cx="6675120" cy="365760"/>
-          </a:xfrm>
-          <a:prstGeom prst="rect">
-            <a:avLst/>
-          </a:prstGeom>
-          <a:noFill/>
-        </p:spPr>
-        <p:txBody>
-          <a:bodyPr wrap="square">
-            <a:spAutoFit/>
-          </a:bodyPr>
-          <a:lstStyle/>
-          <a:p>
-            <a:pPr algn="l"/>
-            <a:r>
-              <a:rPr sz="1350" b="1" i="0">
-                <a:solidFill>
-                  <a:srgbClr val="FF8F00"/>
-                </a:solidFill>
-                <a:latin typeface="Calibri"/>
-              </a:rPr>
-              <a:t>Maior onde há mais riqueza</a:t>
-            </a:r>
-          </a:p>
-        </p:txBody>
-      </p:sp>
-      <p:sp>
-        <p:nvSpPr>
-          <p:cNvPr id="14" name="TextBox 13"/>
-          <p:cNvSpPr txBox="1"/>
-          <p:nvPr/>
-        </p:nvSpPr>
-        <p:spPr>
-          <a:xfrm>
-            <a:off x="5138928" y="3374136"/>
-            <a:ext cx="6675120" cy="841248"/>
-          </a:xfrm>
-          <a:prstGeom prst="rect">
-            <a:avLst/>
-          </a:prstGeom>
-          <a:noFill/>
-        </p:spPr>
-        <p:txBody>
-          <a:bodyPr wrap="square">
-            <a:spAutoFit/>
-          </a:bodyPr>
-          <a:lstStyle/>
-          <a:p>
-            <a:pPr algn="l"/>
-            <a:r>
-              <a:rPr sz="1200" b="0" i="0">
-                <a:solidFill>
-                  <a:srgbClr val="212121"/>
-                </a:solidFill>
-                <a:latin typeface="Calibri"/>
-              </a:rPr>
-              <a:t>As maiores desvantagens aparecem no Distrito Federal, no Rio e em São Paulo — crescimento econômico, sozinho, não dissolve a barreira racial.</a:t>
-            </a:r>
-          </a:p>
-        </p:txBody>
-      </p:sp>
-      <p:sp>
-        <p:nvSpPr>
-          <p:cNvPr id="15" name="Rectangle 14"/>
-          <p:cNvSpPr/>
-          <p:nvPr/>
-        </p:nvSpPr>
-        <p:spPr>
-          <a:xfrm>
-            <a:off x="4937760" y="4379976"/>
-            <a:ext cx="6949440" cy="1371600"/>
+            <a:off x="6675120" y="3200400"/>
+            <a:ext cx="5303520" cy="1261872"/>
           </a:xfrm>
           <a:prstGeom prst="rect">
             <a:avLst/>
@@ -4374,14 +4255,14 @@
       </p:sp>
       <p:sp>
         <p:nvSpPr>
-          <p:cNvPr id="16" name="Rectangle 15"/>
+          <p:cNvPr id="13" name="Rectangle 12"/>
           <p:cNvSpPr/>
           <p:nvPr/>
         </p:nvSpPr>
         <p:spPr>
           <a:xfrm>
-            <a:off x="4937760" y="4379976"/>
-            <a:ext cx="128016" cy="1371600"/>
+            <a:off x="6675120" y="3200400"/>
+            <a:ext cx="5303520" cy="365760"/>
           </a:xfrm>
           <a:prstGeom prst="rect">
             <a:avLst/>
@@ -4415,14 +4296,14 @@
       </p:sp>
       <p:sp>
         <p:nvSpPr>
-          <p:cNvPr id="17" name="TextBox 16"/>
-          <p:cNvSpPr txBox="1"/>
-          <p:nvPr/>
-        </p:nvSpPr>
-        <p:spPr>
-          <a:xfrm>
-            <a:off x="5138928" y="4443984"/>
-            <a:ext cx="6675120" cy="365760"/>
+          <p:cNvPr id="14" name="TextBox 13"/>
+          <p:cNvSpPr txBox="1"/>
+          <p:nvPr/>
+        </p:nvSpPr>
+        <p:spPr>
+          <a:xfrm>
+            <a:off x="6812280" y="3236976"/>
+            <a:ext cx="5029200" cy="347472"/>
           </a:xfrm>
           <a:prstGeom prst="rect">
             <a:avLst/>
@@ -4437,27 +4318,62 @@
           <a:p>
             <a:pPr algn="l"/>
             <a:r>
-              <a:rPr sz="1350" b="1" i="0">
+              <a:rPr sz="1400" b="1" i="0">
+                <a:solidFill>
+                  <a:srgbClr val="FFFFFF"/>
+                </a:solidFill>
+                <a:latin typeface="Calibri"/>
+              </a:rPr>
+              <a:t>+127% renda</a:t>
+            </a:r>
+          </a:p>
+        </p:txBody>
+      </p:sp>
+      <p:sp>
+        <p:nvSpPr>
+          <p:cNvPr id="15" name="TextBox 14"/>
+          <p:cNvSpPr txBox="1"/>
+          <p:nvPr/>
+        </p:nvSpPr>
+        <p:spPr>
+          <a:xfrm>
+            <a:off x="6812280" y="3611880"/>
+            <a:ext cx="5029200" cy="347472"/>
+          </a:xfrm>
+          <a:prstGeom prst="rect">
+            <a:avLst/>
+          </a:prstGeom>
+          <a:noFill/>
+        </p:spPr>
+        <p:txBody>
+          <a:bodyPr wrap="square">
+            <a:spAutoFit/>
+          </a:bodyPr>
+          <a:lstStyle/>
+          <a:p>
+            <a:pPr algn="l"/>
+            <a:r>
+              <a:rPr sz="1200" b="1" i="0">
                 <a:solidFill>
                   <a:srgbClr val="2E7D32"/>
                 </a:solidFill>
                 <a:latin typeface="Calibri"/>
               </a:rPr>
-              <a:t>Focar onde dói rende muito mais</a:t>
-            </a:r>
-          </a:p>
-        </p:txBody>
-      </p:sp>
-      <p:sp>
-        <p:nvSpPr>
-          <p:cNvPr id="18" name="TextBox 17"/>
-          <p:cNvSpPr txBox="1"/>
-          <p:nvPr/>
-        </p:nvSpPr>
-        <p:spPr>
-          <a:xfrm>
-            <a:off x="5138928" y="4855464"/>
-            <a:ext cx="6675120" cy="841248"/>
+              <a:t>Se negros tivessem a mesma distribuição ocupacional que brancos</a:t>
+            </a:r>
+          </a:p>
+        </p:txBody>
+      </p:sp>
+      <p:sp>
+        <p:nvSpPr>
+          <p:cNvPr id="16" name="TextBox 15"/>
+          <p:cNvSpPr txBox="1"/>
+          <p:nvPr/>
+        </p:nvSpPr>
+        <p:spPr>
+          <a:xfrm>
+            <a:off x="6812280" y="3950208"/>
+            <a:ext cx="5029200" cy="347472"/>
           </a:xfrm>
           <a:prstGeom prst="rect">
             <a:avLst/>
@@ -4472,37 +4388,37 @@
           <a:p>
             <a:pPr algn="l"/>
             <a:r>
-              <a:rPr sz="1200" b="0" i="0">
-                <a:solidFill>
-                  <a:srgbClr val="212121"/>
-                </a:solidFill>
-                <a:latin typeface="Calibri"/>
-              </a:rPr>
-              <a:t>Concentrar o orçamento nos estados de maior desvantagem entrega até +68% mais resultado do que espalhar o dinheiro por igual.</a:t>
-            </a:r>
-          </a:p>
-        </p:txBody>
-      </p:sp>
-      <p:sp>
-        <p:nvSpPr>
-          <p:cNvPr id="19" name="Rectangle 18"/>
+              <a:rPr sz="1100" b="0" i="1">
+                <a:solidFill>
+                  <a:srgbClr val="616161"/>
+                </a:solidFill>
+                <a:latin typeface="Calibri"/>
+              </a:rPr>
+              <a:t>A renda média dos trabalhadores negros mais que dobraria — sem nenhum aumento de produtividade</a:t>
+            </a:r>
+          </a:p>
+        </p:txBody>
+      </p:sp>
+      <p:sp>
+        <p:nvSpPr>
+          <p:cNvPr id="17" name="Rectangle 16"/>
           <p:cNvSpPr/>
           <p:nvPr/>
         </p:nvSpPr>
         <p:spPr>
           <a:xfrm>
-            <a:off x="274320" y="5897880"/>
-            <a:ext cx="11612880" cy="603504"/>
+            <a:off x="6675120" y="4572000"/>
+            <a:ext cx="5303520" cy="1261872"/>
           </a:xfrm>
           <a:prstGeom prst="rect">
             <a:avLst/>
           </a:prstGeom>
           <a:solidFill>
-            <a:srgbClr val="FFF9E7"/>
+            <a:srgbClr val="F5F5F5"/>
           </a:solidFill>
-          <a:ln w="15240">
+          <a:ln w="25400">
             <a:solidFill>
-              <a:srgbClr val="FF8F00"/>
+              <a:srgbClr val="00696D"/>
             </a:solidFill>
           </a:ln>
         </p:spPr>
@@ -4530,55 +4446,20 @@
       </p:sp>
       <p:sp>
         <p:nvSpPr>
-          <p:cNvPr id="20" name="TextBox 19"/>
-          <p:cNvSpPr txBox="1"/>
-          <p:nvPr/>
-        </p:nvSpPr>
-        <p:spPr>
-          <a:xfrm>
-            <a:off x="411480" y="5989320"/>
-            <a:ext cx="11338560" cy="420624"/>
-          </a:xfrm>
-          <a:prstGeom prst="rect">
-            <a:avLst/>
-          </a:prstGeom>
-          <a:noFill/>
-        </p:spPr>
-        <p:txBody>
-          <a:bodyPr wrap="square">
-            <a:spAutoFit/>
-          </a:bodyPr>
-          <a:lstStyle/>
-          <a:p>
-            <a:pPr algn="ctr"/>
-            <a:r>
-              <a:rPr sz="1300" b="1" i="0">
-                <a:solidFill>
-                  <a:srgbClr val="1B2A4A"/>
-                </a:solidFill>
-                <a:latin typeface="Calibri"/>
-              </a:rPr>
-              <a:t>Em linguagem simples: tratar o país inteiro igual desperdiça recursos. Levar a política primeiro aos estados ★ (DF, AM, TO, PA, AC) multiplica o impacto do mesmo orçamento.</a:t>
-            </a:r>
-          </a:p>
-        </p:txBody>
-      </p:sp>
-      <p:sp>
-        <p:nvSpPr>
-          <p:cNvPr id="21" name="Rectangle 20"/>
+          <p:cNvPr id="18" name="Rectangle 17"/>
           <p:cNvSpPr/>
           <p:nvPr/>
         </p:nvSpPr>
         <p:spPr>
           <a:xfrm>
-            <a:off x="0" y="6629400"/>
-            <a:ext cx="12188952" cy="228600"/>
+            <a:off x="6675120" y="4572000"/>
+            <a:ext cx="5303520" cy="365760"/>
           </a:xfrm>
           <a:prstGeom prst="rect">
             <a:avLst/>
           </a:prstGeom>
           <a:solidFill>
-            <a:srgbClr val="1B2A4A"/>
+            <a:srgbClr val="00696D"/>
           </a:solidFill>
           <a:ln/>
         </p:spPr>
@@ -4606,7 +4487,153 @@
       </p:sp>
       <p:sp>
         <p:nvSpPr>
-          <p:cNvPr id="22" name="TextBox 21"/>
+          <p:cNvPr id="19" name="TextBox 18"/>
+          <p:cNvSpPr txBox="1"/>
+          <p:nvPr/>
+        </p:nvSpPr>
+        <p:spPr>
+          <a:xfrm>
+            <a:off x="6812280" y="4608576"/>
+            <a:ext cx="5029200" cy="347472"/>
+          </a:xfrm>
+          <a:prstGeom prst="rect">
+            <a:avLst/>
+          </a:prstGeom>
+          <a:noFill/>
+        </p:spPr>
+        <p:txBody>
+          <a:bodyPr wrap="square">
+            <a:spAutoFit/>
+          </a:bodyPr>
+          <a:lstStyle/>
+          <a:p>
+            <a:pPr algn="l"/>
+            <a:r>
+              <a:rPr sz="1400" b="1" i="0">
+                <a:solidFill>
+                  <a:srgbClr val="FFFFFF"/>
+                </a:solidFill>
+                <a:latin typeface="Calibri"/>
+              </a:rPr>
+              <a:t>Proxy: +74 p.p. PIB</a:t>
+            </a:r>
+          </a:p>
+        </p:txBody>
+      </p:sp>
+      <p:sp>
+        <p:nvSpPr>
+          <p:cNvPr id="20" name="TextBox 19"/>
+          <p:cNvSpPr txBox="1"/>
+          <p:nvPr/>
+        </p:nvSpPr>
+        <p:spPr>
+          <a:xfrm>
+            <a:off x="6812280" y="4983480"/>
+            <a:ext cx="5029200" cy="347472"/>
+          </a:xfrm>
+          <a:prstGeom prst="rect">
+            <a:avLst/>
+          </a:prstGeom>
+          <a:noFill/>
+        </p:spPr>
+        <p:txBody>
+          <a:bodyPr wrap="square">
+            <a:spAutoFit/>
+          </a:bodyPr>
+          <a:lstStyle/>
+          <a:p>
+            <a:pPr algn="l"/>
+            <a:r>
+              <a:rPr sz="1200" b="1" i="0">
+                <a:solidFill>
+                  <a:srgbClr val="00696D"/>
+                </a:solidFill>
+                <a:latin typeface="Calibri"/>
+              </a:rPr>
+              <a:t>Estimativa conservadora do impacto no crescimento</a:t>
+            </a:r>
+          </a:p>
+        </p:txBody>
+      </p:sp>
+      <p:sp>
+        <p:nvSpPr>
+          <p:cNvPr id="21" name="TextBox 20"/>
+          <p:cNvSpPr txBox="1"/>
+          <p:nvPr/>
+        </p:nvSpPr>
+        <p:spPr>
+          <a:xfrm>
+            <a:off x="6812280" y="5321808"/>
+            <a:ext cx="5029200" cy="347472"/>
+          </a:xfrm>
+          <a:prstGeom prst="rect">
+            <a:avLst/>
+          </a:prstGeom>
+          <a:noFill/>
+        </p:spPr>
+        <p:txBody>
+          <a:bodyPr wrap="square">
+            <a:spAutoFit/>
+          </a:bodyPr>
+          <a:lstStyle/>
+          <a:p>
+            <a:pPr algn="l"/>
+            <a:r>
+              <a:rPr sz="1100" b="0" i="1">
+                <a:solidFill>
+                  <a:srgbClr val="616161"/>
+                </a:solidFill>
+                <a:latin typeface="Calibri"/>
+              </a:rPr>
+              <a:t>Incluir negros nas melhores vagas seria um dos maiores motores de crescimento disponíveis hoje</a:t>
+            </a:r>
+          </a:p>
+        </p:txBody>
+      </p:sp>
+      <p:sp>
+        <p:nvSpPr>
+          <p:cNvPr id="22" name="Rectangle 21"/>
+          <p:cNvSpPr/>
+          <p:nvPr/>
+        </p:nvSpPr>
+        <p:spPr>
+          <a:xfrm>
+            <a:off x="0" y="6629400"/>
+            <a:ext cx="12188952" cy="228600"/>
+          </a:xfrm>
+          <a:prstGeom prst="rect">
+            <a:avLst/>
+          </a:prstGeom>
+          <a:solidFill>
+            <a:srgbClr val="1B2A4A"/>
+          </a:solidFill>
+          <a:ln/>
+        </p:spPr>
+        <p:style>
+          <a:lnRef idx="1">
+            <a:schemeClr val="accent1"/>
+          </a:lnRef>
+          <a:fillRef idx="3">
+            <a:schemeClr val="accent1"/>
+          </a:fillRef>
+          <a:effectRef idx="2">
+            <a:schemeClr val="accent1"/>
+          </a:effectRef>
+          <a:fontRef idx="minor">
+            <a:schemeClr val="lt1"/>
+          </a:fontRef>
+        </p:style>
+        <p:txBody>
+          <a:bodyPr rtlCol="0" anchor="ctr"/>
+          <a:lstStyle/>
+          <a:p>
+            <a:pPr algn="ctr"/>
+          </a:p>
+        </p:txBody>
+      </p:sp>
+      <p:sp>
+        <p:nvSpPr>
+          <p:cNvPr id="23" name="TextBox 22"/>
           <p:cNvSpPr txBox="1"/>
           <p:nvPr/>
         </p:nvSpPr>
@@ -4641,7 +4668,7 @@
       </p:sp>
       <p:sp>
         <p:nvSpPr>
-          <p:cNvPr id="23" name="TextBox 22"/>
+          <p:cNvPr id="24" name="TextBox 23"/>
           <p:cNvSpPr txBox="1"/>
           <p:nvPr/>
         </p:nvSpPr>
@@ -4669,7 +4696,7 @@
                 </a:solidFill>
                 <a:latin typeface="Calibri"/>
               </a:rPr>
-              <a:t>10/13</a:t>
+              <a:t>10/14</a:t>
             </a:r>
           </a:p>
         </p:txBody>
@@ -4763,7 +4790,7 @@
                 </a:solidFill>
                 <a:latin typeface="Calibri"/>
               </a:rPr>
-              <a:t>O Que Funciona — Três Eixos de Ação</a:t>
+              <a:t>O Racismo Tem Endereço — Varia Muito Entre Estados</a:t>
             </a:r>
           </a:p>
         </p:txBody>
@@ -4798,21 +4825,80 @@
                 </a:solidFill>
                 <a:latin typeface="Calibri"/>
               </a:rPr>
-              <a:t>Nenhum eixo isolado resolve. Os três precisam atuar simultaneamente.</a:t>
-            </a:r>
-          </a:p>
-        </p:txBody>
-      </p:sp>
-      <p:sp>
-        <p:nvSpPr>
-          <p:cNvPr id="5" name="Rectangle 4"/>
+              <a:t>A desvantagem racial é bem maior em alguns estados — e a política pode (e deve) focar onde mais dói</a:t>
+            </a:r>
+          </a:p>
+        </p:txBody>
+      </p:sp>
+      <p:sp>
+        <p:nvSpPr>
+          <p:cNvPr id="5" name="TextBox 4"/>
+          <p:cNvSpPr txBox="1"/>
+          <p:nvPr/>
+        </p:nvSpPr>
+        <p:spPr>
+          <a:xfrm>
+            <a:off x="365760" y="1051560"/>
+            <a:ext cx="11430000" cy="365760"/>
+          </a:xfrm>
+          <a:prstGeom prst="rect">
+            <a:avLst/>
+          </a:prstGeom>
+          <a:noFill/>
+        </p:spPr>
+        <p:txBody>
+          <a:bodyPr wrap="square">
+            <a:spAutoFit/>
+          </a:bodyPr>
+          <a:lstStyle/>
+          <a:p>
+            <a:pPr algn="l"/>
+            <a:r>
+              <a:rPr sz="1600" b="1" i="0">
+                <a:solidFill>
+                  <a:srgbClr val="1B2A4A"/>
+                </a:solidFill>
+                <a:latin typeface="Calibri"/>
+              </a:rPr>
+              <a:t>A mesma injustiça, em tamanhos muito diferentes pelo país:</a:t>
+            </a:r>
+          </a:p>
+        </p:txBody>
+      </p:sp>
+      <p:pic>
+        <p:nvPicPr>
+          <p:cNvPr id="6" name="Picture 5" descr="mapa_po_regional.png"/>
+          <p:cNvPicPr>
+            <a:picLocks noChangeAspect="1"/>
+          </p:cNvPicPr>
+          <p:nvPr/>
+        </p:nvPicPr>
+        <p:blipFill>
+          <a:blip r:embed="rId2"/>
+          <a:stretch>
+            <a:fillRect/>
+          </a:stretch>
+        </p:blipFill>
+        <p:spPr>
+          <a:xfrm>
+            <a:off x="457200" y="1417320"/>
+            <a:ext cx="3931920" cy="3809481"/>
+          </a:xfrm>
+          <a:prstGeom prst="rect">
+            <a:avLst/>
+          </a:prstGeom>
+        </p:spPr>
+      </p:pic>
+      <p:sp>
+        <p:nvSpPr>
+          <p:cNvPr id="7" name="Rectangle 6"/>
           <p:cNvSpPr/>
           <p:nvPr/>
         </p:nvSpPr>
         <p:spPr>
           <a:xfrm>
-            <a:off x="274320" y="1097280"/>
-            <a:ext cx="3749039" cy="5349240"/>
+            <a:off x="4937760" y="1417320"/>
+            <a:ext cx="6949440" cy="1371600"/>
           </a:xfrm>
           <a:prstGeom prst="rect">
             <a:avLst/>
@@ -4850,14 +4936,14 @@
       </p:sp>
       <p:sp>
         <p:nvSpPr>
-          <p:cNvPr id="6" name="Rectangle 5"/>
+          <p:cNvPr id="8" name="Rectangle 7"/>
           <p:cNvSpPr/>
           <p:nvPr/>
         </p:nvSpPr>
         <p:spPr>
           <a:xfrm>
-            <a:off x="274320" y="1097280"/>
-            <a:ext cx="3749039" cy="502920"/>
+            <a:off x="4937760" y="1417320"/>
+            <a:ext cx="128016" cy="1371600"/>
           </a:xfrm>
           <a:prstGeom prst="rect">
             <a:avLst/>
@@ -4891,14 +4977,14 @@
       </p:sp>
       <p:sp>
         <p:nvSpPr>
-          <p:cNvPr id="7" name="TextBox 6"/>
-          <p:cNvSpPr txBox="1"/>
-          <p:nvPr/>
-        </p:nvSpPr>
-        <p:spPr>
-          <a:xfrm>
-            <a:off x="384048" y="1124712"/>
-            <a:ext cx="3529584" cy="457200"/>
+          <p:cNvPr id="9" name="TextBox 8"/>
+          <p:cNvSpPr txBox="1"/>
+          <p:nvPr/>
+        </p:nvSpPr>
+        <p:spPr>
+          <a:xfrm>
+            <a:off x="5138928" y="1481328"/>
+            <a:ext cx="6675120" cy="365760"/>
           </a:xfrm>
           <a:prstGeom prst="rect">
             <a:avLst/>
@@ -4913,27 +4999,27 @@
           <a:p>
             <a:pPr algn="l"/>
             <a:r>
-              <a:rPr sz="1500" b="1" i="0">
-                <a:solidFill>
-                  <a:srgbClr val="FFFFFF"/>
-                </a:solidFill>
-                <a:latin typeface="Calibri"/>
-              </a:rPr>
-              <a:t>Abrir as Portas</a:t>
-            </a:r>
-          </a:p>
-        </p:txBody>
-      </p:sp>
-      <p:sp>
-        <p:nvSpPr>
-          <p:cNvPr id="8" name="TextBox 7"/>
-          <p:cNvSpPr txBox="1"/>
-          <p:nvPr/>
-        </p:nvSpPr>
-        <p:spPr>
-          <a:xfrm>
-            <a:off x="457200" y="1691640"/>
-            <a:ext cx="3383280" cy="1097280"/>
+              <a:rPr sz="1350" b="1" i="0">
+                <a:solidFill>
+                  <a:srgbClr val="C62828"/>
+                </a:solidFill>
+                <a:latin typeface="Calibri"/>
+              </a:rPr>
+              <a:t>O gap muda de estado para estado</a:t>
+            </a:r>
+          </a:p>
+        </p:txBody>
+      </p:sp>
+      <p:sp>
+        <p:nvSpPr>
+          <p:cNvPr id="10" name="TextBox 9"/>
+          <p:cNvSpPr txBox="1"/>
+          <p:nvPr/>
+        </p:nvSpPr>
+        <p:spPr>
+          <a:xfrm>
+            <a:off x="5138928" y="1892808"/>
+            <a:ext cx="6675120" cy="841248"/>
           </a:xfrm>
           <a:prstGeom prst="rect">
             <a:avLst/>
@@ -4954,31 +5040,33 @@
                 </a:solidFill>
                 <a:latin typeface="Calibri"/>
               </a:rPr>
-              <a:t>Ação 1:
-Cotas de acesso a cargos
-qualificados (meta: IR ≥ 0,80)</a:t>
-            </a:r>
-          </a:p>
-        </p:txBody>
-      </p:sp>
-      <p:sp>
-        <p:nvSpPr>
-          <p:cNvPr id="9" name="Rectangle 8"/>
+              <a:t>Chega a ~21% (DF) em alguns estados e cai a ~2% (MG) em outros. Não é o mesmo problema em todo lugar.</a:t>
+            </a:r>
+          </a:p>
+        </p:txBody>
+      </p:sp>
+      <p:sp>
+        <p:nvSpPr>
+          <p:cNvPr id="11" name="Rectangle 10"/>
           <p:cNvSpPr/>
           <p:nvPr/>
         </p:nvSpPr>
         <p:spPr>
           <a:xfrm>
-            <a:off x="457200" y="2834640"/>
-            <a:ext cx="3383280" cy="18288"/>
+            <a:off x="4937760" y="2898648"/>
+            <a:ext cx="6949440" cy="1371600"/>
           </a:xfrm>
           <a:prstGeom prst="rect">
             <a:avLst/>
           </a:prstGeom>
           <a:solidFill>
-            <a:srgbClr val="C62828"/>
+            <a:srgbClr val="F5F5F5"/>
           </a:solidFill>
-          <a:ln/>
+          <a:ln w="25400">
+            <a:solidFill>
+              <a:srgbClr val="FF8F00"/>
+            </a:solidFill>
+          </a:ln>
         </p:spPr>
         <p:style>
           <a:lnRef idx="1">
@@ -5004,58 +5092,20 @@
       </p:sp>
       <p:sp>
         <p:nvSpPr>
-          <p:cNvPr id="10" name="TextBox 9"/>
-          <p:cNvSpPr txBox="1"/>
-          <p:nvPr/>
-        </p:nvSpPr>
-        <p:spPr>
-          <a:xfrm>
-            <a:off x="457200" y="2926080"/>
-            <a:ext cx="3383280" cy="1097280"/>
-          </a:xfrm>
-          <a:prstGeom prst="rect">
-            <a:avLst/>
-          </a:prstGeom>
-          <a:noFill/>
-        </p:spPr>
-        <p:txBody>
-          <a:bodyPr wrap="square">
-            <a:spAutoFit/>
-          </a:bodyPr>
-          <a:lstStyle/>
-          <a:p>
-            <a:pPr algn="l"/>
-            <a:r>
-              <a:rPr sz="1200" b="0" i="0">
-                <a:solidFill>
-                  <a:srgbClr val="212121"/>
-                </a:solidFill>
-                <a:latin typeface="Calibri"/>
-              </a:rPr>
-              <a:t>Ação 2:
-Formação profissional com
-recorte racial e bolsas de
-residência em empresas premium</a:t>
-            </a:r>
-          </a:p>
-        </p:txBody>
-      </p:sp>
-      <p:sp>
-        <p:nvSpPr>
-          <p:cNvPr id="11" name="Rectangle 10"/>
+          <p:cNvPr id="12" name="Rectangle 11"/>
           <p:cNvSpPr/>
           <p:nvPr/>
         </p:nvSpPr>
         <p:spPr>
           <a:xfrm>
-            <a:off x="365760" y="4114800"/>
-            <a:ext cx="3566160" cy="18288"/>
+            <a:off x="4937760" y="2898648"/>
+            <a:ext cx="128016" cy="1371600"/>
           </a:xfrm>
           <a:prstGeom prst="rect">
             <a:avLst/>
           </a:prstGeom>
           <a:solidFill>
-            <a:srgbClr val="C62828"/>
+            <a:srgbClr val="FF8F00"/>
           </a:solidFill>
           <a:ln/>
         </p:spPr>
@@ -5083,14 +5133,14 @@
       </p:sp>
       <p:sp>
         <p:nvSpPr>
-          <p:cNvPr id="12" name="TextBox 11"/>
-          <p:cNvSpPr txBox="1"/>
-          <p:nvPr/>
-        </p:nvSpPr>
-        <p:spPr>
-          <a:xfrm>
-            <a:off x="411480" y="4206240"/>
-            <a:ext cx="3474720" cy="640080"/>
+          <p:cNvPr id="13" name="TextBox 12"/>
+          <p:cNvSpPr txBox="1"/>
+          <p:nvPr/>
+        </p:nvSpPr>
+        <p:spPr>
+          <a:xfrm>
+            <a:off x="5138928" y="2962656"/>
+            <a:ext cx="6675120" cy="365760"/>
           </a:xfrm>
           <a:prstGeom prst="rect">
             <a:avLst/>
@@ -5105,342 +5155,62 @@
           <a:p>
             <a:pPr algn="l"/>
             <a:r>
-              <a:rPr sz="1100" b="1" i="1">
-                <a:solidFill>
-                  <a:srgbClr val="C62828"/>
-                </a:solidFill>
-                <a:latin typeface="Calibri"/>
-              </a:rPr>
-              <a:t>Atacar onde os dados apontam:
-barreiras de ACESSO, não só salário</a:t>
-            </a:r>
-          </a:p>
-        </p:txBody>
-      </p:sp>
-      <p:sp>
-        <p:nvSpPr>
-          <p:cNvPr id="13" name="Rectangle 12"/>
+              <a:rPr sz="1350" b="1" i="0">
+                <a:solidFill>
+                  <a:srgbClr val="FF8F00"/>
+                </a:solidFill>
+                <a:latin typeface="Calibri"/>
+              </a:rPr>
+              <a:t>Maior onde há mais riqueza</a:t>
+            </a:r>
+          </a:p>
+        </p:txBody>
+      </p:sp>
+      <p:sp>
+        <p:nvSpPr>
+          <p:cNvPr id="14" name="TextBox 13"/>
+          <p:cNvSpPr txBox="1"/>
+          <p:nvPr/>
+        </p:nvSpPr>
+        <p:spPr>
+          <a:xfrm>
+            <a:off x="5138928" y="3374136"/>
+            <a:ext cx="6675120" cy="841248"/>
+          </a:xfrm>
+          <a:prstGeom prst="rect">
+            <a:avLst/>
+          </a:prstGeom>
+          <a:noFill/>
+        </p:spPr>
+        <p:txBody>
+          <a:bodyPr wrap="square">
+            <a:spAutoFit/>
+          </a:bodyPr>
+          <a:lstStyle/>
+          <a:p>
+            <a:pPr algn="l"/>
+            <a:r>
+              <a:rPr sz="1200" b="0" i="0">
+                <a:solidFill>
+                  <a:srgbClr val="212121"/>
+                </a:solidFill>
+                <a:latin typeface="Calibri"/>
+              </a:rPr>
+              <a:t>As maiores desvantagens aparecem no Distrito Federal, no Rio e em São Paulo — crescimento econômico, sozinho, não dissolve a barreira racial.</a:t>
+            </a:r>
+          </a:p>
+        </p:txBody>
+      </p:sp>
+      <p:sp>
+        <p:nvSpPr>
+          <p:cNvPr id="15" name="Rectangle 14"/>
           <p:cNvSpPr/>
           <p:nvPr/>
         </p:nvSpPr>
         <p:spPr>
           <a:xfrm>
-            <a:off x="4251959" y="1097280"/>
-            <a:ext cx="3749039" cy="5349240"/>
-          </a:xfrm>
-          <a:prstGeom prst="rect">
-            <a:avLst/>
-          </a:prstGeom>
-          <a:solidFill>
-            <a:srgbClr val="F5F5F5"/>
-          </a:solidFill>
-          <a:ln w="25400">
-            <a:solidFill>
-              <a:srgbClr val="1565C0"/>
-            </a:solidFill>
-          </a:ln>
-        </p:spPr>
-        <p:style>
-          <a:lnRef idx="1">
-            <a:schemeClr val="accent1"/>
-          </a:lnRef>
-          <a:fillRef idx="3">
-            <a:schemeClr val="accent1"/>
-          </a:fillRef>
-          <a:effectRef idx="2">
-            <a:schemeClr val="accent1"/>
-          </a:effectRef>
-          <a:fontRef idx="minor">
-            <a:schemeClr val="lt1"/>
-          </a:fontRef>
-        </p:style>
-        <p:txBody>
-          <a:bodyPr rtlCol="0" anchor="ctr"/>
-          <a:lstStyle/>
-          <a:p>
-            <a:pPr algn="ctr"/>
-          </a:p>
-        </p:txBody>
-      </p:sp>
-      <p:sp>
-        <p:nvSpPr>
-          <p:cNvPr id="14" name="Rectangle 13"/>
-          <p:cNvSpPr/>
-          <p:nvPr/>
-        </p:nvSpPr>
-        <p:spPr>
-          <a:xfrm>
-            <a:off x="4251959" y="1097280"/>
-            <a:ext cx="3749039" cy="502920"/>
-          </a:xfrm>
-          <a:prstGeom prst="rect">
-            <a:avLst/>
-          </a:prstGeom>
-          <a:solidFill>
-            <a:srgbClr val="1565C0"/>
-          </a:solidFill>
-          <a:ln/>
-        </p:spPr>
-        <p:style>
-          <a:lnRef idx="1">
-            <a:schemeClr val="accent1"/>
-          </a:lnRef>
-          <a:fillRef idx="3">
-            <a:schemeClr val="accent1"/>
-          </a:fillRef>
-          <a:effectRef idx="2">
-            <a:schemeClr val="accent1"/>
-          </a:effectRef>
-          <a:fontRef idx="minor">
-            <a:schemeClr val="lt1"/>
-          </a:fontRef>
-        </p:style>
-        <p:txBody>
-          <a:bodyPr rtlCol="0" anchor="ctr"/>
-          <a:lstStyle/>
-          <a:p>
-            <a:pPr algn="ctr"/>
-          </a:p>
-        </p:txBody>
-      </p:sp>
-      <p:sp>
-        <p:nvSpPr>
-          <p:cNvPr id="15" name="TextBox 14"/>
-          <p:cNvSpPr txBox="1"/>
-          <p:nvPr/>
-        </p:nvSpPr>
-        <p:spPr>
-          <a:xfrm>
-            <a:off x="4361687" y="1124712"/>
-            <a:ext cx="3529584" cy="457200"/>
-          </a:xfrm>
-          <a:prstGeom prst="rect">
-            <a:avLst/>
-          </a:prstGeom>
-          <a:noFill/>
-        </p:spPr>
-        <p:txBody>
-          <a:bodyPr wrap="square">
-            <a:spAutoFit/>
-          </a:bodyPr>
-          <a:lstStyle/>
-          <a:p>
-            <a:pPr algn="l"/>
-            <a:r>
-              <a:rPr sz="1500" b="1" i="0">
-                <a:solidFill>
-                  <a:srgbClr val="FFFFFF"/>
-                </a:solidFill>
-                <a:latin typeface="Calibri"/>
-              </a:rPr>
-              <a:t>Pagar Igual</a:t>
-            </a:r>
-          </a:p>
-        </p:txBody>
-      </p:sp>
-      <p:sp>
-        <p:nvSpPr>
-          <p:cNvPr id="16" name="TextBox 15"/>
-          <p:cNvSpPr txBox="1"/>
-          <p:nvPr/>
-        </p:nvSpPr>
-        <p:spPr>
-          <a:xfrm>
-            <a:off x="4434839" y="1691640"/>
-            <a:ext cx="3383280" cy="1097280"/>
-          </a:xfrm>
-          <a:prstGeom prst="rect">
-            <a:avLst/>
-          </a:prstGeom>
-          <a:noFill/>
-        </p:spPr>
-        <p:txBody>
-          <a:bodyPr wrap="square">
-            <a:spAutoFit/>
-          </a:bodyPr>
-          <a:lstStyle/>
-          <a:p>
-            <a:pPr algn="l"/>
-            <a:r>
-              <a:rPr sz="1200" b="0" i="0">
-                <a:solidFill>
-                  <a:srgbClr val="212121"/>
-                </a:solidFill>
-                <a:latin typeface="Calibri"/>
-              </a:rPr>
-              <a:t>Ação 1:
-Transparência salarial por raça
-obrigatória (empresas &gt; 100 fun.)</a:t>
-            </a:r>
-          </a:p>
-        </p:txBody>
-      </p:sp>
-      <p:sp>
-        <p:nvSpPr>
-          <p:cNvPr id="17" name="Rectangle 16"/>
-          <p:cNvSpPr/>
-          <p:nvPr/>
-        </p:nvSpPr>
-        <p:spPr>
-          <a:xfrm>
-            <a:off x="4434839" y="2834640"/>
-            <a:ext cx="3383280" cy="18288"/>
-          </a:xfrm>
-          <a:prstGeom prst="rect">
-            <a:avLst/>
-          </a:prstGeom>
-          <a:solidFill>
-            <a:srgbClr val="1565C0"/>
-          </a:solidFill>
-          <a:ln/>
-        </p:spPr>
-        <p:style>
-          <a:lnRef idx="1">
-            <a:schemeClr val="accent1"/>
-          </a:lnRef>
-          <a:fillRef idx="3">
-            <a:schemeClr val="accent1"/>
-          </a:fillRef>
-          <a:effectRef idx="2">
-            <a:schemeClr val="accent1"/>
-          </a:effectRef>
-          <a:fontRef idx="minor">
-            <a:schemeClr val="lt1"/>
-          </a:fontRef>
-        </p:style>
-        <p:txBody>
-          <a:bodyPr rtlCol="0" anchor="ctr"/>
-          <a:lstStyle/>
-          <a:p>
-            <a:pPr algn="ctr"/>
-          </a:p>
-        </p:txBody>
-      </p:sp>
-      <p:sp>
-        <p:nvSpPr>
-          <p:cNvPr id="18" name="TextBox 17"/>
-          <p:cNvSpPr txBox="1"/>
-          <p:nvPr/>
-        </p:nvSpPr>
-        <p:spPr>
-          <a:xfrm>
-            <a:off x="4434839" y="2926080"/>
-            <a:ext cx="3383280" cy="1097280"/>
-          </a:xfrm>
-          <a:prstGeom prst="rect">
-            <a:avLst/>
-          </a:prstGeom>
-          <a:noFill/>
-        </p:spPr>
-        <p:txBody>
-          <a:bodyPr wrap="square">
-            <a:spAutoFit/>
-          </a:bodyPr>
-          <a:lstStyle/>
-          <a:p>
-            <a:pPr algn="l"/>
-            <a:r>
-              <a:rPr sz="1200" b="0" i="0">
-                <a:solidFill>
-                  <a:srgbClr val="212121"/>
-                </a:solidFill>
-                <a:latin typeface="Calibri"/>
-              </a:rPr>
-              <a:t>Ação 2:
-Auditoria de igual pagamento
-por trabalho igual com
-penalidades progressivas</a:t>
-            </a:r>
-          </a:p>
-        </p:txBody>
-      </p:sp>
-      <p:sp>
-        <p:nvSpPr>
-          <p:cNvPr id="19" name="Rectangle 18"/>
-          <p:cNvSpPr/>
-          <p:nvPr/>
-        </p:nvSpPr>
-        <p:spPr>
-          <a:xfrm>
-            <a:off x="4343399" y="4114800"/>
-            <a:ext cx="3566160" cy="18288"/>
-          </a:xfrm>
-          <a:prstGeom prst="rect">
-            <a:avLst/>
-          </a:prstGeom>
-          <a:solidFill>
-            <a:srgbClr val="1565C0"/>
-          </a:solidFill>
-          <a:ln/>
-        </p:spPr>
-        <p:style>
-          <a:lnRef idx="1">
-            <a:schemeClr val="accent1"/>
-          </a:lnRef>
-          <a:fillRef idx="3">
-            <a:schemeClr val="accent1"/>
-          </a:fillRef>
-          <a:effectRef idx="2">
-            <a:schemeClr val="accent1"/>
-          </a:effectRef>
-          <a:fontRef idx="minor">
-            <a:schemeClr val="lt1"/>
-          </a:fontRef>
-        </p:style>
-        <p:txBody>
-          <a:bodyPr rtlCol="0" anchor="ctr"/>
-          <a:lstStyle/>
-          <a:p>
-            <a:pPr algn="ctr"/>
-          </a:p>
-        </p:txBody>
-      </p:sp>
-      <p:sp>
-        <p:nvSpPr>
-          <p:cNvPr id="20" name="TextBox 19"/>
-          <p:cNvSpPr txBox="1"/>
-          <p:nvPr/>
-        </p:nvSpPr>
-        <p:spPr>
-          <a:xfrm>
-            <a:off x="4389119" y="4206240"/>
-            <a:ext cx="3474720" cy="640080"/>
-          </a:xfrm>
-          <a:prstGeom prst="rect">
-            <a:avLst/>
-          </a:prstGeom>
-          <a:noFill/>
-        </p:spPr>
-        <p:txBody>
-          <a:bodyPr wrap="square">
-            <a:spAutoFit/>
-          </a:bodyPr>
-          <a:lstStyle/>
-          <a:p>
-            <a:pPr algn="l"/>
-            <a:r>
-              <a:rPr sz="1100" b="1" i="1">
-                <a:solidFill>
-                  <a:srgbClr val="1565C0"/>
-                </a:solidFill>
-                <a:latin typeface="Calibri"/>
-              </a:rPr>
-              <a:t>O gap residual de 6,2% é real
-e mensurável — e deve ser eliminado</a:t>
-            </a:r>
-          </a:p>
-        </p:txBody>
-      </p:sp>
-      <p:sp>
-        <p:nvSpPr>
-          <p:cNvPr id="21" name="Rectangle 20"/>
-          <p:cNvSpPr/>
-          <p:nvPr/>
-        </p:nvSpPr>
-        <p:spPr>
-          <a:xfrm>
-            <a:off x="8229598" y="1097280"/>
-            <a:ext cx="3749039" cy="5349240"/>
+            <a:off x="4937760" y="4379976"/>
+            <a:ext cx="6949440" cy="1371600"/>
           </a:xfrm>
           <a:prstGeom prst="rect">
             <a:avLst/>
@@ -5478,14 +5248,14 @@
       </p:sp>
       <p:sp>
         <p:nvSpPr>
-          <p:cNvPr id="22" name="Rectangle 21"/>
+          <p:cNvPr id="16" name="Rectangle 15"/>
           <p:cNvSpPr/>
           <p:nvPr/>
         </p:nvSpPr>
         <p:spPr>
           <a:xfrm>
-            <a:off x="8229598" y="1097280"/>
-            <a:ext cx="3749039" cy="502920"/>
+            <a:off x="4937760" y="4379976"/>
+            <a:ext cx="128016" cy="1371600"/>
           </a:xfrm>
           <a:prstGeom prst="rect">
             <a:avLst/>
@@ -5519,14 +5289,14 @@
       </p:sp>
       <p:sp>
         <p:nvSpPr>
-          <p:cNvPr id="23" name="TextBox 22"/>
-          <p:cNvSpPr txBox="1"/>
-          <p:nvPr/>
-        </p:nvSpPr>
-        <p:spPr>
-          <a:xfrm>
-            <a:off x="8339326" y="1124712"/>
-            <a:ext cx="3529584" cy="457200"/>
+          <p:cNvPr id="17" name="TextBox 16"/>
+          <p:cNvSpPr txBox="1"/>
+          <p:nvPr/>
+        </p:nvSpPr>
+        <p:spPr>
+          <a:xfrm>
+            <a:off x="5138928" y="4443984"/>
+            <a:ext cx="6675120" cy="365760"/>
           </a:xfrm>
           <a:prstGeom prst="rect">
             <a:avLst/>
@@ -5541,27 +5311,27 @@
           <a:p>
             <a:pPr algn="l"/>
             <a:r>
-              <a:rPr sz="1500" b="1" i="0">
-                <a:solidFill>
-                  <a:srgbClr val="FFFFFF"/>
-                </a:solidFill>
-                <a:latin typeface="Calibri"/>
-              </a:rPr>
-              <a:t>Ampliar as Redes</a:t>
-            </a:r>
-          </a:p>
-        </p:txBody>
-      </p:sp>
-      <p:sp>
-        <p:nvSpPr>
-          <p:cNvPr id="24" name="TextBox 23"/>
-          <p:cNvSpPr txBox="1"/>
-          <p:nvPr/>
-        </p:nvSpPr>
-        <p:spPr>
-          <a:xfrm>
-            <a:off x="8412478" y="1691640"/>
-            <a:ext cx="3383280" cy="1097280"/>
+              <a:rPr sz="1350" b="1" i="0">
+                <a:solidFill>
+                  <a:srgbClr val="2E7D32"/>
+                </a:solidFill>
+                <a:latin typeface="Calibri"/>
+              </a:rPr>
+              <a:t>Focar onde dói rende muito mais</a:t>
+            </a:r>
+          </a:p>
+        </p:txBody>
+      </p:sp>
+      <p:sp>
+        <p:nvSpPr>
+          <p:cNvPr id="18" name="TextBox 17"/>
+          <p:cNvSpPr txBox="1"/>
+          <p:nvPr/>
+        </p:nvSpPr>
+        <p:spPr>
+          <a:xfrm>
+            <a:off x="5138928" y="4855464"/>
+            <a:ext cx="6675120" cy="841248"/>
           </a:xfrm>
           <a:prstGeom prst="rect">
             <a:avLst/>
@@ -5582,32 +5352,33 @@
                 </a:solidFill>
                 <a:latin typeface="Calibri"/>
               </a:rPr>
-              <a:t>Ação 1:
-Mentoria estruturada para elevar
-a posição de negros nas redes
-profissionais</a:t>
-            </a:r>
-          </a:p>
-        </p:txBody>
-      </p:sp>
-      <p:sp>
-        <p:nvSpPr>
-          <p:cNvPr id="25" name="Rectangle 24"/>
+              <a:t>Concentrar o orçamento nos estados de maior desvantagem entrega até +68% mais resultado do que espalhar o dinheiro por igual.</a:t>
+            </a:r>
+          </a:p>
+        </p:txBody>
+      </p:sp>
+      <p:sp>
+        <p:nvSpPr>
+          <p:cNvPr id="19" name="Rectangle 18"/>
           <p:cNvSpPr/>
           <p:nvPr/>
         </p:nvSpPr>
         <p:spPr>
           <a:xfrm>
-            <a:off x="8412478" y="2834640"/>
-            <a:ext cx="3383280" cy="18288"/>
+            <a:off x="274320" y="5897880"/>
+            <a:ext cx="11612880" cy="603504"/>
           </a:xfrm>
           <a:prstGeom prst="rect">
             <a:avLst/>
           </a:prstGeom>
           <a:solidFill>
-            <a:srgbClr val="2E7D32"/>
+            <a:srgbClr val="FFF9E7"/>
           </a:solidFill>
-          <a:ln/>
+          <a:ln w="15240">
+            <a:solidFill>
+              <a:srgbClr val="FF8F00"/>
+            </a:solidFill>
+          </a:ln>
         </p:spPr>
         <p:style>
           <a:lnRef idx="1">
@@ -5633,58 +5404,55 @@
       </p:sp>
       <p:sp>
         <p:nvSpPr>
-          <p:cNvPr id="26" name="TextBox 25"/>
-          <p:cNvSpPr txBox="1"/>
-          <p:nvPr/>
-        </p:nvSpPr>
-        <p:spPr>
-          <a:xfrm>
-            <a:off x="8412478" y="2926080"/>
-            <a:ext cx="3383280" cy="1097280"/>
-          </a:xfrm>
-          <a:prstGeom prst="rect">
-            <a:avLst/>
-          </a:prstGeom>
-          <a:noFill/>
-        </p:spPr>
-        <p:txBody>
-          <a:bodyPr wrap="square">
-            <a:spAutoFit/>
-          </a:bodyPr>
-          <a:lstStyle/>
-          <a:p>
-            <a:pPr algn="l"/>
-            <a:r>
-              <a:rPr sz="1200" b="0" i="0">
-                <a:solidFill>
-                  <a:srgbClr val="212121"/>
-                </a:solidFill>
-                <a:latin typeface="Calibri"/>
-              </a:rPr>
-              <a:t>Ação 2:
-30% dos cargos de liderança
-(DAS + corporativo) para negros
-até 2030</a:t>
-            </a:r>
-          </a:p>
-        </p:txBody>
-      </p:sp>
-      <p:sp>
-        <p:nvSpPr>
-          <p:cNvPr id="27" name="Rectangle 26"/>
+          <p:cNvPr id="20" name="TextBox 19"/>
+          <p:cNvSpPr txBox="1"/>
+          <p:nvPr/>
+        </p:nvSpPr>
+        <p:spPr>
+          <a:xfrm>
+            <a:off x="411480" y="5989320"/>
+            <a:ext cx="11338560" cy="420624"/>
+          </a:xfrm>
+          <a:prstGeom prst="rect">
+            <a:avLst/>
+          </a:prstGeom>
+          <a:noFill/>
+        </p:spPr>
+        <p:txBody>
+          <a:bodyPr wrap="square">
+            <a:spAutoFit/>
+          </a:bodyPr>
+          <a:lstStyle/>
+          <a:p>
+            <a:pPr algn="ctr"/>
+            <a:r>
+              <a:rPr sz="1300" b="1" i="0">
+                <a:solidFill>
+                  <a:srgbClr val="1B2A4A"/>
+                </a:solidFill>
+                <a:latin typeface="Calibri"/>
+              </a:rPr>
+              <a:t>Em linguagem simples: tratar o país inteiro igual desperdiça recursos. Levar a política primeiro aos estados ★ (DF, AM, TO, PA, AC) multiplica o impacto do mesmo orçamento.</a:t>
+            </a:r>
+          </a:p>
+        </p:txBody>
+      </p:sp>
+      <p:sp>
+        <p:nvSpPr>
+          <p:cNvPr id="21" name="Rectangle 20"/>
           <p:cNvSpPr/>
           <p:nvPr/>
         </p:nvSpPr>
         <p:spPr>
           <a:xfrm>
-            <a:off x="8321038" y="4114800"/>
-            <a:ext cx="3566160" cy="18288"/>
+            <a:off x="0" y="6629400"/>
+            <a:ext cx="12188952" cy="228600"/>
           </a:xfrm>
           <a:prstGeom prst="rect">
             <a:avLst/>
           </a:prstGeom>
           <a:solidFill>
-            <a:srgbClr val="2E7D32"/>
+            <a:srgbClr val="1B2A4A"/>
           </a:solidFill>
           <a:ln/>
         </p:spPr>
@@ -5712,119 +5480,7 @@
       </p:sp>
       <p:sp>
         <p:nvSpPr>
-          <p:cNvPr id="28" name="TextBox 27"/>
-          <p:cNvSpPr txBox="1"/>
-          <p:nvPr/>
-        </p:nvSpPr>
-        <p:spPr>
-          <a:xfrm>
-            <a:off x="8366758" y="4206240"/>
-            <a:ext cx="3474720" cy="640080"/>
-          </a:xfrm>
-          <a:prstGeom prst="rect">
-            <a:avLst/>
-          </a:prstGeom>
-          <a:noFill/>
-        </p:spPr>
-        <p:txBody>
-          <a:bodyPr wrap="square">
-            <a:spAutoFit/>
-          </a:bodyPr>
-          <a:lstStyle/>
-          <a:p>
-            <a:pPr algn="l"/>
-            <a:r>
-              <a:rPr sz="1100" b="1" i="1">
-                <a:solidFill>
-                  <a:srgbClr val="2E7D32"/>
-                </a:solidFill>
-                <a:latin typeface="Calibri"/>
-              </a:rPr>
-              <a:t>Sem acesso às redes que convertem
-diplomas em empregos, nada muda</a:t>
-            </a:r>
-          </a:p>
-        </p:txBody>
-      </p:sp>
-      <p:sp>
-        <p:nvSpPr>
-          <p:cNvPr id="29" name="TextBox 28"/>
-          <p:cNvSpPr txBox="1"/>
-          <p:nvPr/>
-        </p:nvSpPr>
-        <p:spPr>
-          <a:xfrm>
-            <a:off x="274320" y="6355080"/>
-            <a:ext cx="11612880" cy="347472"/>
-          </a:xfrm>
-          <a:prstGeom prst="rect">
-            <a:avLst/>
-          </a:prstGeom>
-          <a:noFill/>
-        </p:spPr>
-        <p:txBody>
-          <a:bodyPr wrap="square">
-            <a:spAutoFit/>
-          </a:bodyPr>
-          <a:lstStyle/>
-          <a:p>
-            <a:pPr algn="ctr"/>
-            <a:r>
-              <a:rPr sz="1300" b="1" i="0">
-                <a:solidFill>
-                  <a:srgbClr val="C62828"/>
-                </a:solidFill>
-                <a:latin typeface="Calibri"/>
-              </a:rPr>
-              <a:t>⚠  Sem ação simultânea nos três eixos, fechar o gap levará mais de 100 anos no ritmo atual.</a:t>
-            </a:r>
-          </a:p>
-        </p:txBody>
-      </p:sp>
-      <p:sp>
-        <p:nvSpPr>
-          <p:cNvPr id="30" name="Rectangle 29"/>
-          <p:cNvSpPr/>
-          <p:nvPr/>
-        </p:nvSpPr>
-        <p:spPr>
-          <a:xfrm>
-            <a:off x="0" y="6629400"/>
-            <a:ext cx="12188952" cy="228600"/>
-          </a:xfrm>
-          <a:prstGeom prst="rect">
-            <a:avLst/>
-          </a:prstGeom>
-          <a:solidFill>
-            <a:srgbClr val="1B2A4A"/>
-          </a:solidFill>
-          <a:ln/>
-        </p:spPr>
-        <p:style>
-          <a:lnRef idx="1">
-            <a:schemeClr val="accent1"/>
-          </a:lnRef>
-          <a:fillRef idx="3">
-            <a:schemeClr val="accent1"/>
-          </a:fillRef>
-          <a:effectRef idx="2">
-            <a:schemeClr val="accent1"/>
-          </a:effectRef>
-          <a:fontRef idx="minor">
-            <a:schemeClr val="lt1"/>
-          </a:fontRef>
-        </p:style>
-        <p:txBody>
-          <a:bodyPr rtlCol="0" anchor="ctr"/>
-          <a:lstStyle/>
-          <a:p>
-            <a:pPr algn="ctr"/>
-          </a:p>
-        </p:txBody>
-      </p:sp>
-      <p:sp>
-        <p:nvSpPr>
-          <p:cNvPr id="31" name="TextBox 30"/>
+          <p:cNvPr id="22" name="TextBox 21"/>
           <p:cNvSpPr txBox="1"/>
           <p:nvPr/>
         </p:nvSpPr>
@@ -5859,7 +5515,7 @@
       </p:sp>
       <p:sp>
         <p:nvSpPr>
-          <p:cNvPr id="32" name="TextBox 31"/>
+          <p:cNvPr id="23" name="TextBox 22"/>
           <p:cNvSpPr txBox="1"/>
           <p:nvPr/>
         </p:nvSpPr>
@@ -5887,7 +5543,7 @@
                 </a:solidFill>
                 <a:latin typeface="Calibri"/>
               </a:rPr>
-              <a:t>11/13</a:t>
+              <a:t>11/14</a:t>
             </a:r>
           </a:p>
         </p:txBody>
@@ -5981,7 +5637,7 @@
                 </a:solidFill>
                 <a:latin typeface="Calibri"/>
               </a:rPr>
-              <a:t>A Urgência — O Que Está em Jogo</a:t>
+              <a:t>O Que Funciona — Três Eixos de Ação</a:t>
             </a:r>
           </a:p>
         </p:txBody>
@@ -6016,79 +5672,31 @@
                 </a:solidFill>
                 <a:latin typeface="Calibri"/>
               </a:rPr>
-              <a:t>Pleno emprego sem prosperidade: 94,4% empregados, renda real estagnada</a:t>
-            </a:r>
-          </a:p>
-        </p:txBody>
-      </p:sp>
-      <p:pic>
-        <p:nvPicPr>
-          <p:cNvPr id="5" name="Picture 4" descr="estado_h4_tendencia.png"/>
-          <p:cNvPicPr>
-            <a:picLocks noChangeAspect="1"/>
-          </p:cNvPicPr>
-          <p:nvPr/>
-        </p:nvPicPr>
-        <p:blipFill>
-          <a:blip r:embed="rId2"/>
-          <a:stretch>
-            <a:fillRect/>
-          </a:stretch>
-        </p:blipFill>
+              <a:t>Nenhum eixo isolado resolve. Os três precisam atuar simultaneamente.</a:t>
+            </a:r>
+          </a:p>
+        </p:txBody>
+      </p:sp>
+      <p:sp>
+        <p:nvSpPr>
+          <p:cNvPr id="5" name="Rectangle 4"/>
+          <p:cNvSpPr/>
+          <p:nvPr/>
+        </p:nvSpPr>
         <p:spPr>
           <a:xfrm>
             <a:off x="274320" y="1097280"/>
-            <a:ext cx="5669280" cy="2387374"/>
-          </a:xfrm>
-          <a:prstGeom prst="rect">
-            <a:avLst/>
-          </a:prstGeom>
-        </p:spPr>
-      </p:pic>
-      <p:pic>
-        <p:nvPicPr>
-          <p:cNvPr id="6" name="Picture 5" descr="estado_h5_armadilha.png"/>
-          <p:cNvPicPr>
-            <a:picLocks noChangeAspect="1"/>
-          </p:cNvPicPr>
-          <p:nvPr/>
-        </p:nvPicPr>
-        <p:blipFill>
-          <a:blip r:embed="rId3"/>
-          <a:stretch>
-            <a:fillRect/>
-          </a:stretch>
-        </p:blipFill>
-        <p:spPr>
-          <a:xfrm>
-            <a:off x="6126480" y="1097280"/>
-            <a:ext cx="5760720" cy="2423207"/>
-          </a:xfrm>
-          <a:prstGeom prst="rect">
-            <a:avLst/>
-          </a:prstGeom>
-        </p:spPr>
-      </p:pic>
-      <p:sp>
-        <p:nvSpPr>
-          <p:cNvPr id="7" name="Rectangle 6"/>
-          <p:cNvSpPr/>
-          <p:nvPr/>
-        </p:nvSpPr>
-        <p:spPr>
-          <a:xfrm>
-            <a:off x="274320" y="4754880"/>
-            <a:ext cx="2743200" cy="1234440"/>
+            <a:ext cx="3749039" cy="5349240"/>
           </a:xfrm>
           <a:prstGeom prst="rect">
             <a:avLst/>
           </a:prstGeom>
           <a:solidFill>
-            <a:srgbClr val="E8F5E9"/>
+            <a:srgbClr val="F5F5F5"/>
           </a:solidFill>
-          <a:ln w="19050">
+          <a:ln w="25400">
             <a:solidFill>
-              <a:srgbClr val="2E7D32"/>
+              <a:srgbClr val="C62828"/>
             </a:solidFill>
           </a:ln>
         </p:spPr>
@@ -6116,131 +5724,22 @@
       </p:sp>
       <p:sp>
         <p:nvSpPr>
-          <p:cNvPr id="8" name="TextBox 7"/>
-          <p:cNvSpPr txBox="1"/>
-          <p:nvPr/>
-        </p:nvSpPr>
-        <p:spPr>
-          <a:xfrm>
-            <a:off x="365760" y="4828032"/>
-            <a:ext cx="2560320" cy="658368"/>
-          </a:xfrm>
-          <a:prstGeom prst="rect">
-            <a:avLst/>
-          </a:prstGeom>
-          <a:noFill/>
-        </p:spPr>
-        <p:txBody>
-          <a:bodyPr wrap="square">
-            <a:spAutoFit/>
-          </a:bodyPr>
-          <a:lstStyle/>
-          <a:p>
-            <a:pPr algn="ctr"/>
-            <a:r>
-              <a:rPr sz="3400" b="1" i="0">
-                <a:solidFill>
-                  <a:srgbClr val="2E7D32"/>
-                </a:solidFill>
-                <a:latin typeface="Calibri"/>
-              </a:rPr>
-              <a:t>94,4%</a:t>
-            </a:r>
-          </a:p>
-        </p:txBody>
-      </p:sp>
-      <p:sp>
-        <p:nvSpPr>
-          <p:cNvPr id="9" name="TextBox 8"/>
-          <p:cNvSpPr txBox="1"/>
-          <p:nvPr/>
-        </p:nvSpPr>
-        <p:spPr>
-          <a:xfrm>
-            <a:off x="365760" y="5468112"/>
-            <a:ext cx="2560320" cy="320040"/>
-          </a:xfrm>
-          <a:prstGeom prst="rect">
-            <a:avLst/>
-          </a:prstGeom>
-          <a:noFill/>
-        </p:spPr>
-        <p:txBody>
-          <a:bodyPr wrap="square">
-            <a:spAutoFit/>
-          </a:bodyPr>
-          <a:lstStyle/>
-          <a:p>
-            <a:pPr algn="ctr"/>
-            <a:r>
-              <a:rPr sz="1150" b="1" i="0">
-                <a:solidFill>
-                  <a:srgbClr val="212121"/>
-                </a:solidFill>
-                <a:latin typeface="Calibri"/>
-              </a:rPr>
-              <a:t>emprego em 2025</a:t>
-            </a:r>
-          </a:p>
-        </p:txBody>
-      </p:sp>
-      <p:sp>
-        <p:nvSpPr>
-          <p:cNvPr id="10" name="TextBox 9"/>
-          <p:cNvSpPr txBox="1"/>
-          <p:nvPr/>
-        </p:nvSpPr>
-        <p:spPr>
-          <a:xfrm>
-            <a:off x="365760" y="5779008"/>
-            <a:ext cx="2560320" cy="292608"/>
-          </a:xfrm>
-          <a:prstGeom prst="rect">
-            <a:avLst/>
-          </a:prstGeom>
-          <a:noFill/>
-        </p:spPr>
-        <p:txBody>
-          <a:bodyPr wrap="square">
-            <a:spAutoFit/>
-          </a:bodyPr>
-          <a:lstStyle/>
-          <a:p>
-            <a:pPr algn="ctr"/>
-            <a:r>
-              <a:rPr sz="950" b="0" i="1">
-                <a:solidFill>
-                  <a:srgbClr val="616161"/>
-                </a:solidFill>
-                <a:latin typeface="Calibri"/>
-              </a:rPr>
-              <a:t>máxima histórica da série</a:t>
-            </a:r>
-          </a:p>
-        </p:txBody>
-      </p:sp>
-      <p:sp>
-        <p:nvSpPr>
-          <p:cNvPr id="11" name="Rectangle 10"/>
+          <p:cNvPr id="6" name="Rectangle 5"/>
           <p:cNvSpPr/>
           <p:nvPr/>
         </p:nvSpPr>
         <p:spPr>
           <a:xfrm>
-            <a:off x="3200400" y="4754880"/>
-            <a:ext cx="2743200" cy="1234440"/>
+            <a:off x="274320" y="1097280"/>
+            <a:ext cx="3749039" cy="502920"/>
           </a:xfrm>
           <a:prstGeom prst="rect">
             <a:avLst/>
           </a:prstGeom>
           <a:solidFill>
-            <a:srgbClr val="FFEBEE"/>
+            <a:srgbClr val="C62828"/>
           </a:solidFill>
-          <a:ln w="19050">
-            <a:solidFill>
-              <a:srgbClr val="C62828"/>
-            </a:solidFill>
-          </a:ln>
+          <a:ln/>
         </p:spPr>
         <p:style>
           <a:lnRef idx="1">
@@ -6266,131 +5765,94 @@
       </p:sp>
       <p:sp>
         <p:nvSpPr>
-          <p:cNvPr id="12" name="TextBox 11"/>
-          <p:cNvSpPr txBox="1"/>
-          <p:nvPr/>
-        </p:nvSpPr>
-        <p:spPr>
-          <a:xfrm>
-            <a:off x="3291840" y="4828032"/>
-            <a:ext cx="2560320" cy="658368"/>
-          </a:xfrm>
-          <a:prstGeom prst="rect">
-            <a:avLst/>
-          </a:prstGeom>
-          <a:noFill/>
-        </p:spPr>
-        <p:txBody>
-          <a:bodyPr wrap="square">
-            <a:spAutoFit/>
-          </a:bodyPr>
-          <a:lstStyle/>
-          <a:p>
-            <a:pPr algn="ctr"/>
-            <a:r>
-              <a:rPr sz="3400" b="1" i="0">
-                <a:solidFill>
-                  <a:srgbClr val="C62828"/>
-                </a:solidFill>
-                <a:latin typeface="Calibri"/>
-              </a:rPr>
-              <a:t>R$1.283</a:t>
-            </a:r>
-          </a:p>
-        </p:txBody>
-      </p:sp>
-      <p:sp>
-        <p:nvSpPr>
-          <p:cNvPr id="13" name="TextBox 12"/>
-          <p:cNvSpPr txBox="1"/>
-          <p:nvPr/>
-        </p:nvSpPr>
-        <p:spPr>
-          <a:xfrm>
-            <a:off x="3291840" y="5468112"/>
-            <a:ext cx="2560320" cy="320040"/>
-          </a:xfrm>
-          <a:prstGeom prst="rect">
-            <a:avLst/>
-          </a:prstGeom>
-          <a:noFill/>
-        </p:spPr>
-        <p:txBody>
-          <a:bodyPr wrap="square">
-            <a:spAutoFit/>
-          </a:bodyPr>
-          <a:lstStyle/>
-          <a:p>
-            <a:pPr algn="ctr"/>
-            <a:r>
-              <a:rPr sz="1150" b="1" i="0">
+          <p:cNvPr id="7" name="TextBox 6"/>
+          <p:cNvSpPr txBox="1"/>
+          <p:nvPr/>
+        </p:nvSpPr>
+        <p:spPr>
+          <a:xfrm>
+            <a:off x="384048" y="1124712"/>
+            <a:ext cx="3529584" cy="457200"/>
+          </a:xfrm>
+          <a:prstGeom prst="rect">
+            <a:avLst/>
+          </a:prstGeom>
+          <a:noFill/>
+        </p:spPr>
+        <p:txBody>
+          <a:bodyPr wrap="square">
+            <a:spAutoFit/>
+          </a:bodyPr>
+          <a:lstStyle/>
+          <a:p>
+            <a:pPr algn="l"/>
+            <a:r>
+              <a:rPr sz="1500" b="1" i="0">
+                <a:solidFill>
+                  <a:srgbClr val="FFFFFF"/>
+                </a:solidFill>
+                <a:latin typeface="Calibri"/>
+              </a:rPr>
+              <a:t>Abrir as Portas</a:t>
+            </a:r>
+          </a:p>
+        </p:txBody>
+      </p:sp>
+      <p:sp>
+        <p:nvSpPr>
+          <p:cNvPr id="8" name="TextBox 7"/>
+          <p:cNvSpPr txBox="1"/>
+          <p:nvPr/>
+        </p:nvSpPr>
+        <p:spPr>
+          <a:xfrm>
+            <a:off x="457200" y="1691640"/>
+            <a:ext cx="3383280" cy="1097280"/>
+          </a:xfrm>
+          <a:prstGeom prst="rect">
+            <a:avLst/>
+          </a:prstGeom>
+          <a:noFill/>
+        </p:spPr>
+        <p:txBody>
+          <a:bodyPr wrap="square">
+            <a:spAutoFit/>
+          </a:bodyPr>
+          <a:lstStyle/>
+          <a:p>
+            <a:pPr algn="l"/>
+            <a:r>
+              <a:rPr sz="1200" b="0" i="0">
                 <a:solidFill>
                   <a:srgbClr val="212121"/>
                 </a:solidFill>
                 <a:latin typeface="Calibri"/>
               </a:rPr>
-              <a:t>renda real 2025</a:t>
-            </a:r>
-          </a:p>
-        </p:txBody>
-      </p:sp>
-      <p:sp>
-        <p:nvSpPr>
-          <p:cNvPr id="14" name="TextBox 13"/>
-          <p:cNvSpPr txBox="1"/>
-          <p:nvPr/>
-        </p:nvSpPr>
-        <p:spPr>
-          <a:xfrm>
-            <a:off x="3291840" y="5779008"/>
-            <a:ext cx="2560320" cy="292608"/>
-          </a:xfrm>
-          <a:prstGeom prst="rect">
-            <a:avLst/>
-          </a:prstGeom>
-          <a:noFill/>
-        </p:spPr>
-        <p:txBody>
-          <a:bodyPr wrap="square">
-            <a:spAutoFit/>
-          </a:bodyPr>
-          <a:lstStyle/>
-          <a:p>
-            <a:pPr algn="ctr"/>
-            <a:r>
-              <a:rPr sz="950" b="0" i="1">
-                <a:solidFill>
-                  <a:srgbClr val="616161"/>
-                </a:solidFill>
-                <a:latin typeface="Calibri"/>
-              </a:rPr>
-              <a:t>queda vs R$1.345 em 2024</a:t>
-            </a:r>
-          </a:p>
-        </p:txBody>
-      </p:sp>
-      <p:sp>
-        <p:nvSpPr>
-          <p:cNvPr id="15" name="Rectangle 14"/>
+              <a:t>Ação 1:
+Cotas de acesso a cargos
+qualificados (meta: IR ≥ 0,80)</a:t>
+            </a:r>
+          </a:p>
+        </p:txBody>
+      </p:sp>
+      <p:sp>
+        <p:nvSpPr>
+          <p:cNvPr id="9" name="Rectangle 8"/>
           <p:cNvSpPr/>
           <p:nvPr/>
         </p:nvSpPr>
         <p:spPr>
           <a:xfrm>
-            <a:off x="6126480" y="4754880"/>
-            <a:ext cx="2743200" cy="1234440"/>
+            <a:off x="457200" y="2834640"/>
+            <a:ext cx="3383280" cy="18288"/>
           </a:xfrm>
           <a:prstGeom prst="rect">
             <a:avLst/>
           </a:prstGeom>
           <a:solidFill>
-            <a:srgbClr val="FFEBEE"/>
+            <a:srgbClr val="C62828"/>
           </a:solidFill>
-          <a:ln w="19050">
-            <a:solidFill>
-              <a:srgbClr val="C62828"/>
-            </a:solidFill>
-          </a:ln>
+          <a:ln/>
         </p:spPr>
         <p:style>
           <a:lnRef idx="1">
@@ -6416,132 +5878,60 @@
       </p:sp>
       <p:sp>
         <p:nvSpPr>
-          <p:cNvPr id="16" name="TextBox 15"/>
-          <p:cNvSpPr txBox="1"/>
-          <p:nvPr/>
-        </p:nvSpPr>
-        <p:spPr>
-          <a:xfrm>
-            <a:off x="6217920" y="4828032"/>
-            <a:ext cx="2560320" cy="658368"/>
-          </a:xfrm>
-          <a:prstGeom prst="rect">
-            <a:avLst/>
-          </a:prstGeom>
-          <a:noFill/>
-        </p:spPr>
-        <p:txBody>
-          <a:bodyPr wrap="square">
-            <a:spAutoFit/>
-          </a:bodyPr>
-          <a:lstStyle/>
-          <a:p>
-            <a:pPr algn="ctr"/>
-            <a:r>
-              <a:rPr sz="3400" b="1" i="0">
-                <a:solidFill>
-                  <a:srgbClr val="C62828"/>
-                </a:solidFill>
-                <a:latin typeface="Calibri"/>
-              </a:rPr>
-              <a:t>11%</a:t>
-            </a:r>
-          </a:p>
-        </p:txBody>
-      </p:sp>
-      <p:sp>
-        <p:nvSpPr>
-          <p:cNvPr id="17" name="TextBox 16"/>
-          <p:cNvSpPr txBox="1"/>
-          <p:nvPr/>
-        </p:nvSpPr>
-        <p:spPr>
-          <a:xfrm>
-            <a:off x="6217920" y="5468112"/>
-            <a:ext cx="2560320" cy="320040"/>
-          </a:xfrm>
-          <a:prstGeom prst="rect">
-            <a:avLst/>
-          </a:prstGeom>
-          <a:noFill/>
-        </p:spPr>
-        <p:txBody>
-          <a:bodyPr wrap="square">
-            <a:spAutoFit/>
-          </a:bodyPr>
-          <a:lstStyle/>
-          <a:p>
-            <a:pPr algn="ctr"/>
-            <a:r>
-              <a:rPr sz="1150" b="1" i="0">
+          <p:cNvPr id="10" name="TextBox 9"/>
+          <p:cNvSpPr txBox="1"/>
+          <p:nvPr/>
+        </p:nvSpPr>
+        <p:spPr>
+          <a:xfrm>
+            <a:off x="457200" y="2926080"/>
+            <a:ext cx="3383280" cy="1097280"/>
+          </a:xfrm>
+          <a:prstGeom prst="rect">
+            <a:avLst/>
+          </a:prstGeom>
+          <a:noFill/>
+        </p:spPr>
+        <p:txBody>
+          <a:bodyPr wrap="square">
+            <a:spAutoFit/>
+          </a:bodyPr>
+          <a:lstStyle/>
+          <a:p>
+            <a:pPr algn="l"/>
+            <a:r>
+              <a:rPr sz="1200" b="0" i="0">
                 <a:solidFill>
                   <a:srgbClr val="212121"/>
                 </a:solidFill>
                 <a:latin typeface="Calibri"/>
               </a:rPr>
-              <a:t>negros em alta
-qualificação</a:t>
-            </a:r>
-          </a:p>
-        </p:txBody>
-      </p:sp>
-      <p:sp>
-        <p:nvSpPr>
-          <p:cNvPr id="18" name="TextBox 17"/>
-          <p:cNvSpPr txBox="1"/>
-          <p:nvPr/>
-        </p:nvSpPr>
-        <p:spPr>
-          <a:xfrm>
-            <a:off x="6217920" y="5779008"/>
-            <a:ext cx="2560320" cy="292608"/>
-          </a:xfrm>
-          <a:prstGeom prst="rect">
-            <a:avLst/>
-          </a:prstGeom>
-          <a:noFill/>
-        </p:spPr>
-        <p:txBody>
-          <a:bodyPr wrap="square">
-            <a:spAutoFit/>
-          </a:bodyPr>
-          <a:lstStyle/>
-          <a:p>
-            <a:pPr algn="ctr"/>
-            <a:r>
-              <a:rPr sz="950" b="0" i="1">
-                <a:solidFill>
-                  <a:srgbClr val="616161"/>
-                </a:solidFill>
-                <a:latin typeface="Calibri"/>
-              </a:rPr>
-              <a:t>brancos: 22,4%</a:t>
-            </a:r>
-          </a:p>
-        </p:txBody>
-      </p:sp>
-      <p:sp>
-        <p:nvSpPr>
-          <p:cNvPr id="19" name="Rectangle 18"/>
+              <a:t>Ação 2:
+Formação profissional com
+recorte racial e bolsas de
+residência em empresas premium</a:t>
+            </a:r>
+          </a:p>
+        </p:txBody>
+      </p:sp>
+      <p:sp>
+        <p:nvSpPr>
+          <p:cNvPr id="11" name="Rectangle 10"/>
           <p:cNvSpPr/>
           <p:nvPr/>
         </p:nvSpPr>
         <p:spPr>
           <a:xfrm>
-            <a:off x="9052560" y="4754880"/>
-            <a:ext cx="2743200" cy="1234440"/>
+            <a:off x="365760" y="4114800"/>
+            <a:ext cx="3566160" cy="18288"/>
           </a:xfrm>
           <a:prstGeom prst="rect">
             <a:avLst/>
           </a:prstGeom>
           <a:solidFill>
-            <a:srgbClr val="FFF9E7"/>
+            <a:srgbClr val="C62828"/>
           </a:solidFill>
-          <a:ln w="19050">
-            <a:solidFill>
-              <a:srgbClr val="FF8F00"/>
-            </a:solidFill>
-          </a:ln>
+          <a:ln/>
         </p:spPr>
         <p:style>
           <a:lnRef idx="1">
@@ -6567,130 +5957,60 @@
       </p:sp>
       <p:sp>
         <p:nvSpPr>
-          <p:cNvPr id="20" name="TextBox 19"/>
-          <p:cNvSpPr txBox="1"/>
-          <p:nvPr/>
-        </p:nvSpPr>
-        <p:spPr>
-          <a:xfrm>
-            <a:off x="9144000" y="4828032"/>
-            <a:ext cx="2560320" cy="658368"/>
-          </a:xfrm>
-          <a:prstGeom prst="rect">
-            <a:avLst/>
-          </a:prstGeom>
-          <a:noFill/>
-        </p:spPr>
-        <p:txBody>
-          <a:bodyPr wrap="square">
-            <a:spAutoFit/>
-          </a:bodyPr>
-          <a:lstStyle/>
-          <a:p>
-            <a:pPr algn="ctr"/>
-            <a:r>
-              <a:rPr sz="3400" b="1" i="0">
-                <a:solidFill>
-                  <a:srgbClr val="FF8F00"/>
-                </a:solidFill>
-                <a:latin typeface="Calibri"/>
-              </a:rPr>
-              <a:t>+100</a:t>
-            </a:r>
-          </a:p>
-        </p:txBody>
-      </p:sp>
-      <p:sp>
-        <p:nvSpPr>
-          <p:cNvPr id="21" name="TextBox 20"/>
-          <p:cNvSpPr txBox="1"/>
-          <p:nvPr/>
-        </p:nvSpPr>
-        <p:spPr>
-          <a:xfrm>
-            <a:off x="9144000" y="5468112"/>
-            <a:ext cx="2560320" cy="320040"/>
-          </a:xfrm>
-          <a:prstGeom prst="rect">
-            <a:avLst/>
-          </a:prstGeom>
-          <a:noFill/>
-        </p:spPr>
-        <p:txBody>
-          <a:bodyPr wrap="square">
-            <a:spAutoFit/>
-          </a:bodyPr>
-          <a:lstStyle/>
-          <a:p>
-            <a:pPr algn="ctr"/>
-            <a:r>
-              <a:rPr sz="1150" b="1" i="0">
-                <a:solidFill>
-                  <a:srgbClr val="212121"/>
-                </a:solidFill>
-                <a:latin typeface="Calibri"/>
-              </a:rPr>
-              <a:t>anos para fechar
-o gap</a:t>
-            </a:r>
-          </a:p>
-        </p:txBody>
-      </p:sp>
-      <p:sp>
-        <p:nvSpPr>
-          <p:cNvPr id="22" name="TextBox 21"/>
-          <p:cNvSpPr txBox="1"/>
-          <p:nvPr/>
-        </p:nvSpPr>
-        <p:spPr>
-          <a:xfrm>
-            <a:off x="9144000" y="5779008"/>
-            <a:ext cx="2560320" cy="292608"/>
-          </a:xfrm>
-          <a:prstGeom prst="rect">
-            <a:avLst/>
-          </a:prstGeom>
-          <a:noFill/>
-        </p:spPr>
-        <p:txBody>
-          <a:bodyPr wrap="square">
-            <a:spAutoFit/>
-          </a:bodyPr>
-          <a:lstStyle/>
-          <a:p>
-            <a:pPr algn="ctr"/>
-            <a:r>
-              <a:rPr sz="950" b="0" i="1">
-                <a:solidFill>
-                  <a:srgbClr val="616161"/>
-                </a:solidFill>
-                <a:latin typeface="Calibri"/>
-              </a:rPr>
-              <a:t>no ritmo atual</a:t>
-            </a:r>
-          </a:p>
-        </p:txBody>
-      </p:sp>
-      <p:sp>
-        <p:nvSpPr>
-          <p:cNvPr id="23" name="Rectangle 22"/>
+          <p:cNvPr id="12" name="TextBox 11"/>
+          <p:cNvSpPr txBox="1"/>
+          <p:nvPr/>
+        </p:nvSpPr>
+        <p:spPr>
+          <a:xfrm>
+            <a:off x="411480" y="4206240"/>
+            <a:ext cx="3474720" cy="640080"/>
+          </a:xfrm>
+          <a:prstGeom prst="rect">
+            <a:avLst/>
+          </a:prstGeom>
+          <a:noFill/>
+        </p:spPr>
+        <p:txBody>
+          <a:bodyPr wrap="square">
+            <a:spAutoFit/>
+          </a:bodyPr>
+          <a:lstStyle/>
+          <a:p>
+            <a:pPr algn="l"/>
+            <a:r>
+              <a:rPr sz="1100" b="1" i="1">
+                <a:solidFill>
+                  <a:srgbClr val="C62828"/>
+                </a:solidFill>
+                <a:latin typeface="Calibri"/>
+              </a:rPr>
+              <a:t>Atacar onde os dados apontam:
+barreiras de ACESSO, não só salário</a:t>
+            </a:r>
+          </a:p>
+        </p:txBody>
+      </p:sp>
+      <p:sp>
+        <p:nvSpPr>
+          <p:cNvPr id="13" name="Rectangle 12"/>
           <p:cNvSpPr/>
           <p:nvPr/>
         </p:nvSpPr>
         <p:spPr>
           <a:xfrm>
-            <a:off x="274320" y="6309360"/>
-            <a:ext cx="11612880" cy="402336"/>
+            <a:off x="4251959" y="1097280"/>
+            <a:ext cx="3749039" cy="5349240"/>
           </a:xfrm>
           <a:prstGeom prst="rect">
             <a:avLst/>
           </a:prstGeom>
           <a:solidFill>
-            <a:srgbClr val="FFF9E7"/>
+            <a:srgbClr val="F5F5F5"/>
           </a:solidFill>
-          <a:ln w="15240">
+          <a:ln w="25400">
             <a:solidFill>
-              <a:srgbClr val="FF8F00"/>
+              <a:srgbClr val="1565C0"/>
             </a:solidFill>
           </a:ln>
         </p:spPr>
@@ -6718,55 +6038,20 @@
       </p:sp>
       <p:sp>
         <p:nvSpPr>
-          <p:cNvPr id="24" name="TextBox 23"/>
-          <p:cNvSpPr txBox="1"/>
-          <p:nvPr/>
-        </p:nvSpPr>
-        <p:spPr>
-          <a:xfrm>
-            <a:off x="411480" y="6400800"/>
-            <a:ext cx="11338560" cy="219456"/>
-          </a:xfrm>
-          <a:prstGeom prst="rect">
-            <a:avLst/>
-          </a:prstGeom>
-          <a:noFill/>
-        </p:spPr>
-        <p:txBody>
-          <a:bodyPr wrap="square">
-            <a:spAutoFit/>
-          </a:bodyPr>
-          <a:lstStyle/>
-          <a:p>
-            <a:pPr algn="ctr"/>
-            <a:r>
-              <a:rPr sz="1300" b="1" i="0">
-                <a:solidFill>
-                  <a:srgbClr val="1B2A4A"/>
-                </a:solidFill>
-                <a:latin typeface="Calibri"/>
-              </a:rPr>
-              <a:t>O Brasil está a produzir emprego, mas não prosperidade igualitária. Pleno emprego com segregação ocupacional é o cenário atual — e não se resolve sozinho.</a:t>
-            </a:r>
-          </a:p>
-        </p:txBody>
-      </p:sp>
-      <p:sp>
-        <p:nvSpPr>
-          <p:cNvPr id="25" name="Rectangle 24"/>
+          <p:cNvPr id="14" name="Rectangle 13"/>
           <p:cNvSpPr/>
           <p:nvPr/>
         </p:nvSpPr>
         <p:spPr>
           <a:xfrm>
-            <a:off x="0" y="6629400"/>
-            <a:ext cx="12188952" cy="228600"/>
+            <a:off x="4251959" y="1097280"/>
+            <a:ext cx="3749039" cy="502920"/>
           </a:xfrm>
           <a:prstGeom prst="rect">
             <a:avLst/>
           </a:prstGeom>
           <a:solidFill>
-            <a:srgbClr val="1B2A4A"/>
+            <a:srgbClr val="1565C0"/>
           </a:solidFill>
           <a:ln/>
         </p:spPr>
@@ -6794,7 +6079,626 @@
       </p:sp>
       <p:sp>
         <p:nvSpPr>
+          <p:cNvPr id="15" name="TextBox 14"/>
+          <p:cNvSpPr txBox="1"/>
+          <p:nvPr/>
+        </p:nvSpPr>
+        <p:spPr>
+          <a:xfrm>
+            <a:off x="4361687" y="1124712"/>
+            <a:ext cx="3529584" cy="457200"/>
+          </a:xfrm>
+          <a:prstGeom prst="rect">
+            <a:avLst/>
+          </a:prstGeom>
+          <a:noFill/>
+        </p:spPr>
+        <p:txBody>
+          <a:bodyPr wrap="square">
+            <a:spAutoFit/>
+          </a:bodyPr>
+          <a:lstStyle/>
+          <a:p>
+            <a:pPr algn="l"/>
+            <a:r>
+              <a:rPr sz="1500" b="1" i="0">
+                <a:solidFill>
+                  <a:srgbClr val="FFFFFF"/>
+                </a:solidFill>
+                <a:latin typeface="Calibri"/>
+              </a:rPr>
+              <a:t>Pagar Igual</a:t>
+            </a:r>
+          </a:p>
+        </p:txBody>
+      </p:sp>
+      <p:sp>
+        <p:nvSpPr>
+          <p:cNvPr id="16" name="TextBox 15"/>
+          <p:cNvSpPr txBox="1"/>
+          <p:nvPr/>
+        </p:nvSpPr>
+        <p:spPr>
+          <a:xfrm>
+            <a:off x="4434839" y="1691640"/>
+            <a:ext cx="3383280" cy="1097280"/>
+          </a:xfrm>
+          <a:prstGeom prst="rect">
+            <a:avLst/>
+          </a:prstGeom>
+          <a:noFill/>
+        </p:spPr>
+        <p:txBody>
+          <a:bodyPr wrap="square">
+            <a:spAutoFit/>
+          </a:bodyPr>
+          <a:lstStyle/>
+          <a:p>
+            <a:pPr algn="l"/>
+            <a:r>
+              <a:rPr sz="1200" b="0" i="0">
+                <a:solidFill>
+                  <a:srgbClr val="212121"/>
+                </a:solidFill>
+                <a:latin typeface="Calibri"/>
+              </a:rPr>
+              <a:t>Ação 1:
+Transparência salarial por raça
+obrigatória (empresas &gt; 100 fun.)</a:t>
+            </a:r>
+          </a:p>
+        </p:txBody>
+      </p:sp>
+      <p:sp>
+        <p:nvSpPr>
+          <p:cNvPr id="17" name="Rectangle 16"/>
+          <p:cNvSpPr/>
+          <p:nvPr/>
+        </p:nvSpPr>
+        <p:spPr>
+          <a:xfrm>
+            <a:off x="4434839" y="2834640"/>
+            <a:ext cx="3383280" cy="18288"/>
+          </a:xfrm>
+          <a:prstGeom prst="rect">
+            <a:avLst/>
+          </a:prstGeom>
+          <a:solidFill>
+            <a:srgbClr val="1565C0"/>
+          </a:solidFill>
+          <a:ln/>
+        </p:spPr>
+        <p:style>
+          <a:lnRef idx="1">
+            <a:schemeClr val="accent1"/>
+          </a:lnRef>
+          <a:fillRef idx="3">
+            <a:schemeClr val="accent1"/>
+          </a:fillRef>
+          <a:effectRef idx="2">
+            <a:schemeClr val="accent1"/>
+          </a:effectRef>
+          <a:fontRef idx="minor">
+            <a:schemeClr val="lt1"/>
+          </a:fontRef>
+        </p:style>
+        <p:txBody>
+          <a:bodyPr rtlCol="0" anchor="ctr"/>
+          <a:lstStyle/>
+          <a:p>
+            <a:pPr algn="ctr"/>
+          </a:p>
+        </p:txBody>
+      </p:sp>
+      <p:sp>
+        <p:nvSpPr>
+          <p:cNvPr id="18" name="TextBox 17"/>
+          <p:cNvSpPr txBox="1"/>
+          <p:nvPr/>
+        </p:nvSpPr>
+        <p:spPr>
+          <a:xfrm>
+            <a:off x="4434839" y="2926080"/>
+            <a:ext cx="3383280" cy="1097280"/>
+          </a:xfrm>
+          <a:prstGeom prst="rect">
+            <a:avLst/>
+          </a:prstGeom>
+          <a:noFill/>
+        </p:spPr>
+        <p:txBody>
+          <a:bodyPr wrap="square">
+            <a:spAutoFit/>
+          </a:bodyPr>
+          <a:lstStyle/>
+          <a:p>
+            <a:pPr algn="l"/>
+            <a:r>
+              <a:rPr sz="1200" b="0" i="0">
+                <a:solidFill>
+                  <a:srgbClr val="212121"/>
+                </a:solidFill>
+                <a:latin typeface="Calibri"/>
+              </a:rPr>
+              <a:t>Ação 2:
+Auditoria de igual pagamento
+por trabalho igual com
+penalidades progressivas</a:t>
+            </a:r>
+          </a:p>
+        </p:txBody>
+      </p:sp>
+      <p:sp>
+        <p:nvSpPr>
+          <p:cNvPr id="19" name="Rectangle 18"/>
+          <p:cNvSpPr/>
+          <p:nvPr/>
+        </p:nvSpPr>
+        <p:spPr>
+          <a:xfrm>
+            <a:off x="4343399" y="4114800"/>
+            <a:ext cx="3566160" cy="18288"/>
+          </a:xfrm>
+          <a:prstGeom prst="rect">
+            <a:avLst/>
+          </a:prstGeom>
+          <a:solidFill>
+            <a:srgbClr val="1565C0"/>
+          </a:solidFill>
+          <a:ln/>
+        </p:spPr>
+        <p:style>
+          <a:lnRef idx="1">
+            <a:schemeClr val="accent1"/>
+          </a:lnRef>
+          <a:fillRef idx="3">
+            <a:schemeClr val="accent1"/>
+          </a:fillRef>
+          <a:effectRef idx="2">
+            <a:schemeClr val="accent1"/>
+          </a:effectRef>
+          <a:fontRef idx="minor">
+            <a:schemeClr val="lt1"/>
+          </a:fontRef>
+        </p:style>
+        <p:txBody>
+          <a:bodyPr rtlCol="0" anchor="ctr"/>
+          <a:lstStyle/>
+          <a:p>
+            <a:pPr algn="ctr"/>
+          </a:p>
+        </p:txBody>
+      </p:sp>
+      <p:sp>
+        <p:nvSpPr>
+          <p:cNvPr id="20" name="TextBox 19"/>
+          <p:cNvSpPr txBox="1"/>
+          <p:nvPr/>
+        </p:nvSpPr>
+        <p:spPr>
+          <a:xfrm>
+            <a:off x="4389119" y="4206240"/>
+            <a:ext cx="3474720" cy="640080"/>
+          </a:xfrm>
+          <a:prstGeom prst="rect">
+            <a:avLst/>
+          </a:prstGeom>
+          <a:noFill/>
+        </p:spPr>
+        <p:txBody>
+          <a:bodyPr wrap="square">
+            <a:spAutoFit/>
+          </a:bodyPr>
+          <a:lstStyle/>
+          <a:p>
+            <a:pPr algn="l"/>
+            <a:r>
+              <a:rPr sz="1100" b="1" i="1">
+                <a:solidFill>
+                  <a:srgbClr val="1565C0"/>
+                </a:solidFill>
+                <a:latin typeface="Calibri"/>
+              </a:rPr>
+              <a:t>O gap residual de 6,2% é real
+e mensurável — e deve ser eliminado</a:t>
+            </a:r>
+          </a:p>
+        </p:txBody>
+      </p:sp>
+      <p:sp>
+        <p:nvSpPr>
+          <p:cNvPr id="21" name="Rectangle 20"/>
+          <p:cNvSpPr/>
+          <p:nvPr/>
+        </p:nvSpPr>
+        <p:spPr>
+          <a:xfrm>
+            <a:off x="8229598" y="1097280"/>
+            <a:ext cx="3749039" cy="5349240"/>
+          </a:xfrm>
+          <a:prstGeom prst="rect">
+            <a:avLst/>
+          </a:prstGeom>
+          <a:solidFill>
+            <a:srgbClr val="F5F5F5"/>
+          </a:solidFill>
+          <a:ln w="25400">
+            <a:solidFill>
+              <a:srgbClr val="2E7D32"/>
+            </a:solidFill>
+          </a:ln>
+        </p:spPr>
+        <p:style>
+          <a:lnRef idx="1">
+            <a:schemeClr val="accent1"/>
+          </a:lnRef>
+          <a:fillRef idx="3">
+            <a:schemeClr val="accent1"/>
+          </a:fillRef>
+          <a:effectRef idx="2">
+            <a:schemeClr val="accent1"/>
+          </a:effectRef>
+          <a:fontRef idx="minor">
+            <a:schemeClr val="lt1"/>
+          </a:fontRef>
+        </p:style>
+        <p:txBody>
+          <a:bodyPr rtlCol="0" anchor="ctr"/>
+          <a:lstStyle/>
+          <a:p>
+            <a:pPr algn="ctr"/>
+          </a:p>
+        </p:txBody>
+      </p:sp>
+      <p:sp>
+        <p:nvSpPr>
+          <p:cNvPr id="22" name="Rectangle 21"/>
+          <p:cNvSpPr/>
+          <p:nvPr/>
+        </p:nvSpPr>
+        <p:spPr>
+          <a:xfrm>
+            <a:off x="8229598" y="1097280"/>
+            <a:ext cx="3749039" cy="502920"/>
+          </a:xfrm>
+          <a:prstGeom prst="rect">
+            <a:avLst/>
+          </a:prstGeom>
+          <a:solidFill>
+            <a:srgbClr val="2E7D32"/>
+          </a:solidFill>
+          <a:ln/>
+        </p:spPr>
+        <p:style>
+          <a:lnRef idx="1">
+            <a:schemeClr val="accent1"/>
+          </a:lnRef>
+          <a:fillRef idx="3">
+            <a:schemeClr val="accent1"/>
+          </a:fillRef>
+          <a:effectRef idx="2">
+            <a:schemeClr val="accent1"/>
+          </a:effectRef>
+          <a:fontRef idx="minor">
+            <a:schemeClr val="lt1"/>
+          </a:fontRef>
+        </p:style>
+        <p:txBody>
+          <a:bodyPr rtlCol="0" anchor="ctr"/>
+          <a:lstStyle/>
+          <a:p>
+            <a:pPr algn="ctr"/>
+          </a:p>
+        </p:txBody>
+      </p:sp>
+      <p:sp>
+        <p:nvSpPr>
+          <p:cNvPr id="23" name="TextBox 22"/>
+          <p:cNvSpPr txBox="1"/>
+          <p:nvPr/>
+        </p:nvSpPr>
+        <p:spPr>
+          <a:xfrm>
+            <a:off x="8339326" y="1124712"/>
+            <a:ext cx="3529584" cy="457200"/>
+          </a:xfrm>
+          <a:prstGeom prst="rect">
+            <a:avLst/>
+          </a:prstGeom>
+          <a:noFill/>
+        </p:spPr>
+        <p:txBody>
+          <a:bodyPr wrap="square">
+            <a:spAutoFit/>
+          </a:bodyPr>
+          <a:lstStyle/>
+          <a:p>
+            <a:pPr algn="l"/>
+            <a:r>
+              <a:rPr sz="1500" b="1" i="0">
+                <a:solidFill>
+                  <a:srgbClr val="FFFFFF"/>
+                </a:solidFill>
+                <a:latin typeface="Calibri"/>
+              </a:rPr>
+              <a:t>Ampliar as Redes</a:t>
+            </a:r>
+          </a:p>
+        </p:txBody>
+      </p:sp>
+      <p:sp>
+        <p:nvSpPr>
+          <p:cNvPr id="24" name="TextBox 23"/>
+          <p:cNvSpPr txBox="1"/>
+          <p:nvPr/>
+        </p:nvSpPr>
+        <p:spPr>
+          <a:xfrm>
+            <a:off x="8412478" y="1691640"/>
+            <a:ext cx="3383280" cy="1097280"/>
+          </a:xfrm>
+          <a:prstGeom prst="rect">
+            <a:avLst/>
+          </a:prstGeom>
+          <a:noFill/>
+        </p:spPr>
+        <p:txBody>
+          <a:bodyPr wrap="square">
+            <a:spAutoFit/>
+          </a:bodyPr>
+          <a:lstStyle/>
+          <a:p>
+            <a:pPr algn="l"/>
+            <a:r>
+              <a:rPr sz="1200" b="0" i="0">
+                <a:solidFill>
+                  <a:srgbClr val="212121"/>
+                </a:solidFill>
+                <a:latin typeface="Calibri"/>
+              </a:rPr>
+              <a:t>Ação 1:
+Mentoria estruturada para elevar
+a posição de negros nas redes
+profissionais</a:t>
+            </a:r>
+          </a:p>
+        </p:txBody>
+      </p:sp>
+      <p:sp>
+        <p:nvSpPr>
+          <p:cNvPr id="25" name="Rectangle 24"/>
+          <p:cNvSpPr/>
+          <p:nvPr/>
+        </p:nvSpPr>
+        <p:spPr>
+          <a:xfrm>
+            <a:off x="8412478" y="2834640"/>
+            <a:ext cx="3383280" cy="18288"/>
+          </a:xfrm>
+          <a:prstGeom prst="rect">
+            <a:avLst/>
+          </a:prstGeom>
+          <a:solidFill>
+            <a:srgbClr val="2E7D32"/>
+          </a:solidFill>
+          <a:ln/>
+        </p:spPr>
+        <p:style>
+          <a:lnRef idx="1">
+            <a:schemeClr val="accent1"/>
+          </a:lnRef>
+          <a:fillRef idx="3">
+            <a:schemeClr val="accent1"/>
+          </a:fillRef>
+          <a:effectRef idx="2">
+            <a:schemeClr val="accent1"/>
+          </a:effectRef>
+          <a:fontRef idx="minor">
+            <a:schemeClr val="lt1"/>
+          </a:fontRef>
+        </p:style>
+        <p:txBody>
+          <a:bodyPr rtlCol="0" anchor="ctr"/>
+          <a:lstStyle/>
+          <a:p>
+            <a:pPr algn="ctr"/>
+          </a:p>
+        </p:txBody>
+      </p:sp>
+      <p:sp>
+        <p:nvSpPr>
           <p:cNvPr id="26" name="TextBox 25"/>
+          <p:cNvSpPr txBox="1"/>
+          <p:nvPr/>
+        </p:nvSpPr>
+        <p:spPr>
+          <a:xfrm>
+            <a:off x="8412478" y="2926080"/>
+            <a:ext cx="3383280" cy="1097280"/>
+          </a:xfrm>
+          <a:prstGeom prst="rect">
+            <a:avLst/>
+          </a:prstGeom>
+          <a:noFill/>
+        </p:spPr>
+        <p:txBody>
+          <a:bodyPr wrap="square">
+            <a:spAutoFit/>
+          </a:bodyPr>
+          <a:lstStyle/>
+          <a:p>
+            <a:pPr algn="l"/>
+            <a:r>
+              <a:rPr sz="1200" b="0" i="0">
+                <a:solidFill>
+                  <a:srgbClr val="212121"/>
+                </a:solidFill>
+                <a:latin typeface="Calibri"/>
+              </a:rPr>
+              <a:t>Ação 2:
+30% dos cargos de liderança
+(DAS + corporativo) para negros
+até 2030</a:t>
+            </a:r>
+          </a:p>
+        </p:txBody>
+      </p:sp>
+      <p:sp>
+        <p:nvSpPr>
+          <p:cNvPr id="27" name="Rectangle 26"/>
+          <p:cNvSpPr/>
+          <p:nvPr/>
+        </p:nvSpPr>
+        <p:spPr>
+          <a:xfrm>
+            <a:off x="8321038" y="4114800"/>
+            <a:ext cx="3566160" cy="18288"/>
+          </a:xfrm>
+          <a:prstGeom prst="rect">
+            <a:avLst/>
+          </a:prstGeom>
+          <a:solidFill>
+            <a:srgbClr val="2E7D32"/>
+          </a:solidFill>
+          <a:ln/>
+        </p:spPr>
+        <p:style>
+          <a:lnRef idx="1">
+            <a:schemeClr val="accent1"/>
+          </a:lnRef>
+          <a:fillRef idx="3">
+            <a:schemeClr val="accent1"/>
+          </a:fillRef>
+          <a:effectRef idx="2">
+            <a:schemeClr val="accent1"/>
+          </a:effectRef>
+          <a:fontRef idx="minor">
+            <a:schemeClr val="lt1"/>
+          </a:fontRef>
+        </p:style>
+        <p:txBody>
+          <a:bodyPr rtlCol="0" anchor="ctr"/>
+          <a:lstStyle/>
+          <a:p>
+            <a:pPr algn="ctr"/>
+          </a:p>
+        </p:txBody>
+      </p:sp>
+      <p:sp>
+        <p:nvSpPr>
+          <p:cNvPr id="28" name="TextBox 27"/>
+          <p:cNvSpPr txBox="1"/>
+          <p:nvPr/>
+        </p:nvSpPr>
+        <p:spPr>
+          <a:xfrm>
+            <a:off x="8366758" y="4206240"/>
+            <a:ext cx="3474720" cy="640080"/>
+          </a:xfrm>
+          <a:prstGeom prst="rect">
+            <a:avLst/>
+          </a:prstGeom>
+          <a:noFill/>
+        </p:spPr>
+        <p:txBody>
+          <a:bodyPr wrap="square">
+            <a:spAutoFit/>
+          </a:bodyPr>
+          <a:lstStyle/>
+          <a:p>
+            <a:pPr algn="l"/>
+            <a:r>
+              <a:rPr sz="1100" b="1" i="1">
+                <a:solidFill>
+                  <a:srgbClr val="2E7D32"/>
+                </a:solidFill>
+                <a:latin typeface="Calibri"/>
+              </a:rPr>
+              <a:t>Sem acesso às redes que convertem
+diplomas em empregos, nada muda</a:t>
+            </a:r>
+          </a:p>
+        </p:txBody>
+      </p:sp>
+      <p:sp>
+        <p:nvSpPr>
+          <p:cNvPr id="29" name="TextBox 28"/>
+          <p:cNvSpPr txBox="1"/>
+          <p:nvPr/>
+        </p:nvSpPr>
+        <p:spPr>
+          <a:xfrm>
+            <a:off x="274320" y="6355080"/>
+            <a:ext cx="11612880" cy="347472"/>
+          </a:xfrm>
+          <a:prstGeom prst="rect">
+            <a:avLst/>
+          </a:prstGeom>
+          <a:noFill/>
+        </p:spPr>
+        <p:txBody>
+          <a:bodyPr wrap="square">
+            <a:spAutoFit/>
+          </a:bodyPr>
+          <a:lstStyle/>
+          <a:p>
+            <a:pPr algn="ctr"/>
+            <a:r>
+              <a:rPr sz="1300" b="1" i="0">
+                <a:solidFill>
+                  <a:srgbClr val="C62828"/>
+                </a:solidFill>
+                <a:latin typeface="Calibri"/>
+              </a:rPr>
+              <a:t>⚠  Sem ação simultânea nos três eixos, fechar o gap levará mais de 100 anos no ritmo atual.</a:t>
+            </a:r>
+          </a:p>
+        </p:txBody>
+      </p:sp>
+      <p:sp>
+        <p:nvSpPr>
+          <p:cNvPr id="30" name="Rectangle 29"/>
+          <p:cNvSpPr/>
+          <p:nvPr/>
+        </p:nvSpPr>
+        <p:spPr>
+          <a:xfrm>
+            <a:off x="0" y="6629400"/>
+            <a:ext cx="12188952" cy="228600"/>
+          </a:xfrm>
+          <a:prstGeom prst="rect">
+            <a:avLst/>
+          </a:prstGeom>
+          <a:solidFill>
+            <a:srgbClr val="1B2A4A"/>
+          </a:solidFill>
+          <a:ln/>
+        </p:spPr>
+        <p:style>
+          <a:lnRef idx="1">
+            <a:schemeClr val="accent1"/>
+          </a:lnRef>
+          <a:fillRef idx="3">
+            <a:schemeClr val="accent1"/>
+          </a:fillRef>
+          <a:effectRef idx="2">
+            <a:schemeClr val="accent1"/>
+          </a:effectRef>
+          <a:fontRef idx="minor">
+            <a:schemeClr val="lt1"/>
+          </a:fontRef>
+        </p:style>
+        <p:txBody>
+          <a:bodyPr rtlCol="0" anchor="ctr"/>
+          <a:lstStyle/>
+          <a:p>
+            <a:pPr algn="ctr"/>
+          </a:p>
+        </p:txBody>
+      </p:sp>
+      <p:sp>
+        <p:nvSpPr>
+          <p:cNvPr id="31" name="TextBox 30"/>
           <p:cNvSpPr txBox="1"/>
           <p:nvPr/>
         </p:nvSpPr>
@@ -6829,7 +6733,7 @@
       </p:sp>
       <p:sp>
         <p:nvSpPr>
-          <p:cNvPr id="27" name="TextBox 26"/>
+          <p:cNvPr id="32" name="TextBox 31"/>
           <p:cNvSpPr txBox="1"/>
           <p:nvPr/>
         </p:nvSpPr>
@@ -6857,7 +6761,7 @@
                 </a:solidFill>
                 <a:latin typeface="Calibri"/>
               </a:rPr>
-              <a:t>12/13</a:t>
+              <a:t>12/14</a:t>
             </a:r>
           </a:p>
         </p:txBody>
@@ -6889,6 +6793,976 @@
         <p:spPr>
           <a:xfrm>
             <a:off x="0" y="0"/>
+            <a:ext cx="12188952" cy="960120"/>
+          </a:xfrm>
+          <a:prstGeom prst="rect">
+            <a:avLst/>
+          </a:prstGeom>
+          <a:solidFill>
+            <a:srgbClr val="1B2A4A"/>
+          </a:solidFill>
+          <a:ln/>
+        </p:spPr>
+        <p:style>
+          <a:lnRef idx="1">
+            <a:schemeClr val="accent1"/>
+          </a:lnRef>
+          <a:fillRef idx="3">
+            <a:schemeClr val="accent1"/>
+          </a:fillRef>
+          <a:effectRef idx="2">
+            <a:schemeClr val="accent1"/>
+          </a:effectRef>
+          <a:fontRef idx="minor">
+            <a:schemeClr val="lt1"/>
+          </a:fontRef>
+        </p:style>
+        <p:txBody>
+          <a:bodyPr rtlCol="0" anchor="ctr"/>
+          <a:lstStyle/>
+          <a:p>
+            <a:pPr algn="ctr"/>
+          </a:p>
+        </p:txBody>
+      </p:sp>
+      <p:sp>
+        <p:nvSpPr>
+          <p:cNvPr id="3" name="TextBox 2"/>
+          <p:cNvSpPr txBox="1"/>
+          <p:nvPr/>
+        </p:nvSpPr>
+        <p:spPr>
+          <a:xfrm>
+            <a:off x="320040" y="73152"/>
+            <a:ext cx="11247120" cy="502920"/>
+          </a:xfrm>
+          <a:prstGeom prst="rect">
+            <a:avLst/>
+          </a:prstGeom>
+          <a:noFill/>
+        </p:spPr>
+        <p:txBody>
+          <a:bodyPr wrap="square">
+            <a:spAutoFit/>
+          </a:bodyPr>
+          <a:lstStyle/>
+          <a:p>
+            <a:pPr algn="l"/>
+            <a:r>
+              <a:rPr sz="2600" b="1" i="0">
+                <a:solidFill>
+                  <a:srgbClr val="FFFFFF"/>
+                </a:solidFill>
+                <a:latin typeface="Calibri"/>
+              </a:rPr>
+              <a:t>A Urgência — O Que Está em Jogo</a:t>
+            </a:r>
+          </a:p>
+        </p:txBody>
+      </p:sp>
+      <p:sp>
+        <p:nvSpPr>
+          <p:cNvPr id="4" name="TextBox 3"/>
+          <p:cNvSpPr txBox="1"/>
+          <p:nvPr/>
+        </p:nvSpPr>
+        <p:spPr>
+          <a:xfrm>
+            <a:off x="320040" y="576072"/>
+            <a:ext cx="11247120" cy="320040"/>
+          </a:xfrm>
+          <a:prstGeom prst="rect">
+            <a:avLst/>
+          </a:prstGeom>
+          <a:noFill/>
+        </p:spPr>
+        <p:txBody>
+          <a:bodyPr wrap="square">
+            <a:spAutoFit/>
+          </a:bodyPr>
+          <a:lstStyle/>
+          <a:p>
+            <a:pPr algn="l"/>
+            <a:r>
+              <a:rPr sz="1300" b="0" i="0">
+                <a:solidFill>
+                  <a:srgbClr val="BBDEFB"/>
+                </a:solidFill>
+                <a:latin typeface="Calibri"/>
+              </a:rPr>
+              <a:t>Pleno emprego sem prosperidade: 94,4% empregados, renda real estagnada</a:t>
+            </a:r>
+          </a:p>
+        </p:txBody>
+      </p:sp>
+      <p:pic>
+        <p:nvPicPr>
+          <p:cNvPr id="5" name="Picture 4" descr="estado_h4_tendencia.png"/>
+          <p:cNvPicPr>
+            <a:picLocks noChangeAspect="1"/>
+          </p:cNvPicPr>
+          <p:nvPr/>
+        </p:nvPicPr>
+        <p:blipFill>
+          <a:blip r:embed="rId2"/>
+          <a:stretch>
+            <a:fillRect/>
+          </a:stretch>
+        </p:blipFill>
+        <p:spPr>
+          <a:xfrm>
+            <a:off x="274320" y="1097280"/>
+            <a:ext cx="5669280" cy="2387374"/>
+          </a:xfrm>
+          <a:prstGeom prst="rect">
+            <a:avLst/>
+          </a:prstGeom>
+        </p:spPr>
+      </p:pic>
+      <p:pic>
+        <p:nvPicPr>
+          <p:cNvPr id="6" name="Picture 5" descr="estado_h5_armadilha.png"/>
+          <p:cNvPicPr>
+            <a:picLocks noChangeAspect="1"/>
+          </p:cNvPicPr>
+          <p:nvPr/>
+        </p:nvPicPr>
+        <p:blipFill>
+          <a:blip r:embed="rId3"/>
+          <a:stretch>
+            <a:fillRect/>
+          </a:stretch>
+        </p:blipFill>
+        <p:spPr>
+          <a:xfrm>
+            <a:off x="6126480" y="1097280"/>
+            <a:ext cx="5760720" cy="2423207"/>
+          </a:xfrm>
+          <a:prstGeom prst="rect">
+            <a:avLst/>
+          </a:prstGeom>
+        </p:spPr>
+      </p:pic>
+      <p:sp>
+        <p:nvSpPr>
+          <p:cNvPr id="7" name="Rectangle 6"/>
+          <p:cNvSpPr/>
+          <p:nvPr/>
+        </p:nvSpPr>
+        <p:spPr>
+          <a:xfrm>
+            <a:off x="274320" y="4754880"/>
+            <a:ext cx="2743200" cy="1234440"/>
+          </a:xfrm>
+          <a:prstGeom prst="rect">
+            <a:avLst/>
+          </a:prstGeom>
+          <a:solidFill>
+            <a:srgbClr val="E8F5E9"/>
+          </a:solidFill>
+          <a:ln w="19050">
+            <a:solidFill>
+              <a:srgbClr val="2E7D32"/>
+            </a:solidFill>
+          </a:ln>
+        </p:spPr>
+        <p:style>
+          <a:lnRef idx="1">
+            <a:schemeClr val="accent1"/>
+          </a:lnRef>
+          <a:fillRef idx="3">
+            <a:schemeClr val="accent1"/>
+          </a:fillRef>
+          <a:effectRef idx="2">
+            <a:schemeClr val="accent1"/>
+          </a:effectRef>
+          <a:fontRef idx="minor">
+            <a:schemeClr val="lt1"/>
+          </a:fontRef>
+        </p:style>
+        <p:txBody>
+          <a:bodyPr rtlCol="0" anchor="ctr"/>
+          <a:lstStyle/>
+          <a:p>
+            <a:pPr algn="ctr"/>
+          </a:p>
+        </p:txBody>
+      </p:sp>
+      <p:sp>
+        <p:nvSpPr>
+          <p:cNvPr id="8" name="TextBox 7"/>
+          <p:cNvSpPr txBox="1"/>
+          <p:nvPr/>
+        </p:nvSpPr>
+        <p:spPr>
+          <a:xfrm>
+            <a:off x="365760" y="4828032"/>
+            <a:ext cx="2560320" cy="658368"/>
+          </a:xfrm>
+          <a:prstGeom prst="rect">
+            <a:avLst/>
+          </a:prstGeom>
+          <a:noFill/>
+        </p:spPr>
+        <p:txBody>
+          <a:bodyPr wrap="square">
+            <a:spAutoFit/>
+          </a:bodyPr>
+          <a:lstStyle/>
+          <a:p>
+            <a:pPr algn="ctr"/>
+            <a:r>
+              <a:rPr sz="3400" b="1" i="0">
+                <a:solidFill>
+                  <a:srgbClr val="2E7D32"/>
+                </a:solidFill>
+                <a:latin typeface="Calibri"/>
+              </a:rPr>
+              <a:t>94,4%</a:t>
+            </a:r>
+          </a:p>
+        </p:txBody>
+      </p:sp>
+      <p:sp>
+        <p:nvSpPr>
+          <p:cNvPr id="9" name="TextBox 8"/>
+          <p:cNvSpPr txBox="1"/>
+          <p:nvPr/>
+        </p:nvSpPr>
+        <p:spPr>
+          <a:xfrm>
+            <a:off x="365760" y="5468112"/>
+            <a:ext cx="2560320" cy="320040"/>
+          </a:xfrm>
+          <a:prstGeom prst="rect">
+            <a:avLst/>
+          </a:prstGeom>
+          <a:noFill/>
+        </p:spPr>
+        <p:txBody>
+          <a:bodyPr wrap="square">
+            <a:spAutoFit/>
+          </a:bodyPr>
+          <a:lstStyle/>
+          <a:p>
+            <a:pPr algn="ctr"/>
+            <a:r>
+              <a:rPr sz="1150" b="1" i="0">
+                <a:solidFill>
+                  <a:srgbClr val="212121"/>
+                </a:solidFill>
+                <a:latin typeface="Calibri"/>
+              </a:rPr>
+              <a:t>emprego em 2025</a:t>
+            </a:r>
+          </a:p>
+        </p:txBody>
+      </p:sp>
+      <p:sp>
+        <p:nvSpPr>
+          <p:cNvPr id="10" name="TextBox 9"/>
+          <p:cNvSpPr txBox="1"/>
+          <p:nvPr/>
+        </p:nvSpPr>
+        <p:spPr>
+          <a:xfrm>
+            <a:off x="365760" y="5779008"/>
+            <a:ext cx="2560320" cy="292608"/>
+          </a:xfrm>
+          <a:prstGeom prst="rect">
+            <a:avLst/>
+          </a:prstGeom>
+          <a:noFill/>
+        </p:spPr>
+        <p:txBody>
+          <a:bodyPr wrap="square">
+            <a:spAutoFit/>
+          </a:bodyPr>
+          <a:lstStyle/>
+          <a:p>
+            <a:pPr algn="ctr"/>
+            <a:r>
+              <a:rPr sz="950" b="0" i="1">
+                <a:solidFill>
+                  <a:srgbClr val="616161"/>
+                </a:solidFill>
+                <a:latin typeface="Calibri"/>
+              </a:rPr>
+              <a:t>máxima histórica da série</a:t>
+            </a:r>
+          </a:p>
+        </p:txBody>
+      </p:sp>
+      <p:sp>
+        <p:nvSpPr>
+          <p:cNvPr id="11" name="Rectangle 10"/>
+          <p:cNvSpPr/>
+          <p:nvPr/>
+        </p:nvSpPr>
+        <p:spPr>
+          <a:xfrm>
+            <a:off x="3200400" y="4754880"/>
+            <a:ext cx="2743200" cy="1234440"/>
+          </a:xfrm>
+          <a:prstGeom prst="rect">
+            <a:avLst/>
+          </a:prstGeom>
+          <a:solidFill>
+            <a:srgbClr val="FFEBEE"/>
+          </a:solidFill>
+          <a:ln w="19050">
+            <a:solidFill>
+              <a:srgbClr val="C62828"/>
+            </a:solidFill>
+          </a:ln>
+        </p:spPr>
+        <p:style>
+          <a:lnRef idx="1">
+            <a:schemeClr val="accent1"/>
+          </a:lnRef>
+          <a:fillRef idx="3">
+            <a:schemeClr val="accent1"/>
+          </a:fillRef>
+          <a:effectRef idx="2">
+            <a:schemeClr val="accent1"/>
+          </a:effectRef>
+          <a:fontRef idx="minor">
+            <a:schemeClr val="lt1"/>
+          </a:fontRef>
+        </p:style>
+        <p:txBody>
+          <a:bodyPr rtlCol="0" anchor="ctr"/>
+          <a:lstStyle/>
+          <a:p>
+            <a:pPr algn="ctr"/>
+          </a:p>
+        </p:txBody>
+      </p:sp>
+      <p:sp>
+        <p:nvSpPr>
+          <p:cNvPr id="12" name="TextBox 11"/>
+          <p:cNvSpPr txBox="1"/>
+          <p:nvPr/>
+        </p:nvSpPr>
+        <p:spPr>
+          <a:xfrm>
+            <a:off x="3291840" y="4828032"/>
+            <a:ext cx="2560320" cy="658368"/>
+          </a:xfrm>
+          <a:prstGeom prst="rect">
+            <a:avLst/>
+          </a:prstGeom>
+          <a:noFill/>
+        </p:spPr>
+        <p:txBody>
+          <a:bodyPr wrap="square">
+            <a:spAutoFit/>
+          </a:bodyPr>
+          <a:lstStyle/>
+          <a:p>
+            <a:pPr algn="ctr"/>
+            <a:r>
+              <a:rPr sz="3400" b="1" i="0">
+                <a:solidFill>
+                  <a:srgbClr val="C62828"/>
+                </a:solidFill>
+                <a:latin typeface="Calibri"/>
+              </a:rPr>
+              <a:t>R$1.283</a:t>
+            </a:r>
+          </a:p>
+        </p:txBody>
+      </p:sp>
+      <p:sp>
+        <p:nvSpPr>
+          <p:cNvPr id="13" name="TextBox 12"/>
+          <p:cNvSpPr txBox="1"/>
+          <p:nvPr/>
+        </p:nvSpPr>
+        <p:spPr>
+          <a:xfrm>
+            <a:off x="3291840" y="5468112"/>
+            <a:ext cx="2560320" cy="320040"/>
+          </a:xfrm>
+          <a:prstGeom prst="rect">
+            <a:avLst/>
+          </a:prstGeom>
+          <a:noFill/>
+        </p:spPr>
+        <p:txBody>
+          <a:bodyPr wrap="square">
+            <a:spAutoFit/>
+          </a:bodyPr>
+          <a:lstStyle/>
+          <a:p>
+            <a:pPr algn="ctr"/>
+            <a:r>
+              <a:rPr sz="1150" b="1" i="0">
+                <a:solidFill>
+                  <a:srgbClr val="212121"/>
+                </a:solidFill>
+                <a:latin typeface="Calibri"/>
+              </a:rPr>
+              <a:t>renda real 2025</a:t>
+            </a:r>
+          </a:p>
+        </p:txBody>
+      </p:sp>
+      <p:sp>
+        <p:nvSpPr>
+          <p:cNvPr id="14" name="TextBox 13"/>
+          <p:cNvSpPr txBox="1"/>
+          <p:nvPr/>
+        </p:nvSpPr>
+        <p:spPr>
+          <a:xfrm>
+            <a:off x="3291840" y="5779008"/>
+            <a:ext cx="2560320" cy="292608"/>
+          </a:xfrm>
+          <a:prstGeom prst="rect">
+            <a:avLst/>
+          </a:prstGeom>
+          <a:noFill/>
+        </p:spPr>
+        <p:txBody>
+          <a:bodyPr wrap="square">
+            <a:spAutoFit/>
+          </a:bodyPr>
+          <a:lstStyle/>
+          <a:p>
+            <a:pPr algn="ctr"/>
+            <a:r>
+              <a:rPr sz="950" b="0" i="1">
+                <a:solidFill>
+                  <a:srgbClr val="616161"/>
+                </a:solidFill>
+                <a:latin typeface="Calibri"/>
+              </a:rPr>
+              <a:t>queda vs R$1.345 em 2024</a:t>
+            </a:r>
+          </a:p>
+        </p:txBody>
+      </p:sp>
+      <p:sp>
+        <p:nvSpPr>
+          <p:cNvPr id="15" name="Rectangle 14"/>
+          <p:cNvSpPr/>
+          <p:nvPr/>
+        </p:nvSpPr>
+        <p:spPr>
+          <a:xfrm>
+            <a:off x="6126480" y="4754880"/>
+            <a:ext cx="2743200" cy="1234440"/>
+          </a:xfrm>
+          <a:prstGeom prst="rect">
+            <a:avLst/>
+          </a:prstGeom>
+          <a:solidFill>
+            <a:srgbClr val="FFEBEE"/>
+          </a:solidFill>
+          <a:ln w="19050">
+            <a:solidFill>
+              <a:srgbClr val="C62828"/>
+            </a:solidFill>
+          </a:ln>
+        </p:spPr>
+        <p:style>
+          <a:lnRef idx="1">
+            <a:schemeClr val="accent1"/>
+          </a:lnRef>
+          <a:fillRef idx="3">
+            <a:schemeClr val="accent1"/>
+          </a:fillRef>
+          <a:effectRef idx="2">
+            <a:schemeClr val="accent1"/>
+          </a:effectRef>
+          <a:fontRef idx="minor">
+            <a:schemeClr val="lt1"/>
+          </a:fontRef>
+        </p:style>
+        <p:txBody>
+          <a:bodyPr rtlCol="0" anchor="ctr"/>
+          <a:lstStyle/>
+          <a:p>
+            <a:pPr algn="ctr"/>
+          </a:p>
+        </p:txBody>
+      </p:sp>
+      <p:sp>
+        <p:nvSpPr>
+          <p:cNvPr id="16" name="TextBox 15"/>
+          <p:cNvSpPr txBox="1"/>
+          <p:nvPr/>
+        </p:nvSpPr>
+        <p:spPr>
+          <a:xfrm>
+            <a:off x="6217920" y="4828032"/>
+            <a:ext cx="2560320" cy="658368"/>
+          </a:xfrm>
+          <a:prstGeom prst="rect">
+            <a:avLst/>
+          </a:prstGeom>
+          <a:noFill/>
+        </p:spPr>
+        <p:txBody>
+          <a:bodyPr wrap="square">
+            <a:spAutoFit/>
+          </a:bodyPr>
+          <a:lstStyle/>
+          <a:p>
+            <a:pPr algn="ctr"/>
+            <a:r>
+              <a:rPr sz="3400" b="1" i="0">
+                <a:solidFill>
+                  <a:srgbClr val="C62828"/>
+                </a:solidFill>
+                <a:latin typeface="Calibri"/>
+              </a:rPr>
+              <a:t>11%</a:t>
+            </a:r>
+          </a:p>
+        </p:txBody>
+      </p:sp>
+      <p:sp>
+        <p:nvSpPr>
+          <p:cNvPr id="17" name="TextBox 16"/>
+          <p:cNvSpPr txBox="1"/>
+          <p:nvPr/>
+        </p:nvSpPr>
+        <p:spPr>
+          <a:xfrm>
+            <a:off x="6217920" y="5468112"/>
+            <a:ext cx="2560320" cy="320040"/>
+          </a:xfrm>
+          <a:prstGeom prst="rect">
+            <a:avLst/>
+          </a:prstGeom>
+          <a:noFill/>
+        </p:spPr>
+        <p:txBody>
+          <a:bodyPr wrap="square">
+            <a:spAutoFit/>
+          </a:bodyPr>
+          <a:lstStyle/>
+          <a:p>
+            <a:pPr algn="ctr"/>
+            <a:r>
+              <a:rPr sz="1150" b="1" i="0">
+                <a:solidFill>
+                  <a:srgbClr val="212121"/>
+                </a:solidFill>
+                <a:latin typeface="Calibri"/>
+              </a:rPr>
+              <a:t>negros em alta
+qualificação</a:t>
+            </a:r>
+          </a:p>
+        </p:txBody>
+      </p:sp>
+      <p:sp>
+        <p:nvSpPr>
+          <p:cNvPr id="18" name="TextBox 17"/>
+          <p:cNvSpPr txBox="1"/>
+          <p:nvPr/>
+        </p:nvSpPr>
+        <p:spPr>
+          <a:xfrm>
+            <a:off x="6217920" y="5779008"/>
+            <a:ext cx="2560320" cy="292608"/>
+          </a:xfrm>
+          <a:prstGeom prst="rect">
+            <a:avLst/>
+          </a:prstGeom>
+          <a:noFill/>
+        </p:spPr>
+        <p:txBody>
+          <a:bodyPr wrap="square">
+            <a:spAutoFit/>
+          </a:bodyPr>
+          <a:lstStyle/>
+          <a:p>
+            <a:pPr algn="ctr"/>
+            <a:r>
+              <a:rPr sz="950" b="0" i="1">
+                <a:solidFill>
+                  <a:srgbClr val="616161"/>
+                </a:solidFill>
+                <a:latin typeface="Calibri"/>
+              </a:rPr>
+              <a:t>brancos: 22,4%</a:t>
+            </a:r>
+          </a:p>
+        </p:txBody>
+      </p:sp>
+      <p:sp>
+        <p:nvSpPr>
+          <p:cNvPr id="19" name="Rectangle 18"/>
+          <p:cNvSpPr/>
+          <p:nvPr/>
+        </p:nvSpPr>
+        <p:spPr>
+          <a:xfrm>
+            <a:off x="9052560" y="4754880"/>
+            <a:ext cx="2743200" cy="1234440"/>
+          </a:xfrm>
+          <a:prstGeom prst="rect">
+            <a:avLst/>
+          </a:prstGeom>
+          <a:solidFill>
+            <a:srgbClr val="FFF9E7"/>
+          </a:solidFill>
+          <a:ln w="19050">
+            <a:solidFill>
+              <a:srgbClr val="FF8F00"/>
+            </a:solidFill>
+          </a:ln>
+        </p:spPr>
+        <p:style>
+          <a:lnRef idx="1">
+            <a:schemeClr val="accent1"/>
+          </a:lnRef>
+          <a:fillRef idx="3">
+            <a:schemeClr val="accent1"/>
+          </a:fillRef>
+          <a:effectRef idx="2">
+            <a:schemeClr val="accent1"/>
+          </a:effectRef>
+          <a:fontRef idx="minor">
+            <a:schemeClr val="lt1"/>
+          </a:fontRef>
+        </p:style>
+        <p:txBody>
+          <a:bodyPr rtlCol="0" anchor="ctr"/>
+          <a:lstStyle/>
+          <a:p>
+            <a:pPr algn="ctr"/>
+          </a:p>
+        </p:txBody>
+      </p:sp>
+      <p:sp>
+        <p:nvSpPr>
+          <p:cNvPr id="20" name="TextBox 19"/>
+          <p:cNvSpPr txBox="1"/>
+          <p:nvPr/>
+        </p:nvSpPr>
+        <p:spPr>
+          <a:xfrm>
+            <a:off x="9144000" y="4828032"/>
+            <a:ext cx="2560320" cy="658368"/>
+          </a:xfrm>
+          <a:prstGeom prst="rect">
+            <a:avLst/>
+          </a:prstGeom>
+          <a:noFill/>
+        </p:spPr>
+        <p:txBody>
+          <a:bodyPr wrap="square">
+            <a:spAutoFit/>
+          </a:bodyPr>
+          <a:lstStyle/>
+          <a:p>
+            <a:pPr algn="ctr"/>
+            <a:r>
+              <a:rPr sz="3400" b="1" i="0">
+                <a:solidFill>
+                  <a:srgbClr val="FF8F00"/>
+                </a:solidFill>
+                <a:latin typeface="Calibri"/>
+              </a:rPr>
+              <a:t>+100</a:t>
+            </a:r>
+          </a:p>
+        </p:txBody>
+      </p:sp>
+      <p:sp>
+        <p:nvSpPr>
+          <p:cNvPr id="21" name="TextBox 20"/>
+          <p:cNvSpPr txBox="1"/>
+          <p:nvPr/>
+        </p:nvSpPr>
+        <p:spPr>
+          <a:xfrm>
+            <a:off x="9144000" y="5468112"/>
+            <a:ext cx="2560320" cy="320040"/>
+          </a:xfrm>
+          <a:prstGeom prst="rect">
+            <a:avLst/>
+          </a:prstGeom>
+          <a:noFill/>
+        </p:spPr>
+        <p:txBody>
+          <a:bodyPr wrap="square">
+            <a:spAutoFit/>
+          </a:bodyPr>
+          <a:lstStyle/>
+          <a:p>
+            <a:pPr algn="ctr"/>
+            <a:r>
+              <a:rPr sz="1150" b="1" i="0">
+                <a:solidFill>
+                  <a:srgbClr val="212121"/>
+                </a:solidFill>
+                <a:latin typeface="Calibri"/>
+              </a:rPr>
+              <a:t>anos para fechar
+o gap</a:t>
+            </a:r>
+          </a:p>
+        </p:txBody>
+      </p:sp>
+      <p:sp>
+        <p:nvSpPr>
+          <p:cNvPr id="22" name="TextBox 21"/>
+          <p:cNvSpPr txBox="1"/>
+          <p:nvPr/>
+        </p:nvSpPr>
+        <p:spPr>
+          <a:xfrm>
+            <a:off x="9144000" y="5779008"/>
+            <a:ext cx="2560320" cy="292608"/>
+          </a:xfrm>
+          <a:prstGeom prst="rect">
+            <a:avLst/>
+          </a:prstGeom>
+          <a:noFill/>
+        </p:spPr>
+        <p:txBody>
+          <a:bodyPr wrap="square">
+            <a:spAutoFit/>
+          </a:bodyPr>
+          <a:lstStyle/>
+          <a:p>
+            <a:pPr algn="ctr"/>
+            <a:r>
+              <a:rPr sz="950" b="0" i="1">
+                <a:solidFill>
+                  <a:srgbClr val="616161"/>
+                </a:solidFill>
+                <a:latin typeface="Calibri"/>
+              </a:rPr>
+              <a:t>no ritmo atual</a:t>
+            </a:r>
+          </a:p>
+        </p:txBody>
+      </p:sp>
+      <p:sp>
+        <p:nvSpPr>
+          <p:cNvPr id="23" name="Rectangle 22"/>
+          <p:cNvSpPr/>
+          <p:nvPr/>
+        </p:nvSpPr>
+        <p:spPr>
+          <a:xfrm>
+            <a:off x="274320" y="6309360"/>
+            <a:ext cx="11612880" cy="402336"/>
+          </a:xfrm>
+          <a:prstGeom prst="rect">
+            <a:avLst/>
+          </a:prstGeom>
+          <a:solidFill>
+            <a:srgbClr val="FFF9E7"/>
+          </a:solidFill>
+          <a:ln w="15240">
+            <a:solidFill>
+              <a:srgbClr val="FF8F00"/>
+            </a:solidFill>
+          </a:ln>
+        </p:spPr>
+        <p:style>
+          <a:lnRef idx="1">
+            <a:schemeClr val="accent1"/>
+          </a:lnRef>
+          <a:fillRef idx="3">
+            <a:schemeClr val="accent1"/>
+          </a:fillRef>
+          <a:effectRef idx="2">
+            <a:schemeClr val="accent1"/>
+          </a:effectRef>
+          <a:fontRef idx="minor">
+            <a:schemeClr val="lt1"/>
+          </a:fontRef>
+        </p:style>
+        <p:txBody>
+          <a:bodyPr rtlCol="0" anchor="ctr"/>
+          <a:lstStyle/>
+          <a:p>
+            <a:pPr algn="ctr"/>
+          </a:p>
+        </p:txBody>
+      </p:sp>
+      <p:sp>
+        <p:nvSpPr>
+          <p:cNvPr id="24" name="TextBox 23"/>
+          <p:cNvSpPr txBox="1"/>
+          <p:nvPr/>
+        </p:nvSpPr>
+        <p:spPr>
+          <a:xfrm>
+            <a:off x="411480" y="6400800"/>
+            <a:ext cx="11338560" cy="219456"/>
+          </a:xfrm>
+          <a:prstGeom prst="rect">
+            <a:avLst/>
+          </a:prstGeom>
+          <a:noFill/>
+        </p:spPr>
+        <p:txBody>
+          <a:bodyPr wrap="square">
+            <a:spAutoFit/>
+          </a:bodyPr>
+          <a:lstStyle/>
+          <a:p>
+            <a:pPr algn="ctr"/>
+            <a:r>
+              <a:rPr sz="1300" b="1" i="0">
+                <a:solidFill>
+                  <a:srgbClr val="1B2A4A"/>
+                </a:solidFill>
+                <a:latin typeface="Calibri"/>
+              </a:rPr>
+              <a:t>O Brasil está a produzir emprego, mas não prosperidade igualitária. Pleno emprego com segregação ocupacional é o cenário atual — e não se resolve sozinho.</a:t>
+            </a:r>
+          </a:p>
+        </p:txBody>
+      </p:sp>
+      <p:sp>
+        <p:nvSpPr>
+          <p:cNvPr id="25" name="Rectangle 24"/>
+          <p:cNvSpPr/>
+          <p:nvPr/>
+        </p:nvSpPr>
+        <p:spPr>
+          <a:xfrm>
+            <a:off x="0" y="6629400"/>
+            <a:ext cx="12188952" cy="228600"/>
+          </a:xfrm>
+          <a:prstGeom prst="rect">
+            <a:avLst/>
+          </a:prstGeom>
+          <a:solidFill>
+            <a:srgbClr val="1B2A4A"/>
+          </a:solidFill>
+          <a:ln/>
+        </p:spPr>
+        <p:style>
+          <a:lnRef idx="1">
+            <a:schemeClr val="accent1"/>
+          </a:lnRef>
+          <a:fillRef idx="3">
+            <a:schemeClr val="accent1"/>
+          </a:fillRef>
+          <a:effectRef idx="2">
+            <a:schemeClr val="accent1"/>
+          </a:effectRef>
+          <a:fontRef idx="minor">
+            <a:schemeClr val="lt1"/>
+          </a:fontRef>
+        </p:style>
+        <p:txBody>
+          <a:bodyPr rtlCol="0" anchor="ctr"/>
+          <a:lstStyle/>
+          <a:p>
+            <a:pPr algn="ctr"/>
+          </a:p>
+        </p:txBody>
+      </p:sp>
+      <p:sp>
+        <p:nvSpPr>
+          <p:cNvPr id="26" name="TextBox 25"/>
+          <p:cNvSpPr txBox="1"/>
+          <p:nvPr/>
+        </p:nvSpPr>
+        <p:spPr>
+          <a:xfrm>
+            <a:off x="182880" y="6647688"/>
+            <a:ext cx="10515600" cy="201168"/>
+          </a:xfrm>
+          <a:prstGeom prst="rect">
+            <a:avLst/>
+          </a:prstGeom>
+          <a:noFill/>
+        </p:spPr>
+        <p:txBody>
+          <a:bodyPr wrap="square">
+            <a:spAutoFit/>
+          </a:bodyPr>
+          <a:lstStyle/>
+          <a:p>
+            <a:pPr algn="l"/>
+            <a:r>
+              <a:rPr sz="750" b="0" i="0">
+                <a:solidFill>
+                  <a:srgbClr val="BBDEFB"/>
+                </a:solidFill>
+                <a:latin typeface="Calibri"/>
+              </a:rPr>
+              <a:t>PNAD Contínua 2016–2025  |  15,9 milhões de observações  |  Ricardo Calheiros — MBA USP/ESALQ</a:t>
+            </a:r>
+          </a:p>
+        </p:txBody>
+      </p:sp>
+      <p:sp>
+        <p:nvSpPr>
+          <p:cNvPr id="27" name="TextBox 26"/>
+          <p:cNvSpPr txBox="1"/>
+          <p:nvPr/>
+        </p:nvSpPr>
+        <p:spPr>
+          <a:xfrm>
+            <a:off x="11704320" y="6647688"/>
+            <a:ext cx="457200" cy="201168"/>
+          </a:xfrm>
+          <a:prstGeom prst="rect">
+            <a:avLst/>
+          </a:prstGeom>
+          <a:noFill/>
+        </p:spPr>
+        <p:txBody>
+          <a:bodyPr wrap="square">
+            <a:spAutoFit/>
+          </a:bodyPr>
+          <a:lstStyle/>
+          <a:p>
+            <a:pPr algn="r"/>
+            <a:r>
+              <a:rPr sz="750" b="0" i="0">
+                <a:solidFill>
+                  <a:srgbClr val="FFFFFF"/>
+                </a:solidFill>
+                <a:latin typeface="Calibri"/>
+              </a:rPr>
+              <a:t>13/14</a:t>
+            </a:r>
+          </a:p>
+        </p:txBody>
+      </p:sp>
+    </p:spTree>
+  </p:cSld>
+  <p:clrMapOvr>
+    <a:masterClrMapping/>
+  </p:clrMapOvr>
+</p:sld>
+</file>
+
+<file path=ppt/slides/slide14.xml><?xml version="1.0" encoding="utf-8"?>
+<p:sld xmlns:a="http://schemas.openxmlformats.org/drawingml/2006/main" xmlns:p="http://schemas.openxmlformats.org/presentationml/2006/main" xmlns:r="http://schemas.openxmlformats.org/officeDocument/2006/relationships">
+  <p:cSld>
+    <p:spTree>
+      <p:nvGrpSpPr>
+        <p:cNvPr id="1" name=""/>
+        <p:cNvGrpSpPr/>
+        <p:nvPr/>
+      </p:nvGrpSpPr>
+      <p:grpSpPr/>
+      <p:sp>
+        <p:nvSpPr>
+          <p:cNvPr id="2" name="Rectangle 1"/>
+          <p:cNvSpPr/>
+          <p:nvPr/>
+        </p:nvSpPr>
+        <p:spPr>
+          <a:xfrm>
+            <a:off x="0" y="0"/>
             <a:ext cx="12188952" cy="6858000"/>
           </a:xfrm>
           <a:prstGeom prst="rect">
@@ -8645,7 +9519,7 @@
                 </a:solidFill>
                 <a:latin typeface="Calibri"/>
               </a:rPr>
-              <a:t>2/13</a:t>
+              <a:t>2/14</a:t>
             </a:r>
           </a:p>
         </p:txBody>
@@ -9344,7 +10218,7 @@
                 </a:solidFill>
                 <a:latin typeface="Calibri"/>
               </a:rPr>
-              <a:t>3/13</a:t>
+              <a:t>3/14</a:t>
             </a:r>
           </a:p>
         </p:txBody>
@@ -10165,7 +11039,7 @@
                 </a:solidFill>
                 <a:latin typeface="Calibri"/>
               </a:rPr>
-              <a:t>4/13</a:t>
+              <a:t>4/14</a:t>
             </a:r>
           </a:p>
         </p:txBody>
@@ -10809,7 +11683,7 @@
                 </a:solidFill>
                 <a:latin typeface="Calibri"/>
               </a:rPr>
-              <a:t>5/13</a:t>
+              <a:t>5/14</a:t>
             </a:r>
           </a:p>
         </p:txBody>
@@ -11763,7 +12637,7 @@
                 </a:solidFill>
                 <a:latin typeface="Calibri"/>
               </a:rPr>
-              <a:t>6/13</a:t>
+              <a:t>6/14</a:t>
             </a:r>
           </a:p>
         </p:txBody>
@@ -11857,7 +12731,7 @@
                 </a:solidFill>
                 <a:latin typeface="Calibri"/>
               </a:rPr>
-              <a:t>A Rede que Exclui — Capital Social e Mobilidade</a:t>
+              <a:t>Quem Mais Sofre: a Mulher Negra</a:t>
             </a:r>
           </a:p>
         </p:txBody>
@@ -11892,14 +12766,14 @@
                 </a:solidFill>
                 <a:latin typeface="Calibri"/>
               </a:rPr>
-              <a:t>Negros ficam fora das redes que convertem diplomas em empregos</a:t>
+              <a:t>Ela consegue ENTRAR em boas ocupações — mas é a mais barrada de CHEGAR AO TOPO da renda</a:t>
             </a:r>
           </a:p>
         </p:txBody>
       </p:sp>
       <p:pic>
         <p:nvPicPr>
-          <p:cNvPr id="5" name="Picture 4" descr="sna_rede_demografica.png"/>
+          <p:cNvPr id="5" name="Picture 4" descr="grupo_rg_interseccional.png"/>
           <p:cNvPicPr>
             <a:picLocks noChangeAspect="1"/>
           </p:cNvPicPr>
@@ -11913,8 +12787,8 @@
         </p:blipFill>
         <p:spPr>
           <a:xfrm>
-            <a:off x="274320" y="1097280"/>
-            <a:ext cx="5669280" cy="4240050"/>
+            <a:off x="365760" y="1188720"/>
+            <a:ext cx="6858000" cy="4534895"/>
           </a:xfrm>
           <a:prstGeom prst="rect">
             <a:avLst/>
@@ -11923,49 +12797,14 @@
       </p:pic>
       <p:sp>
         <p:nvSpPr>
-          <p:cNvPr id="6" name="TextBox 5"/>
-          <p:cNvSpPr txBox="1"/>
-          <p:nvPr/>
-        </p:nvSpPr>
-        <p:spPr>
-          <a:xfrm>
-            <a:off x="6309360" y="1097280"/>
-            <a:ext cx="5577840" cy="365760"/>
-          </a:xfrm>
-          <a:prstGeom prst="rect">
-            <a:avLst/>
-          </a:prstGeom>
-          <a:noFill/>
-        </p:spPr>
-        <p:txBody>
-          <a:bodyPr wrap="square">
-            <a:spAutoFit/>
-          </a:bodyPr>
-          <a:lstStyle/>
-          <a:p>
-            <a:pPr algn="l"/>
-            <a:r>
-              <a:rPr sz="1600" b="1" i="0">
-                <a:solidFill>
-                  <a:srgbClr val="1B2A4A"/>
-                </a:solidFill>
-                <a:latin typeface="Calibri"/>
-              </a:rPr>
-              <a:t>O que são as redes profissionais?</a:t>
-            </a:r>
-          </a:p>
-        </p:txBody>
-      </p:sp>
-      <p:sp>
-        <p:nvSpPr>
-          <p:cNvPr id="7" name="Rectangle 6"/>
+          <p:cNvPr id="6" name="Rectangle 5"/>
           <p:cNvSpPr/>
           <p:nvPr/>
         </p:nvSpPr>
         <p:spPr>
           <a:xfrm>
-            <a:off x="6309360" y="1572768"/>
-            <a:ext cx="5577840" cy="777240"/>
+            <a:off x="7498079" y="1417320"/>
+            <a:ext cx="4297680" cy="1783080"/>
           </a:xfrm>
           <a:prstGeom prst="rect">
             <a:avLst/>
@@ -11973,9 +12812,9 @@
           <a:solidFill>
             <a:srgbClr val="F5F5F5"/>
           </a:solidFill>
-          <a:ln w="6350">
+          <a:ln w="19050">
             <a:solidFill>
-              <a:srgbClr val="616161"/>
+              <a:srgbClr val="1565C0"/>
             </a:solidFill>
           </a:ln>
         </p:spPr>
@@ -12003,49 +12842,119 @@
       </p:sp>
       <p:sp>
         <p:nvSpPr>
+          <p:cNvPr id="7" name="TextBox 6"/>
+          <p:cNvSpPr txBox="1"/>
+          <p:nvPr/>
+        </p:nvSpPr>
+        <p:spPr>
+          <a:xfrm>
+            <a:off x="7589519" y="1490472"/>
+            <a:ext cx="4114800" cy="658368"/>
+          </a:xfrm>
+          <a:prstGeom prst="rect">
+            <a:avLst/>
+          </a:prstGeom>
+          <a:noFill/>
+        </p:spPr>
+        <p:txBody>
+          <a:bodyPr wrap="square">
+            <a:spAutoFit/>
+          </a:bodyPr>
+          <a:lstStyle/>
+          <a:p>
+            <a:pPr algn="ctr"/>
+            <a:r>
+              <a:rPr sz="3400" b="1" i="0">
+                <a:solidFill>
+                  <a:srgbClr val="1565C0"/>
+                </a:solidFill>
+                <a:latin typeface="Calibri"/>
+              </a:rPr>
+              <a:t>1,33x</a:t>
+            </a:r>
+          </a:p>
+        </p:txBody>
+      </p:sp>
+      <p:sp>
+        <p:nvSpPr>
           <p:cNvPr id="8" name="TextBox 7"/>
           <p:cNvSpPr txBox="1"/>
           <p:nvPr/>
         </p:nvSpPr>
         <p:spPr>
           <a:xfrm>
-            <a:off x="6446520" y="1618488"/>
-            <a:ext cx="5303520" cy="685800"/>
-          </a:xfrm>
-          <a:prstGeom prst="rect">
-            <a:avLst/>
-          </a:prstGeom>
-          <a:noFill/>
-        </p:spPr>
-        <p:txBody>
-          <a:bodyPr wrap="square">
-            <a:spAutoFit/>
-          </a:bodyPr>
-          <a:lstStyle/>
-          <a:p>
-            <a:pPr algn="l"/>
-            <a:r>
-              <a:rPr sz="1250" b="0" i="0">
-                <a:solidFill>
-                  <a:srgbClr val="1565C0"/>
-                </a:solidFill>
-                <a:latin typeface="Calibri"/>
-              </a:rPr>
-              <a:t>◆  Vagas nunca anunciadas são preenchidas por indicação — quem está na rede chega antes.</a:t>
-            </a:r>
-          </a:p>
-        </p:txBody>
-      </p:sp>
-      <p:sp>
-        <p:nvSpPr>
-          <p:cNvPr id="9" name="Rectangle 8"/>
+            <a:off x="7589519" y="2130552"/>
+            <a:ext cx="4114800" cy="320040"/>
+          </a:xfrm>
+          <a:prstGeom prst="rect">
+            <a:avLst/>
+          </a:prstGeom>
+          <a:noFill/>
+        </p:spPr>
+        <p:txBody>
+          <a:bodyPr wrap="square">
+            <a:spAutoFit/>
+          </a:bodyPr>
+          <a:lstStyle/>
+          <a:p>
+            <a:pPr algn="ctr"/>
+            <a:r>
+              <a:rPr sz="1150" b="1" i="0">
+                <a:solidFill>
+                  <a:srgbClr val="212121"/>
+                </a:solidFill>
+                <a:latin typeface="Calibri"/>
+              </a:rPr>
+              <a:t>Acesso à categoria qualificada</a:t>
+            </a:r>
+          </a:p>
+        </p:txBody>
+      </p:sp>
+      <p:sp>
+        <p:nvSpPr>
+          <p:cNvPr id="9" name="TextBox 8"/>
+          <p:cNvSpPr txBox="1"/>
+          <p:nvPr/>
+        </p:nvSpPr>
+        <p:spPr>
+          <a:xfrm>
+            <a:off x="7589519" y="2441448"/>
+            <a:ext cx="4114800" cy="292608"/>
+          </a:xfrm>
+          <a:prstGeom prst="rect">
+            <a:avLst/>
+          </a:prstGeom>
+          <a:noFill/>
+        </p:spPr>
+        <p:txBody>
+          <a:bodyPr wrap="square">
+            <a:spAutoFit/>
+          </a:bodyPr>
+          <a:lstStyle/>
+          <a:p>
+            <a:pPr algn="ctr"/>
+            <a:r>
+              <a:rPr sz="950" b="0" i="1">
+                <a:solidFill>
+                  <a:srgbClr val="616161"/>
+                </a:solidFill>
+                <a:latin typeface="Calibri"/>
+              </a:rPr>
+              <a:t>mulher negra ACIMA do homem branco</a:t>
+            </a:r>
+          </a:p>
+        </p:txBody>
+      </p:sp>
+      <p:sp>
+        <p:nvSpPr>
+          <p:cNvPr id="10" name="Rectangle 9"/>
           <p:cNvSpPr/>
           <p:nvPr/>
         </p:nvSpPr>
         <p:spPr>
           <a:xfrm>
-            <a:off x="6309360" y="2441448"/>
-            <a:ext cx="5577840" cy="777240"/>
+            <a:off x="7498079" y="3429000"/>
+            <a:ext cx="4297680" cy="1783080"/>
           </a:xfrm>
           <a:prstGeom prst="rect">
             <a:avLst/>
@@ -12053,9 +12962,9 @@
           <a:solidFill>
             <a:srgbClr val="F5F5F5"/>
           </a:solidFill>
-          <a:ln w="6350">
+          <a:ln w="19050">
             <a:solidFill>
-              <a:srgbClr val="616161"/>
+              <a:srgbClr val="C62828"/>
             </a:solidFill>
           </a:ln>
         </p:spPr>
@@ -12083,59 +12992,129 @@
       </p:sp>
       <p:sp>
         <p:nvSpPr>
-          <p:cNvPr id="10" name="TextBox 9"/>
-          <p:cNvSpPr txBox="1"/>
-          <p:nvPr/>
-        </p:nvSpPr>
-        <p:spPr>
-          <a:xfrm>
-            <a:off x="6446520" y="2487168"/>
-            <a:ext cx="5303520" cy="685800"/>
-          </a:xfrm>
-          <a:prstGeom prst="rect">
-            <a:avLst/>
-          </a:prstGeom>
-          <a:noFill/>
-        </p:spPr>
-        <p:txBody>
-          <a:bodyPr wrap="square">
-            <a:spAutoFit/>
-          </a:bodyPr>
-          <a:lstStyle/>
-          <a:p>
-            <a:pPr algn="l"/>
-            <a:r>
-              <a:rPr sz="1250" b="0" i="0">
-                <a:solidFill>
-                  <a:srgbClr val="1565C0"/>
-                </a:solidFill>
-                <a:latin typeface="Calibri"/>
-              </a:rPr>
-              <a:t>◆  Mentores, referências e "network" determinam promoção tão quanto o desempenho.</a:t>
-            </a:r>
-          </a:p>
-        </p:txBody>
-      </p:sp>
-      <p:sp>
-        <p:nvSpPr>
-          <p:cNvPr id="11" name="Rectangle 10"/>
+          <p:cNvPr id="11" name="TextBox 10"/>
+          <p:cNvSpPr txBox="1"/>
+          <p:nvPr/>
+        </p:nvSpPr>
+        <p:spPr>
+          <a:xfrm>
+            <a:off x="7589519" y="3502152"/>
+            <a:ext cx="4114800" cy="658368"/>
+          </a:xfrm>
+          <a:prstGeom prst="rect">
+            <a:avLst/>
+          </a:prstGeom>
+          <a:noFill/>
+        </p:spPr>
+        <p:txBody>
+          <a:bodyPr wrap="square">
+            <a:spAutoFit/>
+          </a:bodyPr>
+          <a:lstStyle/>
+          <a:p>
+            <a:pPr algn="ctr"/>
+            <a:r>
+              <a:rPr sz="3400" b="1" i="0">
+                <a:solidFill>
+                  <a:srgbClr val="C62828"/>
+                </a:solidFill>
+                <a:latin typeface="Calibri"/>
+              </a:rPr>
+              <a:t>0,34x</a:t>
+            </a:r>
+          </a:p>
+        </p:txBody>
+      </p:sp>
+      <p:sp>
+        <p:nvSpPr>
+          <p:cNvPr id="12" name="TextBox 11"/>
+          <p:cNvSpPr txBox="1"/>
+          <p:nvPr/>
+        </p:nvSpPr>
+        <p:spPr>
+          <a:xfrm>
+            <a:off x="7589519" y="4142232"/>
+            <a:ext cx="4114800" cy="320040"/>
+          </a:xfrm>
+          <a:prstGeom prst="rect">
+            <a:avLst/>
+          </a:prstGeom>
+          <a:noFill/>
+        </p:spPr>
+        <p:txBody>
+          <a:bodyPr wrap="square">
+            <a:spAutoFit/>
+          </a:bodyPr>
+          <a:lstStyle/>
+          <a:p>
+            <a:pPr algn="ctr"/>
+            <a:r>
+              <a:rPr sz="1150" b="1" i="0">
+                <a:solidFill>
+                  <a:srgbClr val="212121"/>
+                </a:solidFill>
+                <a:latin typeface="Calibri"/>
+              </a:rPr>
+              <a:t>Topo de renda (10% mais ricos)</a:t>
+            </a:r>
+          </a:p>
+        </p:txBody>
+      </p:sp>
+      <p:sp>
+        <p:nvSpPr>
+          <p:cNvPr id="13" name="TextBox 12"/>
+          <p:cNvSpPr txBox="1"/>
+          <p:nvPr/>
+        </p:nvSpPr>
+        <p:spPr>
+          <a:xfrm>
+            <a:off x="7589519" y="4453128"/>
+            <a:ext cx="4114800" cy="292608"/>
+          </a:xfrm>
+          <a:prstGeom prst="rect">
+            <a:avLst/>
+          </a:prstGeom>
+          <a:noFill/>
+        </p:spPr>
+        <p:txBody>
+          <a:bodyPr wrap="square">
+            <a:spAutoFit/>
+          </a:bodyPr>
+          <a:lstStyle/>
+          <a:p>
+            <a:pPr algn="ctr"/>
+            <a:r>
+              <a:rPr sz="950" b="0" i="1">
+                <a:solidFill>
+                  <a:srgbClr val="616161"/>
+                </a:solidFill>
+                <a:latin typeface="Calibri"/>
+              </a:rPr>
+              <a:t>a MAIS excluída de todos os grupos</a:t>
+            </a:r>
+          </a:p>
+        </p:txBody>
+      </p:sp>
+      <p:sp>
+        <p:nvSpPr>
+          <p:cNvPr id="14" name="Rectangle 13"/>
           <p:cNvSpPr/>
           <p:nvPr/>
         </p:nvSpPr>
         <p:spPr>
           <a:xfrm>
-            <a:off x="6309360" y="3310128"/>
-            <a:ext cx="5577840" cy="777240"/>
+            <a:off x="365760" y="5897880"/>
+            <a:ext cx="11521440" cy="548640"/>
           </a:xfrm>
           <a:prstGeom prst="rect">
             <a:avLst/>
           </a:prstGeom>
           <a:solidFill>
-            <a:srgbClr val="F5F5F5"/>
+            <a:srgbClr val="FFF9E7"/>
           </a:solidFill>
-          <a:ln w="6350">
+          <a:ln w="15240">
             <a:solidFill>
-              <a:srgbClr val="616161"/>
+              <a:srgbClr val="FF8F00"/>
             </a:solidFill>
           </a:ln>
         </p:spPr>
@@ -12163,61 +13142,57 @@
       </p:sp>
       <p:sp>
         <p:nvSpPr>
-          <p:cNvPr id="12" name="TextBox 11"/>
-          <p:cNvSpPr txBox="1"/>
-          <p:nvPr/>
-        </p:nvSpPr>
-        <p:spPr>
-          <a:xfrm>
-            <a:off x="6446520" y="3355848"/>
-            <a:ext cx="5303520" cy="685800"/>
-          </a:xfrm>
-          <a:prstGeom prst="rect">
-            <a:avLst/>
-          </a:prstGeom>
-          <a:noFill/>
-        </p:spPr>
-        <p:txBody>
-          <a:bodyPr wrap="square">
-            <a:spAutoFit/>
-          </a:bodyPr>
-          <a:lstStyle/>
-          <a:p>
-            <a:pPr algn="l"/>
-            <a:r>
-              <a:rPr sz="1250" b="0" i="0">
-                <a:solidFill>
-                  <a:srgbClr val="212121"/>
-                </a:solidFill>
-                <a:latin typeface="Calibri"/>
-              </a:rPr>
-              <a:t>▸  A análise mostra: brancos atuam como conectores (brokers) em TODOS os níveis educacionais.</a:t>
-            </a:r>
-          </a:p>
-        </p:txBody>
-      </p:sp>
-      <p:sp>
-        <p:nvSpPr>
-          <p:cNvPr id="13" name="Rectangle 12"/>
+          <p:cNvPr id="15" name="TextBox 14"/>
+          <p:cNvSpPr txBox="1"/>
+          <p:nvPr/>
+        </p:nvSpPr>
+        <p:spPr>
+          <a:xfrm>
+            <a:off x="502920" y="5989320"/>
+            <a:ext cx="11247120" cy="365760"/>
+          </a:xfrm>
+          <a:prstGeom prst="rect">
+            <a:avLst/>
+          </a:prstGeom>
+          <a:noFill/>
+        </p:spPr>
+        <p:txBody>
+          <a:bodyPr wrap="square">
+            <a:spAutoFit/>
+          </a:bodyPr>
+          <a:lstStyle/>
+          <a:p>
+            <a:pPr algn="ctr"/>
+            <a:r>
+              <a:rPr sz="1300" b="1" i="0">
+                <a:solidFill>
+                  <a:srgbClr val="1B2A4A"/>
+                </a:solidFill>
+                <a:latin typeface="Calibri"/>
+              </a:rPr>
+              <a:t>O teto de vidro não é neutro: combina raça e gênero exatamente onde mais importa — o topo. A mulher negra entra na categoria, mas não sobe à renda do topo.</a:t>
+            </a:r>
+          </a:p>
+        </p:txBody>
+      </p:sp>
+      <p:sp>
+        <p:nvSpPr>
+          <p:cNvPr id="16" name="Rectangle 15"/>
           <p:cNvSpPr/>
           <p:nvPr/>
         </p:nvSpPr>
         <p:spPr>
           <a:xfrm>
-            <a:off x="6309360" y="4178808"/>
-            <a:ext cx="5577840" cy="777240"/>
+            <a:off x="0" y="6629400"/>
+            <a:ext cx="12188952" cy="228600"/>
           </a:xfrm>
           <a:prstGeom prst="rect">
             <a:avLst/>
           </a:prstGeom>
           <a:solidFill>
-            <a:srgbClr val="FFEBEE"/>
+            <a:srgbClr val="1B2A4A"/>
           </a:solidFill>
-          <a:ln w="6350">
-            <a:solidFill>
-              <a:srgbClr val="C62828"/>
-            </a:solidFill>
-          </a:ln>
+          <a:ln/>
         </p:spPr>
         <p:style>
           <a:lnRef idx="1">
@@ -12243,243 +13218,7 @@
       </p:sp>
       <p:sp>
         <p:nvSpPr>
-          <p:cNvPr id="14" name="TextBox 13"/>
-          <p:cNvSpPr txBox="1"/>
-          <p:nvPr/>
-        </p:nvSpPr>
-        <p:spPr>
-          <a:xfrm>
-            <a:off x="6446520" y="4224528"/>
-            <a:ext cx="5303520" cy="685800"/>
-          </a:xfrm>
-          <a:prstGeom prst="rect">
-            <a:avLst/>
-          </a:prstGeom>
-          <a:noFill/>
-        </p:spPr>
-        <p:txBody>
-          <a:bodyPr wrap="square">
-            <a:spAutoFit/>
-          </a:bodyPr>
-          <a:lstStyle/>
-          <a:p>
-            <a:pPr algn="l"/>
-            <a:r>
-              <a:rPr sz="1250" b="0" i="0">
-                <a:solidFill>
-                  <a:srgbClr val="C62828"/>
-                </a:solidFill>
-                <a:latin typeface="Calibri"/>
-              </a:rPr>
-              <a:t>✗  Negros ficam nas bordas da rede — mesmo com pós-graduação, sem acesso ao centro.</a:t>
-            </a:r>
-          </a:p>
-        </p:txBody>
-      </p:sp>
-      <p:sp>
-        <p:nvSpPr>
-          <p:cNvPr id="15" name="Rectangle 14"/>
-          <p:cNvSpPr/>
-          <p:nvPr/>
-        </p:nvSpPr>
-        <p:spPr>
-          <a:xfrm>
-            <a:off x="6309360" y="5047488"/>
-            <a:ext cx="5577840" cy="777240"/>
-          </a:xfrm>
-          <a:prstGeom prst="rect">
-            <a:avLst/>
-          </a:prstGeom>
-          <a:solidFill>
-            <a:srgbClr val="F5F5F5"/>
-          </a:solidFill>
-          <a:ln w="6350">
-            <a:solidFill>
-              <a:srgbClr val="616161"/>
-            </a:solidFill>
-          </a:ln>
-        </p:spPr>
-        <p:style>
-          <a:lnRef idx="1">
-            <a:schemeClr val="accent1"/>
-          </a:lnRef>
-          <a:fillRef idx="3">
-            <a:schemeClr val="accent1"/>
-          </a:fillRef>
-          <a:effectRef idx="2">
-            <a:schemeClr val="accent1"/>
-          </a:effectRef>
-          <a:fontRef idx="minor">
-            <a:schemeClr val="lt1"/>
-          </a:fontRef>
-        </p:style>
-        <p:txBody>
-          <a:bodyPr rtlCol="0" anchor="ctr"/>
-          <a:lstStyle/>
-          <a:p>
-            <a:pPr algn="ctr"/>
-          </a:p>
-        </p:txBody>
-      </p:sp>
-      <p:sp>
-        <p:nvSpPr>
-          <p:cNvPr id="16" name="TextBox 15"/>
-          <p:cNvSpPr txBox="1"/>
-          <p:nvPr/>
-        </p:nvSpPr>
-        <p:spPr>
-          <a:xfrm>
-            <a:off x="6446520" y="5093208"/>
-            <a:ext cx="5303520" cy="685800"/>
-          </a:xfrm>
-          <a:prstGeom prst="rect">
-            <a:avLst/>
-          </a:prstGeom>
-          <a:noFill/>
-        </p:spPr>
-        <p:txBody>
-          <a:bodyPr wrap="square">
-            <a:spAutoFit/>
-          </a:bodyPr>
-          <a:lstStyle/>
-          <a:p>
-            <a:pPr algn="l"/>
-            <a:r>
-              <a:rPr sz="1250" b="0" i="0">
-                <a:solidFill>
-                  <a:srgbClr val="212121"/>
-                </a:solidFill>
-                <a:latin typeface="Calibri"/>
-              </a:rPr>
-              <a:t>▸  Resultado: o diploma negro vale menos porque falta a rede que o converte em oportunidade.</a:t>
-            </a:r>
-          </a:p>
-        </p:txBody>
-      </p:sp>
-      <p:sp>
-        <p:nvSpPr>
-          <p:cNvPr id="17" name="Rectangle 16"/>
-          <p:cNvSpPr/>
-          <p:nvPr/>
-        </p:nvSpPr>
-        <p:spPr>
-          <a:xfrm>
-            <a:off x="274320" y="5989320"/>
-            <a:ext cx="5943600" cy="621792"/>
-          </a:xfrm>
-          <a:prstGeom prst="rect">
-            <a:avLst/>
-          </a:prstGeom>
-          <a:solidFill>
-            <a:srgbClr val="E3F2FD"/>
-          </a:solidFill>
-          <a:ln w="15240">
-            <a:solidFill>
-              <a:srgbClr val="1565C0"/>
-            </a:solidFill>
-          </a:ln>
-        </p:spPr>
-        <p:style>
-          <a:lnRef idx="1">
-            <a:schemeClr val="accent1"/>
-          </a:lnRef>
-          <a:fillRef idx="3">
-            <a:schemeClr val="accent1"/>
-          </a:fillRef>
-          <a:effectRef idx="2">
-            <a:schemeClr val="accent1"/>
-          </a:effectRef>
-          <a:fontRef idx="minor">
-            <a:schemeClr val="lt1"/>
-          </a:fontRef>
-        </p:style>
-        <p:txBody>
-          <a:bodyPr rtlCol="0" anchor="ctr"/>
-          <a:lstStyle/>
-          <a:p>
-            <a:pPr algn="ctr"/>
-          </a:p>
-        </p:txBody>
-      </p:sp>
-      <p:sp>
-        <p:nvSpPr>
-          <p:cNvPr id="18" name="TextBox 17"/>
-          <p:cNvSpPr txBox="1"/>
-          <p:nvPr/>
-        </p:nvSpPr>
-        <p:spPr>
-          <a:xfrm>
-            <a:off x="411480" y="6080760"/>
-            <a:ext cx="5669280" cy="438912"/>
-          </a:xfrm>
-          <a:prstGeom prst="rect">
-            <a:avLst/>
-          </a:prstGeom>
-          <a:noFill/>
-        </p:spPr>
-        <p:txBody>
-          <a:bodyPr wrap="square">
-            <a:spAutoFit/>
-          </a:bodyPr>
-          <a:lstStyle/>
-          <a:p>
-            <a:pPr algn="ctr"/>
-            <a:r>
-              <a:rPr sz="1300" b="1" i="0">
-                <a:solidFill>
-                  <a:srgbClr val="1B2A4A"/>
-                </a:solidFill>
-                <a:latin typeface="Calibri"/>
-              </a:rPr>
-              <a:t>"Mesmo que dois candidatos tenham o mesmo currículo, o que tem a rede certa chega primeiro. Essa rede, historicamente, é majoritariamente branca."</a:t>
-            </a:r>
-          </a:p>
-        </p:txBody>
-      </p:sp>
-      <p:sp>
-        <p:nvSpPr>
-          <p:cNvPr id="19" name="Rectangle 18"/>
-          <p:cNvSpPr/>
-          <p:nvPr/>
-        </p:nvSpPr>
-        <p:spPr>
-          <a:xfrm>
-            <a:off x="0" y="6629400"/>
-            <a:ext cx="12188952" cy="228600"/>
-          </a:xfrm>
-          <a:prstGeom prst="rect">
-            <a:avLst/>
-          </a:prstGeom>
-          <a:solidFill>
-            <a:srgbClr val="1B2A4A"/>
-          </a:solidFill>
-          <a:ln/>
-        </p:spPr>
-        <p:style>
-          <a:lnRef idx="1">
-            <a:schemeClr val="accent1"/>
-          </a:lnRef>
-          <a:fillRef idx="3">
-            <a:schemeClr val="accent1"/>
-          </a:fillRef>
-          <a:effectRef idx="2">
-            <a:schemeClr val="accent1"/>
-          </a:effectRef>
-          <a:fontRef idx="minor">
-            <a:schemeClr val="lt1"/>
-          </a:fontRef>
-        </p:style>
-        <p:txBody>
-          <a:bodyPr rtlCol="0" anchor="ctr"/>
-          <a:lstStyle/>
-          <a:p>
-            <a:pPr algn="ctr"/>
-          </a:p>
-        </p:txBody>
-      </p:sp>
-      <p:sp>
-        <p:nvSpPr>
-          <p:cNvPr id="20" name="TextBox 19"/>
+          <p:cNvPr id="17" name="TextBox 16"/>
           <p:cNvSpPr txBox="1"/>
           <p:nvPr/>
         </p:nvSpPr>
@@ -12514,7 +13253,7 @@
       </p:sp>
       <p:sp>
         <p:nvSpPr>
-          <p:cNvPr id="21" name="TextBox 20"/>
+          <p:cNvPr id="18" name="TextBox 17"/>
           <p:cNvSpPr txBox="1"/>
           <p:nvPr/>
         </p:nvSpPr>
@@ -12542,7 +13281,7 @@
                 </a:solidFill>
                 <a:latin typeface="Calibri"/>
               </a:rPr>
-              <a:t>7/13</a:t>
+              <a:t>7/14</a:t>
             </a:r>
           </a:p>
         </p:txBody>
@@ -12636,7 +13375,7 @@
                 </a:solidFill>
                 <a:latin typeface="Calibri"/>
               </a:rPr>
-              <a:t>O Estado Ajuda — Mas Não Resolve</a:t>
+              <a:t>A Rede que Exclui — Capital Social e Mobilidade</a:t>
             </a:r>
           </a:p>
         </p:txBody>
@@ -12671,14 +13410,14 @@
                 </a:solidFill>
                 <a:latin typeface="Calibri"/>
               </a:rPr>
-              <a:t>Setor público reduz a desigualdade geral, mas o gap racial persiste e o de gênero é MAIOR</a:t>
+              <a:t>Negros ficam fora das redes que convertem diplomas em empregos</a:t>
             </a:r>
           </a:p>
         </p:txBody>
       </p:sp>
       <p:pic>
         <p:nvPicPr>
-          <p:cNvPr id="5" name="Picture 4" descr="estado_h1_gini.png"/>
+          <p:cNvPr id="5" name="Picture 4" descr="sna_rede_demografica.png"/>
           <p:cNvPicPr>
             <a:picLocks noChangeAspect="1"/>
           </p:cNvPicPr>
@@ -12693,37 +13432,48 @@
         <p:spPr>
           <a:xfrm>
             <a:off x="274320" y="1097280"/>
-            <a:ext cx="5486400" cy="2309167"/>
+            <a:ext cx="5669280" cy="4240050"/>
           </a:xfrm>
           <a:prstGeom prst="rect">
             <a:avLst/>
           </a:prstGeom>
         </p:spPr>
       </p:pic>
-      <p:pic>
-        <p:nvPicPr>
-          <p:cNvPr id="6" name="Picture 5" descr="estado_h2h3_gaps.png"/>
-          <p:cNvPicPr>
-            <a:picLocks noChangeAspect="1"/>
-          </p:cNvPicPr>
-          <p:nvPr/>
-        </p:nvPicPr>
-        <p:blipFill>
-          <a:blip r:embed="rId3"/>
-          <a:stretch>
-            <a:fillRect/>
-          </a:stretch>
-        </p:blipFill>
-        <p:spPr>
-          <a:xfrm>
-            <a:off x="6035040" y="1097280"/>
-            <a:ext cx="5852160" cy="2466138"/>
-          </a:xfrm>
-          <a:prstGeom prst="rect">
-            <a:avLst/>
-          </a:prstGeom>
-        </p:spPr>
-      </p:pic>
+      <p:sp>
+        <p:nvSpPr>
+          <p:cNvPr id="6" name="TextBox 5"/>
+          <p:cNvSpPr txBox="1"/>
+          <p:nvPr/>
+        </p:nvSpPr>
+        <p:spPr>
+          <a:xfrm>
+            <a:off x="6309360" y="1097280"/>
+            <a:ext cx="5577840" cy="365760"/>
+          </a:xfrm>
+          <a:prstGeom prst="rect">
+            <a:avLst/>
+          </a:prstGeom>
+          <a:noFill/>
+        </p:spPr>
+        <p:txBody>
+          <a:bodyPr wrap="square">
+            <a:spAutoFit/>
+          </a:bodyPr>
+          <a:lstStyle/>
+          <a:p>
+            <a:pPr algn="l"/>
+            <a:r>
+              <a:rPr sz="1600" b="1" i="0">
+                <a:solidFill>
+                  <a:srgbClr val="1B2A4A"/>
+                </a:solidFill>
+                <a:latin typeface="Calibri"/>
+              </a:rPr>
+              <a:t>O que são as redes profissionais?</a:t>
+            </a:r>
+          </a:p>
+        </p:txBody>
+      </p:sp>
       <p:sp>
         <p:nvSpPr>
           <p:cNvPr id="7" name="Rectangle 6"/>
@@ -12732,18 +13482,18 @@
         </p:nvSpPr>
         <p:spPr>
           <a:xfrm>
-            <a:off x="274320" y="4617720"/>
-            <a:ext cx="3566160" cy="1097280"/>
+            <a:off x="6309360" y="1572768"/>
+            <a:ext cx="5577840" cy="777240"/>
           </a:xfrm>
           <a:prstGeom prst="rect">
             <a:avLst/>
           </a:prstGeom>
           <a:solidFill>
-            <a:srgbClr val="E8F5E9"/>
+            <a:srgbClr val="F5F5F5"/>
           </a:solidFill>
-          <a:ln w="19050">
+          <a:ln w="6350">
             <a:solidFill>
-              <a:srgbClr val="2E7D32"/>
+              <a:srgbClr val="616161"/>
             </a:solidFill>
           </a:ln>
         </p:spPr>
@@ -12777,8 +13527,8 @@
         </p:nvSpPr>
         <p:spPr>
           <a:xfrm>
-            <a:off x="411480" y="4645152"/>
-            <a:ext cx="1188720" cy="502920"/>
+            <a:off x="6446520" y="1618488"/>
+            <a:ext cx="5303520" cy="685800"/>
           </a:xfrm>
           <a:prstGeom prst="rect">
             <a:avLst/>
@@ -12793,107 +13543,37 @@
           <a:p>
             <a:pPr algn="l"/>
             <a:r>
-              <a:rPr sz="2600" b="1" i="0">
-                <a:solidFill>
-                  <a:srgbClr val="2E7D32"/>
-                </a:solidFill>
-                <a:latin typeface="Calibri"/>
-              </a:rPr>
-              <a:t>Sim</a:t>
-            </a:r>
-          </a:p>
-        </p:txBody>
-      </p:sp>
-      <p:sp>
-        <p:nvSpPr>
-          <p:cNvPr id="9" name="TextBox 8"/>
-          <p:cNvSpPr txBox="1"/>
-          <p:nvPr/>
-        </p:nvSpPr>
-        <p:spPr>
-          <a:xfrm>
-            <a:off x="411480" y="5138928"/>
-            <a:ext cx="3291840" cy="320040"/>
-          </a:xfrm>
-          <a:prstGeom prst="rect">
-            <a:avLst/>
-          </a:prstGeom>
-          <a:noFill/>
-        </p:spPr>
-        <p:txBody>
-          <a:bodyPr wrap="square">
-            <a:spAutoFit/>
-          </a:bodyPr>
-          <a:lstStyle/>
-          <a:p>
-            <a:pPr algn="l"/>
-            <a:r>
-              <a:rPr sz="1200" b="1" i="0">
-                <a:solidFill>
-                  <a:srgbClr val="212121"/>
-                </a:solidFill>
-                <a:latin typeface="Calibri"/>
-              </a:rPr>
-              <a:t>Gini público &lt; privado</a:t>
-            </a:r>
-          </a:p>
-        </p:txBody>
-      </p:sp>
-      <p:sp>
-        <p:nvSpPr>
-          <p:cNvPr id="10" name="TextBox 9"/>
-          <p:cNvSpPr txBox="1"/>
-          <p:nvPr/>
-        </p:nvSpPr>
-        <p:spPr>
-          <a:xfrm>
-            <a:off x="411480" y="5458968"/>
-            <a:ext cx="3291840" cy="228600"/>
-          </a:xfrm>
-          <a:prstGeom prst="rect">
-            <a:avLst/>
-          </a:prstGeom>
-          <a:noFill/>
-        </p:spPr>
-        <p:txBody>
-          <a:bodyPr wrap="square">
-            <a:spAutoFit/>
-          </a:bodyPr>
-          <a:lstStyle/>
-          <a:p>
-            <a:pPr algn="l"/>
-            <a:r>
-              <a:rPr sz="1000" b="0" i="1">
-                <a:solidFill>
-                  <a:srgbClr val="616161"/>
-                </a:solidFill>
-                <a:latin typeface="Calibri"/>
-              </a:rPr>
-              <a:t>0,466 vs 0,472 — melhora marginal</a:t>
-            </a:r>
-          </a:p>
-        </p:txBody>
-      </p:sp>
-      <p:sp>
-        <p:nvSpPr>
-          <p:cNvPr id="11" name="Rectangle 10"/>
+              <a:rPr sz="1250" b="0" i="0">
+                <a:solidFill>
+                  <a:srgbClr val="1565C0"/>
+                </a:solidFill>
+                <a:latin typeface="Calibri"/>
+              </a:rPr>
+              <a:t>◆  Vagas nunca anunciadas são preenchidas por indicação — quem está na rede chega antes.</a:t>
+            </a:r>
+          </a:p>
+        </p:txBody>
+      </p:sp>
+      <p:sp>
+        <p:nvSpPr>
+          <p:cNvPr id="9" name="Rectangle 8"/>
           <p:cNvSpPr/>
           <p:nvPr/>
         </p:nvSpPr>
         <p:spPr>
           <a:xfrm>
-            <a:off x="4069080" y="4617720"/>
-            <a:ext cx="3566160" cy="1097280"/>
+            <a:off x="6309360" y="2441448"/>
+            <a:ext cx="5577840" cy="777240"/>
           </a:xfrm>
           <a:prstGeom prst="rect">
             <a:avLst/>
           </a:prstGeom>
           <a:solidFill>
-            <a:srgbClr val="FFF9E7"/>
+            <a:srgbClr val="F5F5F5"/>
           </a:solidFill>
-          <a:ln w="19050">
+          <a:ln w="6350">
             <a:solidFill>
-              <a:srgbClr val="FF8F00"/>
+              <a:srgbClr val="616161"/>
             </a:solidFill>
           </a:ln>
         </p:spPr>
@@ -12921,14 +13601,14 @@
       </p:sp>
       <p:sp>
         <p:nvSpPr>
-          <p:cNvPr id="12" name="TextBox 11"/>
-          <p:cNvSpPr txBox="1"/>
-          <p:nvPr/>
-        </p:nvSpPr>
-        <p:spPr>
-          <a:xfrm>
-            <a:off x="4206240" y="4645152"/>
-            <a:ext cx="1188720" cy="502920"/>
+          <p:cNvPr id="10" name="TextBox 9"/>
+          <p:cNvSpPr txBox="1"/>
+          <p:nvPr/>
+        </p:nvSpPr>
+        <p:spPr>
+          <a:xfrm>
+            <a:off x="6446520" y="2487168"/>
+            <a:ext cx="5303520" cy="685800"/>
           </a:xfrm>
           <a:prstGeom prst="rect">
             <a:avLst/>
@@ -12943,107 +13623,37 @@
           <a:p>
             <a:pPr algn="l"/>
             <a:r>
-              <a:rPr sz="2600" b="1" i="0">
-                <a:solidFill>
-                  <a:srgbClr val="FF8F00"/>
-                </a:solidFill>
-                <a:latin typeface="Calibri"/>
-              </a:rPr>
-              <a:t>Não</a:t>
-            </a:r>
-          </a:p>
-        </p:txBody>
-      </p:sp>
-      <p:sp>
-        <p:nvSpPr>
-          <p:cNvPr id="13" name="TextBox 12"/>
-          <p:cNvSpPr txBox="1"/>
-          <p:nvPr/>
-        </p:nvSpPr>
-        <p:spPr>
-          <a:xfrm>
-            <a:off x="4206240" y="5138928"/>
-            <a:ext cx="3291840" cy="320040"/>
-          </a:xfrm>
-          <a:prstGeom prst="rect">
-            <a:avLst/>
-          </a:prstGeom>
-          <a:noFill/>
-        </p:spPr>
-        <p:txBody>
-          <a:bodyPr wrap="square">
-            <a:spAutoFit/>
-          </a:bodyPr>
-          <a:lstStyle/>
-          <a:p>
-            <a:pPr algn="l"/>
-            <a:r>
-              <a:rPr sz="1200" b="1" i="0">
-                <a:solidFill>
-                  <a:srgbClr val="212121"/>
-                </a:solidFill>
-                <a:latin typeface="Calibri"/>
-              </a:rPr>
-              <a:t>Gap racial não some no concurso</a:t>
-            </a:r>
-          </a:p>
-        </p:txBody>
-      </p:sp>
-      <p:sp>
-        <p:nvSpPr>
-          <p:cNvPr id="14" name="TextBox 13"/>
-          <p:cNvSpPr txBox="1"/>
-          <p:nvPr/>
-        </p:nvSpPr>
-        <p:spPr>
-          <a:xfrm>
-            <a:off x="4206240" y="5458968"/>
-            <a:ext cx="3291840" cy="228600"/>
-          </a:xfrm>
-          <a:prstGeom prst="rect">
-            <a:avLst/>
-          </a:prstGeom>
-          <a:noFill/>
-        </p:spPr>
-        <p:txBody>
-          <a:bodyPr wrap="square">
-            <a:spAutoFit/>
-          </a:bodyPr>
-          <a:lstStyle/>
-          <a:p>
-            <a:pPr algn="l"/>
-            <a:r>
-              <a:rPr sz="1000" b="0" i="1">
-                <a:solidFill>
-                  <a:srgbClr val="616161"/>
-                </a:solidFill>
-                <a:latin typeface="Calibri"/>
-              </a:rPr>
-              <a:t>−28,1% público vs −34,3% privado</a:t>
-            </a:r>
-          </a:p>
-        </p:txBody>
-      </p:sp>
-      <p:sp>
-        <p:nvSpPr>
-          <p:cNvPr id="15" name="Rectangle 14"/>
+              <a:rPr sz="1250" b="0" i="0">
+                <a:solidFill>
+                  <a:srgbClr val="1565C0"/>
+                </a:solidFill>
+                <a:latin typeface="Calibri"/>
+              </a:rPr>
+              <a:t>◆  Mentores, referências e "network" determinam promoção tão quanto o desempenho.</a:t>
+            </a:r>
+          </a:p>
+        </p:txBody>
+      </p:sp>
+      <p:sp>
+        <p:nvSpPr>
+          <p:cNvPr id="11" name="Rectangle 10"/>
           <p:cNvSpPr/>
           <p:nvPr/>
         </p:nvSpPr>
         <p:spPr>
           <a:xfrm>
-            <a:off x="7863840" y="4617720"/>
-            <a:ext cx="3566160" cy="1097280"/>
+            <a:off x="6309360" y="3310128"/>
+            <a:ext cx="5577840" cy="777240"/>
           </a:xfrm>
           <a:prstGeom prst="rect">
             <a:avLst/>
           </a:prstGeom>
           <a:solidFill>
-            <a:srgbClr val="FFEBEE"/>
+            <a:srgbClr val="F5F5F5"/>
           </a:solidFill>
-          <a:ln w="19050">
+          <a:ln w="6350">
             <a:solidFill>
-              <a:srgbClr val="C62828"/>
+              <a:srgbClr val="616161"/>
             </a:solidFill>
           </a:ln>
         </p:spPr>
@@ -13071,14 +13681,14 @@
       </p:sp>
       <p:sp>
         <p:nvSpPr>
-          <p:cNvPr id="16" name="TextBox 15"/>
-          <p:cNvSpPr txBox="1"/>
-          <p:nvPr/>
-        </p:nvSpPr>
-        <p:spPr>
-          <a:xfrm>
-            <a:off x="8001000" y="4645152"/>
-            <a:ext cx="1188720" cy="502920"/>
+          <p:cNvPr id="12" name="TextBox 11"/>
+          <p:cNvSpPr txBox="1"/>
+          <p:nvPr/>
+        </p:nvSpPr>
+        <p:spPr>
+          <a:xfrm>
+            <a:off x="6446520" y="3355848"/>
+            <a:ext cx="5303520" cy="685800"/>
           </a:xfrm>
           <a:prstGeom prst="rect">
             <a:avLst/>
@@ -13093,107 +13703,37 @@
           <a:p>
             <a:pPr algn="l"/>
             <a:r>
-              <a:rPr sz="2600" b="1" i="0">
-                <a:solidFill>
-                  <a:srgbClr val="C62828"/>
-                </a:solidFill>
-                <a:latin typeface="Calibri"/>
-              </a:rPr>
-              <a:t>Piora</a:t>
-            </a:r>
-          </a:p>
-        </p:txBody>
-      </p:sp>
-      <p:sp>
-        <p:nvSpPr>
-          <p:cNvPr id="17" name="TextBox 16"/>
-          <p:cNvSpPr txBox="1"/>
-          <p:nvPr/>
-        </p:nvSpPr>
-        <p:spPr>
-          <a:xfrm>
-            <a:off x="8001000" y="5138928"/>
-            <a:ext cx="3291840" cy="320040"/>
-          </a:xfrm>
-          <a:prstGeom prst="rect">
-            <a:avLst/>
-          </a:prstGeom>
-          <a:noFill/>
-        </p:spPr>
-        <p:txBody>
-          <a:bodyPr wrap="square">
-            <a:spAutoFit/>
-          </a:bodyPr>
-          <a:lstStyle/>
-          <a:p>
-            <a:pPr algn="l"/>
-            <a:r>
-              <a:rPr sz="1200" b="1" i="0">
+              <a:rPr sz="1250" b="0" i="0">
                 <a:solidFill>
                   <a:srgbClr val="212121"/>
                 </a:solidFill>
                 <a:latin typeface="Calibri"/>
               </a:rPr>
-              <a:t>Gap de gênero é maior no público</a:t>
-            </a:r>
-          </a:p>
-        </p:txBody>
-      </p:sp>
-      <p:sp>
-        <p:nvSpPr>
-          <p:cNvPr id="18" name="TextBox 17"/>
-          <p:cNvSpPr txBox="1"/>
-          <p:nvPr/>
-        </p:nvSpPr>
-        <p:spPr>
-          <a:xfrm>
-            <a:off x="8001000" y="5458968"/>
-            <a:ext cx="3291840" cy="228600"/>
-          </a:xfrm>
-          <a:prstGeom prst="rect">
-            <a:avLst/>
-          </a:prstGeom>
-          <a:noFill/>
-        </p:spPr>
-        <p:txBody>
-          <a:bodyPr wrap="square">
-            <a:spAutoFit/>
-          </a:bodyPr>
-          <a:lstStyle/>
-          <a:p>
-            <a:pPr algn="l"/>
-            <a:r>
-              <a:rPr sz="1000" b="0" i="1">
-                <a:solidFill>
-                  <a:srgbClr val="616161"/>
-                </a:solidFill>
-                <a:latin typeface="Calibri"/>
-              </a:rPr>
-              <a:t>−21,2% público vs −18,9% privado</a:t>
-            </a:r>
-          </a:p>
-        </p:txBody>
-      </p:sp>
-      <p:sp>
-        <p:nvSpPr>
-          <p:cNvPr id="19" name="Rectangle 18"/>
+              <a:t>▸  A análise mostra: brancos atuam como conectores (brokers) em TODOS os níveis educacionais.</a:t>
+            </a:r>
+          </a:p>
+        </p:txBody>
+      </p:sp>
+      <p:sp>
+        <p:nvSpPr>
+          <p:cNvPr id="13" name="Rectangle 12"/>
           <p:cNvSpPr/>
           <p:nvPr/>
         </p:nvSpPr>
         <p:spPr>
           <a:xfrm>
-            <a:off x="274320" y="5833872"/>
-            <a:ext cx="11612880" cy="502920"/>
+            <a:off x="6309360" y="4178808"/>
+            <a:ext cx="5577840" cy="777240"/>
           </a:xfrm>
           <a:prstGeom prst="rect">
             <a:avLst/>
           </a:prstGeom>
           <a:solidFill>
-            <a:srgbClr val="FFF9E7"/>
+            <a:srgbClr val="FFEBEE"/>
           </a:solidFill>
-          <a:ln w="15240">
+          <a:ln w="6350">
             <a:solidFill>
-              <a:srgbClr val="FF8F00"/>
+              <a:srgbClr val="C62828"/>
             </a:solidFill>
           </a:ln>
         </p:spPr>
@@ -13221,57 +13761,61 @@
       </p:sp>
       <p:sp>
         <p:nvSpPr>
-          <p:cNvPr id="20" name="TextBox 19"/>
-          <p:cNvSpPr txBox="1"/>
-          <p:nvPr/>
-        </p:nvSpPr>
-        <p:spPr>
-          <a:xfrm>
-            <a:off x="411480" y="5925312"/>
-            <a:ext cx="11338560" cy="320040"/>
-          </a:xfrm>
-          <a:prstGeom prst="rect">
-            <a:avLst/>
-          </a:prstGeom>
-          <a:noFill/>
-        </p:spPr>
-        <p:txBody>
-          <a:bodyPr wrap="square">
-            <a:spAutoFit/>
-          </a:bodyPr>
-          <a:lstStyle/>
-          <a:p>
-            <a:pPr algn="ctr"/>
-            <a:r>
-              <a:rPr sz="1300" b="1" i="0">
-                <a:solidFill>
-                  <a:srgbClr val="1B2A4A"/>
-                </a:solidFill>
-                <a:latin typeface="Calibri"/>
-              </a:rPr>
-              <a:t>O concurso público equaliza a entrada, mas a promoção às posições de liderança (DAS, chefia) ainda reflete os vieses do setor privado — ou piores.</a:t>
-            </a:r>
-          </a:p>
-        </p:txBody>
-      </p:sp>
-      <p:sp>
-        <p:nvSpPr>
-          <p:cNvPr id="21" name="Rectangle 20"/>
+          <p:cNvPr id="14" name="TextBox 13"/>
+          <p:cNvSpPr txBox="1"/>
+          <p:nvPr/>
+        </p:nvSpPr>
+        <p:spPr>
+          <a:xfrm>
+            <a:off x="6446520" y="4224528"/>
+            <a:ext cx="5303520" cy="685800"/>
+          </a:xfrm>
+          <a:prstGeom prst="rect">
+            <a:avLst/>
+          </a:prstGeom>
+          <a:noFill/>
+        </p:spPr>
+        <p:txBody>
+          <a:bodyPr wrap="square">
+            <a:spAutoFit/>
+          </a:bodyPr>
+          <a:lstStyle/>
+          <a:p>
+            <a:pPr algn="l"/>
+            <a:r>
+              <a:rPr sz="1250" b="0" i="0">
+                <a:solidFill>
+                  <a:srgbClr val="C62828"/>
+                </a:solidFill>
+                <a:latin typeface="Calibri"/>
+              </a:rPr>
+              <a:t>✗  Negros ficam nas bordas da rede — mesmo com pós-graduação, sem acesso ao centro.</a:t>
+            </a:r>
+          </a:p>
+        </p:txBody>
+      </p:sp>
+      <p:sp>
+        <p:nvSpPr>
+          <p:cNvPr id="15" name="Rectangle 14"/>
           <p:cNvSpPr/>
           <p:nvPr/>
         </p:nvSpPr>
         <p:spPr>
           <a:xfrm>
-            <a:off x="0" y="6629400"/>
-            <a:ext cx="12188952" cy="228600"/>
+            <a:off x="6309360" y="5047488"/>
+            <a:ext cx="5577840" cy="777240"/>
           </a:xfrm>
           <a:prstGeom prst="rect">
             <a:avLst/>
           </a:prstGeom>
           <a:solidFill>
-            <a:srgbClr val="1B2A4A"/>
+            <a:srgbClr val="F5F5F5"/>
           </a:solidFill>
-          <a:ln/>
+          <a:ln w="6350">
+            <a:solidFill>
+              <a:srgbClr val="616161"/>
+            </a:solidFill>
+          </a:ln>
         </p:spPr>
         <p:style>
           <a:lnRef idx="1">
@@ -13297,7 +13841,163 @@
       </p:sp>
       <p:sp>
         <p:nvSpPr>
-          <p:cNvPr id="22" name="TextBox 21"/>
+          <p:cNvPr id="16" name="TextBox 15"/>
+          <p:cNvSpPr txBox="1"/>
+          <p:nvPr/>
+        </p:nvSpPr>
+        <p:spPr>
+          <a:xfrm>
+            <a:off x="6446520" y="5093208"/>
+            <a:ext cx="5303520" cy="685800"/>
+          </a:xfrm>
+          <a:prstGeom prst="rect">
+            <a:avLst/>
+          </a:prstGeom>
+          <a:noFill/>
+        </p:spPr>
+        <p:txBody>
+          <a:bodyPr wrap="square">
+            <a:spAutoFit/>
+          </a:bodyPr>
+          <a:lstStyle/>
+          <a:p>
+            <a:pPr algn="l"/>
+            <a:r>
+              <a:rPr sz="1250" b="0" i="0">
+                <a:solidFill>
+                  <a:srgbClr val="212121"/>
+                </a:solidFill>
+                <a:latin typeface="Calibri"/>
+              </a:rPr>
+              <a:t>▸  Resultado: o diploma negro vale menos porque falta a rede que o converte em oportunidade.</a:t>
+            </a:r>
+          </a:p>
+        </p:txBody>
+      </p:sp>
+      <p:sp>
+        <p:nvSpPr>
+          <p:cNvPr id="17" name="Rectangle 16"/>
+          <p:cNvSpPr/>
+          <p:nvPr/>
+        </p:nvSpPr>
+        <p:spPr>
+          <a:xfrm>
+            <a:off x="274320" y="5989320"/>
+            <a:ext cx="5943600" cy="621792"/>
+          </a:xfrm>
+          <a:prstGeom prst="rect">
+            <a:avLst/>
+          </a:prstGeom>
+          <a:solidFill>
+            <a:srgbClr val="E3F2FD"/>
+          </a:solidFill>
+          <a:ln w="15240">
+            <a:solidFill>
+              <a:srgbClr val="1565C0"/>
+            </a:solidFill>
+          </a:ln>
+        </p:spPr>
+        <p:style>
+          <a:lnRef idx="1">
+            <a:schemeClr val="accent1"/>
+          </a:lnRef>
+          <a:fillRef idx="3">
+            <a:schemeClr val="accent1"/>
+          </a:fillRef>
+          <a:effectRef idx="2">
+            <a:schemeClr val="accent1"/>
+          </a:effectRef>
+          <a:fontRef idx="minor">
+            <a:schemeClr val="lt1"/>
+          </a:fontRef>
+        </p:style>
+        <p:txBody>
+          <a:bodyPr rtlCol="0" anchor="ctr"/>
+          <a:lstStyle/>
+          <a:p>
+            <a:pPr algn="ctr"/>
+          </a:p>
+        </p:txBody>
+      </p:sp>
+      <p:sp>
+        <p:nvSpPr>
+          <p:cNvPr id="18" name="TextBox 17"/>
+          <p:cNvSpPr txBox="1"/>
+          <p:nvPr/>
+        </p:nvSpPr>
+        <p:spPr>
+          <a:xfrm>
+            <a:off x="411480" y="6080760"/>
+            <a:ext cx="5669280" cy="438912"/>
+          </a:xfrm>
+          <a:prstGeom prst="rect">
+            <a:avLst/>
+          </a:prstGeom>
+          <a:noFill/>
+        </p:spPr>
+        <p:txBody>
+          <a:bodyPr wrap="square">
+            <a:spAutoFit/>
+          </a:bodyPr>
+          <a:lstStyle/>
+          <a:p>
+            <a:pPr algn="ctr"/>
+            <a:r>
+              <a:rPr sz="1300" b="1" i="0">
+                <a:solidFill>
+                  <a:srgbClr val="1B2A4A"/>
+                </a:solidFill>
+                <a:latin typeface="Calibri"/>
+              </a:rPr>
+              <a:t>"Mesmo que dois candidatos tenham o mesmo currículo, o que tem a rede certa chega primeiro. Essa rede, historicamente, é majoritariamente branca."</a:t>
+            </a:r>
+          </a:p>
+        </p:txBody>
+      </p:sp>
+      <p:sp>
+        <p:nvSpPr>
+          <p:cNvPr id="19" name="Rectangle 18"/>
+          <p:cNvSpPr/>
+          <p:nvPr/>
+        </p:nvSpPr>
+        <p:spPr>
+          <a:xfrm>
+            <a:off x="0" y="6629400"/>
+            <a:ext cx="12188952" cy="228600"/>
+          </a:xfrm>
+          <a:prstGeom prst="rect">
+            <a:avLst/>
+          </a:prstGeom>
+          <a:solidFill>
+            <a:srgbClr val="1B2A4A"/>
+          </a:solidFill>
+          <a:ln/>
+        </p:spPr>
+        <p:style>
+          <a:lnRef idx="1">
+            <a:schemeClr val="accent1"/>
+          </a:lnRef>
+          <a:fillRef idx="3">
+            <a:schemeClr val="accent1"/>
+          </a:fillRef>
+          <a:effectRef idx="2">
+            <a:schemeClr val="accent1"/>
+          </a:effectRef>
+          <a:fontRef idx="minor">
+            <a:schemeClr val="lt1"/>
+          </a:fontRef>
+        </p:style>
+        <p:txBody>
+          <a:bodyPr rtlCol="0" anchor="ctr"/>
+          <a:lstStyle/>
+          <a:p>
+            <a:pPr algn="ctr"/>
+          </a:p>
+        </p:txBody>
+      </p:sp>
+      <p:sp>
+        <p:nvSpPr>
+          <p:cNvPr id="20" name="TextBox 19"/>
           <p:cNvSpPr txBox="1"/>
           <p:nvPr/>
         </p:nvSpPr>
@@ -13332,7 +14032,7 @@
       </p:sp>
       <p:sp>
         <p:nvSpPr>
-          <p:cNvPr id="23" name="TextBox 22"/>
+          <p:cNvPr id="21" name="TextBox 20"/>
           <p:cNvSpPr txBox="1"/>
           <p:nvPr/>
         </p:nvSpPr>
@@ -13360,7 +14060,7 @@
                 </a:solidFill>
                 <a:latin typeface="Calibri"/>
               </a:rPr>
-              <a:t>8/13</a:t>
+              <a:t>8/14</a:t>
             </a:r>
           </a:p>
         </p:txBody>
@@ -13454,7 +14154,7 @@
                 </a:solidFill>
                 <a:latin typeface="Calibri"/>
               </a:rPr>
-              <a:t>O Custo para Todos Nós — Inclusão Produtiva como Oportunidade</a:t>
+              <a:t>O Estado Ajuda — Mas Não Resolve</a:t>
             </a:r>
           </a:p>
         </p:txBody>
@@ -13489,14 +14189,14 @@
                 </a:solidFill>
                 <a:latin typeface="Calibri"/>
               </a:rPr>
-              <a:t>Hsieh et al. (2019): discriminação racial e de gênero custou ao EUA 20–40% do crescimento 1960–2010</a:t>
+              <a:t>Setor público reduz a desigualdade geral, mas o gap racial persiste e o de gênero é MAIOR</a:t>
             </a:r>
           </a:p>
         </p:txBody>
       </p:sp>
       <p:pic>
         <p:nvPicPr>
-          <p:cNvPr id="5" name="Picture 4" descr="estado_h4_inclusao.png"/>
+          <p:cNvPr id="5" name="Picture 4" descr="estado_h1_gini.png"/>
           <p:cNvPicPr>
             <a:picLocks noChangeAspect="1"/>
           </p:cNvPicPr>
@@ -13511,49 +14211,37 @@
         <p:spPr>
           <a:xfrm>
             <a:off x="274320" y="1097280"/>
-            <a:ext cx="5943600" cy="2497233"/>
+            <a:ext cx="5486400" cy="2309167"/>
           </a:xfrm>
           <a:prstGeom prst="rect">
             <a:avLst/>
           </a:prstGeom>
         </p:spPr>
       </p:pic>
-      <p:sp>
-        <p:nvSpPr>
-          <p:cNvPr id="6" name="TextBox 5"/>
-          <p:cNvSpPr txBox="1"/>
-          <p:nvPr/>
-        </p:nvSpPr>
-        <p:spPr>
-          <a:xfrm>
-            <a:off x="6675120" y="1097280"/>
-            <a:ext cx="5303520" cy="594360"/>
-          </a:xfrm>
-          <a:prstGeom prst="rect">
-            <a:avLst/>
-          </a:prstGeom>
-          <a:noFill/>
-        </p:spPr>
-        <p:txBody>
-          <a:bodyPr wrap="square">
-            <a:spAutoFit/>
-          </a:bodyPr>
-          <a:lstStyle/>
-          <a:p>
-            <a:pPr algn="l"/>
-            <a:r>
-              <a:rPr sz="1600" b="1" i="0">
-                <a:solidFill>
-                  <a:srgbClr val="1B2A4A"/>
-                </a:solidFill>
-                <a:latin typeface="Calibri"/>
-              </a:rPr>
-              <a:t>O que aconteceria se negros tivessem
-acesso igual às melhores vagas?</a:t>
-            </a:r>
-          </a:p>
-        </p:txBody>
-      </p:sp>
+      <p:pic>
+        <p:nvPicPr>
+          <p:cNvPr id="6" name="Picture 5" descr="estado_h2h3_gaps.png"/>
+          <p:cNvPicPr>
+            <a:picLocks noChangeAspect="1"/>
+          </p:cNvPicPr>
+          <p:nvPr/>
+        </p:nvPicPr>
+        <p:blipFill>
+          <a:blip r:embed="rId3"/>
+          <a:stretch>
+            <a:fillRect/>
+          </a:stretch>
+        </p:blipFill>
+        <p:spPr>
+          <a:xfrm>
+            <a:off x="6035040" y="1097280"/>
+            <a:ext cx="5852160" cy="2466138"/>
+          </a:xfrm>
+          <a:prstGeom prst="rect">
+            <a:avLst/>
+          </a:prstGeom>
+        </p:spPr>
+      </p:pic>
       <p:sp>
         <p:nvSpPr>
           <p:cNvPr id="7" name="Rectangle 6"/>
@@ -13562,18 +14250,18 @@
         </p:nvSpPr>
         <p:spPr>
           <a:xfrm>
-            <a:off x="6675120" y="1828800"/>
-            <a:ext cx="5303520" cy="1261872"/>
+            <a:off x="274320" y="4617720"/>
+            <a:ext cx="3566160" cy="1097280"/>
           </a:xfrm>
           <a:prstGeom prst="rect">
             <a:avLst/>
           </a:prstGeom>
           <a:solidFill>
-            <a:srgbClr val="F5F5F5"/>
+            <a:srgbClr val="E8F5E9"/>
           </a:solidFill>
-          <a:ln w="25400">
+          <a:ln w="19050">
             <a:solidFill>
-              <a:srgbClr val="C62828"/>
+              <a:srgbClr val="2E7D32"/>
             </a:solidFill>
           </a:ln>
         </p:spPr>
@@ -13601,22 +14289,131 @@
       </p:sp>
       <p:sp>
         <p:nvSpPr>
-          <p:cNvPr id="8" name="Rectangle 7"/>
+          <p:cNvPr id="8" name="TextBox 7"/>
+          <p:cNvSpPr txBox="1"/>
+          <p:nvPr/>
+        </p:nvSpPr>
+        <p:spPr>
+          <a:xfrm>
+            <a:off x="411480" y="4645152"/>
+            <a:ext cx="1188720" cy="502920"/>
+          </a:xfrm>
+          <a:prstGeom prst="rect">
+            <a:avLst/>
+          </a:prstGeom>
+          <a:noFill/>
+        </p:spPr>
+        <p:txBody>
+          <a:bodyPr wrap="square">
+            <a:spAutoFit/>
+          </a:bodyPr>
+          <a:lstStyle/>
+          <a:p>
+            <a:pPr algn="l"/>
+            <a:r>
+              <a:rPr sz="2600" b="1" i="0">
+                <a:solidFill>
+                  <a:srgbClr val="2E7D32"/>
+                </a:solidFill>
+                <a:latin typeface="Calibri"/>
+              </a:rPr>
+              <a:t>Sim</a:t>
+            </a:r>
+          </a:p>
+        </p:txBody>
+      </p:sp>
+      <p:sp>
+        <p:nvSpPr>
+          <p:cNvPr id="9" name="TextBox 8"/>
+          <p:cNvSpPr txBox="1"/>
+          <p:nvPr/>
+        </p:nvSpPr>
+        <p:spPr>
+          <a:xfrm>
+            <a:off x="411480" y="5138928"/>
+            <a:ext cx="3291840" cy="320040"/>
+          </a:xfrm>
+          <a:prstGeom prst="rect">
+            <a:avLst/>
+          </a:prstGeom>
+          <a:noFill/>
+        </p:spPr>
+        <p:txBody>
+          <a:bodyPr wrap="square">
+            <a:spAutoFit/>
+          </a:bodyPr>
+          <a:lstStyle/>
+          <a:p>
+            <a:pPr algn="l"/>
+            <a:r>
+              <a:rPr sz="1200" b="1" i="0">
+                <a:solidFill>
+                  <a:srgbClr val="212121"/>
+                </a:solidFill>
+                <a:latin typeface="Calibri"/>
+              </a:rPr>
+              <a:t>Gini público &lt; privado</a:t>
+            </a:r>
+          </a:p>
+        </p:txBody>
+      </p:sp>
+      <p:sp>
+        <p:nvSpPr>
+          <p:cNvPr id="10" name="TextBox 9"/>
+          <p:cNvSpPr txBox="1"/>
+          <p:nvPr/>
+        </p:nvSpPr>
+        <p:spPr>
+          <a:xfrm>
+            <a:off x="411480" y="5458968"/>
+            <a:ext cx="3291840" cy="228600"/>
+          </a:xfrm>
+          <a:prstGeom prst="rect">
+            <a:avLst/>
+          </a:prstGeom>
+          <a:noFill/>
+        </p:spPr>
+        <p:txBody>
+          <a:bodyPr wrap="square">
+            <a:spAutoFit/>
+          </a:bodyPr>
+          <a:lstStyle/>
+          <a:p>
+            <a:pPr algn="l"/>
+            <a:r>
+              <a:rPr sz="1000" b="0" i="1">
+                <a:solidFill>
+                  <a:srgbClr val="616161"/>
+                </a:solidFill>
+                <a:latin typeface="Calibri"/>
+              </a:rPr>
+              <a:t>0,466 vs 0,472 — melhora marginal</a:t>
+            </a:r>
+          </a:p>
+        </p:txBody>
+      </p:sp>
+      <p:sp>
+        <p:nvSpPr>
+          <p:cNvPr id="11" name="Rectangle 10"/>
           <p:cNvSpPr/>
           <p:nvPr/>
         </p:nvSpPr>
         <p:spPr>
           <a:xfrm>
-            <a:off x="6675120" y="1828800"/>
-            <a:ext cx="5303520" cy="365760"/>
+            <a:off x="4069080" y="4617720"/>
+            <a:ext cx="3566160" cy="1097280"/>
           </a:xfrm>
           <a:prstGeom prst="rect">
             <a:avLst/>
           </a:prstGeom>
           <a:solidFill>
-            <a:srgbClr val="C62828"/>
+            <a:srgbClr val="FFF9E7"/>
           </a:solidFill>
-          <a:ln/>
+          <a:ln w="19050">
+            <a:solidFill>
+              <a:srgbClr val="FF8F00"/>
+            </a:solidFill>
+          </a:ln>
         </p:spPr>
         <p:style>
           <a:lnRef idx="1">
@@ -13642,14 +14439,14 @@
       </p:sp>
       <p:sp>
         <p:nvSpPr>
-          <p:cNvPr id="9" name="TextBox 8"/>
-          <p:cNvSpPr txBox="1"/>
-          <p:nvPr/>
-        </p:nvSpPr>
-        <p:spPr>
-          <a:xfrm>
-            <a:off x="6812280" y="1865376"/>
-            <a:ext cx="5029200" cy="347472"/>
+          <p:cNvPr id="12" name="TextBox 11"/>
+          <p:cNvSpPr txBox="1"/>
+          <p:nvPr/>
+        </p:nvSpPr>
+        <p:spPr>
+          <a:xfrm>
+            <a:off x="4206240" y="4645152"/>
+            <a:ext cx="1188720" cy="502920"/>
           </a:xfrm>
           <a:prstGeom prst="rect">
             <a:avLst/>
@@ -13664,27 +14461,27 @@
           <a:p>
             <a:pPr algn="l"/>
             <a:r>
-              <a:rPr sz="1400" b="1" i="0">
-                <a:solidFill>
-                  <a:srgbClr val="FFFFFF"/>
-                </a:solidFill>
-                <a:latin typeface="Calibri"/>
-              </a:rPr>
-              <a:t>Hoje</a:t>
-            </a:r>
-          </a:p>
-        </p:txBody>
-      </p:sp>
-      <p:sp>
-        <p:nvSpPr>
-          <p:cNvPr id="10" name="TextBox 9"/>
-          <p:cNvSpPr txBox="1"/>
-          <p:nvPr/>
-        </p:nvSpPr>
-        <p:spPr>
-          <a:xfrm>
-            <a:off x="6812280" y="2240280"/>
-            <a:ext cx="5029200" cy="347472"/>
+              <a:rPr sz="2600" b="1" i="0">
+                <a:solidFill>
+                  <a:srgbClr val="FF8F00"/>
+                </a:solidFill>
+                <a:latin typeface="Calibri"/>
+              </a:rPr>
+              <a:t>Não</a:t>
+            </a:r>
+          </a:p>
+        </p:txBody>
+      </p:sp>
+      <p:sp>
+        <p:nvSpPr>
+          <p:cNvPr id="13" name="TextBox 12"/>
+          <p:cNvSpPr txBox="1"/>
+          <p:nvPr/>
+        </p:nvSpPr>
+        <p:spPr>
+          <a:xfrm>
+            <a:off x="4206240" y="5138928"/>
+            <a:ext cx="3291840" cy="320040"/>
           </a:xfrm>
           <a:prstGeom prst="rect">
             <a:avLst/>
@@ -13701,25 +14498,25 @@
             <a:r>
               <a:rPr sz="1200" b="1" i="0">
                 <a:solidFill>
-                  <a:srgbClr val="C62828"/>
-                </a:solidFill>
-                <a:latin typeface="Calibri"/>
-              </a:rPr>
-              <a:t>Mediana salarial: R$2.000 (brancos) vs R$1.450 (negros) — gap de 27,5%</a:t>
-            </a:r>
-          </a:p>
-        </p:txBody>
-      </p:sp>
-      <p:sp>
-        <p:nvSpPr>
-          <p:cNvPr id="11" name="TextBox 10"/>
-          <p:cNvSpPr txBox="1"/>
-          <p:nvPr/>
-        </p:nvSpPr>
-        <p:spPr>
-          <a:xfrm>
-            <a:off x="6812280" y="2578608"/>
-            <a:ext cx="5029200" cy="347472"/>
+                  <a:srgbClr val="212121"/>
+                </a:solidFill>
+                <a:latin typeface="Calibri"/>
+              </a:rPr>
+              <a:t>Gap racial não some no concurso</a:t>
+            </a:r>
+          </a:p>
+        </p:txBody>
+      </p:sp>
+      <p:sp>
+        <p:nvSpPr>
+          <p:cNvPr id="14" name="TextBox 13"/>
+          <p:cNvSpPr txBox="1"/>
+          <p:nvPr/>
+        </p:nvSpPr>
+        <p:spPr>
+          <a:xfrm>
+            <a:off x="4206240" y="5458968"/>
+            <a:ext cx="3291840" cy="228600"/>
           </a:xfrm>
           <a:prstGeom prst="rect">
             <a:avLst/>
@@ -13734,37 +14531,37 @@
           <a:p>
             <a:pPr algn="l"/>
             <a:r>
-              <a:rPr sz="1100" b="0" i="1">
+              <a:rPr sz="1000" b="0" i="1">
                 <a:solidFill>
                   <a:srgbClr val="616161"/>
                 </a:solidFill>
                 <a:latin typeface="Calibri"/>
               </a:rPr>
-              <a:t>Gap médio de 37,5%; em cargos de alta qualificação: 11% negros vs 22% brancos</a:t>
-            </a:r>
-          </a:p>
-        </p:txBody>
-      </p:sp>
-      <p:sp>
-        <p:nvSpPr>
-          <p:cNvPr id="12" name="Rectangle 11"/>
+              <a:t>−28,1% público vs −34,3% privado</a:t>
+            </a:r>
+          </a:p>
+        </p:txBody>
+      </p:sp>
+      <p:sp>
+        <p:nvSpPr>
+          <p:cNvPr id="15" name="Rectangle 14"/>
           <p:cNvSpPr/>
           <p:nvPr/>
         </p:nvSpPr>
         <p:spPr>
           <a:xfrm>
-            <a:off x="6675120" y="3200400"/>
-            <a:ext cx="5303520" cy="1261872"/>
+            <a:off x="7863840" y="4617720"/>
+            <a:ext cx="3566160" cy="1097280"/>
           </a:xfrm>
           <a:prstGeom prst="rect">
             <a:avLst/>
           </a:prstGeom>
           <a:solidFill>
-            <a:srgbClr val="F5F5F5"/>
+            <a:srgbClr val="FFEBEE"/>
           </a:solidFill>
-          <a:ln w="25400">
+          <a:ln w="19050">
             <a:solidFill>
-              <a:srgbClr val="2E7D32"/>
+              <a:srgbClr val="C62828"/>
             </a:solidFill>
           </a:ln>
         </p:spPr>
@@ -13792,22 +14589,131 @@
       </p:sp>
       <p:sp>
         <p:nvSpPr>
-          <p:cNvPr id="13" name="Rectangle 12"/>
+          <p:cNvPr id="16" name="TextBox 15"/>
+          <p:cNvSpPr txBox="1"/>
+          <p:nvPr/>
+        </p:nvSpPr>
+        <p:spPr>
+          <a:xfrm>
+            <a:off x="8001000" y="4645152"/>
+            <a:ext cx="1188720" cy="502920"/>
+          </a:xfrm>
+          <a:prstGeom prst="rect">
+            <a:avLst/>
+          </a:prstGeom>
+          <a:noFill/>
+        </p:spPr>
+        <p:txBody>
+          <a:bodyPr wrap="square">
+            <a:spAutoFit/>
+          </a:bodyPr>
+          <a:lstStyle/>
+          <a:p>
+            <a:pPr algn="l"/>
+            <a:r>
+              <a:rPr sz="2600" b="1" i="0">
+                <a:solidFill>
+                  <a:srgbClr val="C62828"/>
+                </a:solidFill>
+                <a:latin typeface="Calibri"/>
+              </a:rPr>
+              <a:t>Piora</a:t>
+            </a:r>
+          </a:p>
+        </p:txBody>
+      </p:sp>
+      <p:sp>
+        <p:nvSpPr>
+          <p:cNvPr id="17" name="TextBox 16"/>
+          <p:cNvSpPr txBox="1"/>
+          <p:nvPr/>
+        </p:nvSpPr>
+        <p:spPr>
+          <a:xfrm>
+            <a:off x="8001000" y="5138928"/>
+            <a:ext cx="3291840" cy="320040"/>
+          </a:xfrm>
+          <a:prstGeom prst="rect">
+            <a:avLst/>
+          </a:prstGeom>
+          <a:noFill/>
+        </p:spPr>
+        <p:txBody>
+          <a:bodyPr wrap="square">
+            <a:spAutoFit/>
+          </a:bodyPr>
+          <a:lstStyle/>
+          <a:p>
+            <a:pPr algn="l"/>
+            <a:r>
+              <a:rPr sz="1200" b="1" i="0">
+                <a:solidFill>
+                  <a:srgbClr val="212121"/>
+                </a:solidFill>
+                <a:latin typeface="Calibri"/>
+              </a:rPr>
+              <a:t>Gap de gênero é maior no público</a:t>
+            </a:r>
+          </a:p>
+        </p:txBody>
+      </p:sp>
+      <p:sp>
+        <p:nvSpPr>
+          <p:cNvPr id="18" name="TextBox 17"/>
+          <p:cNvSpPr txBox="1"/>
+          <p:nvPr/>
+        </p:nvSpPr>
+        <p:spPr>
+          <a:xfrm>
+            <a:off x="8001000" y="5458968"/>
+            <a:ext cx="3291840" cy="228600"/>
+          </a:xfrm>
+          <a:prstGeom prst="rect">
+            <a:avLst/>
+          </a:prstGeom>
+          <a:noFill/>
+        </p:spPr>
+        <p:txBody>
+          <a:bodyPr wrap="square">
+            <a:spAutoFit/>
+          </a:bodyPr>
+          <a:lstStyle/>
+          <a:p>
+            <a:pPr algn="l"/>
+            <a:r>
+              <a:rPr sz="1000" b="0" i="1">
+                <a:solidFill>
+                  <a:srgbClr val="616161"/>
+                </a:solidFill>
+                <a:latin typeface="Calibri"/>
+              </a:rPr>
+              <a:t>−21,2% público vs −18,9% privado</a:t>
+            </a:r>
+          </a:p>
+        </p:txBody>
+      </p:sp>
+      <p:sp>
+        <p:nvSpPr>
+          <p:cNvPr id="19" name="Rectangle 18"/>
           <p:cNvSpPr/>
           <p:nvPr/>
         </p:nvSpPr>
         <p:spPr>
           <a:xfrm>
-            <a:off x="6675120" y="3200400"/>
-            <a:ext cx="5303520" cy="365760"/>
+            <a:off x="274320" y="5833872"/>
+            <a:ext cx="11612880" cy="502920"/>
           </a:xfrm>
           <a:prstGeom prst="rect">
             <a:avLst/>
           </a:prstGeom>
           <a:solidFill>
-            <a:srgbClr val="2E7D32"/>
+            <a:srgbClr val="FFF9E7"/>
           </a:solidFill>
-          <a:ln/>
+          <a:ln w="15240">
+            <a:solidFill>
+              <a:srgbClr val="FF8F00"/>
+            </a:solidFill>
+          </a:ln>
         </p:spPr>
         <p:style>
           <a:lnRef idx="1">
@@ -13833,131 +14739,57 @@
       </p:sp>
       <p:sp>
         <p:nvSpPr>
-          <p:cNvPr id="14" name="TextBox 13"/>
-          <p:cNvSpPr txBox="1"/>
-          <p:nvPr/>
-        </p:nvSpPr>
-        <p:spPr>
-          <a:xfrm>
-            <a:off x="6812280" y="3236976"/>
-            <a:ext cx="5029200" cy="347472"/>
-          </a:xfrm>
-          <a:prstGeom prst="rect">
-            <a:avLst/>
-          </a:prstGeom>
-          <a:noFill/>
-        </p:spPr>
-        <p:txBody>
-          <a:bodyPr wrap="square">
-            <a:spAutoFit/>
-          </a:bodyPr>
-          <a:lstStyle/>
-          <a:p>
-            <a:pPr algn="l"/>
-            <a:r>
-              <a:rPr sz="1400" b="1" i="0">
-                <a:solidFill>
-                  <a:srgbClr val="FFFFFF"/>
-                </a:solidFill>
-                <a:latin typeface="Calibri"/>
-              </a:rPr>
-              <a:t>+127% renda</a:t>
-            </a:r>
-          </a:p>
-        </p:txBody>
-      </p:sp>
-      <p:sp>
-        <p:nvSpPr>
-          <p:cNvPr id="15" name="TextBox 14"/>
-          <p:cNvSpPr txBox="1"/>
-          <p:nvPr/>
-        </p:nvSpPr>
-        <p:spPr>
-          <a:xfrm>
-            <a:off x="6812280" y="3611880"/>
-            <a:ext cx="5029200" cy="347472"/>
-          </a:xfrm>
-          <a:prstGeom prst="rect">
-            <a:avLst/>
-          </a:prstGeom>
-          <a:noFill/>
-        </p:spPr>
-        <p:txBody>
-          <a:bodyPr wrap="square">
-            <a:spAutoFit/>
-          </a:bodyPr>
-          <a:lstStyle/>
-          <a:p>
-            <a:pPr algn="l"/>
-            <a:r>
-              <a:rPr sz="1200" b="1" i="0">
-                <a:solidFill>
-                  <a:srgbClr val="2E7D32"/>
-                </a:solidFill>
-                <a:latin typeface="Calibri"/>
-              </a:rPr>
-              <a:t>Se negros tivessem a mesma distribuição ocupacional que brancos</a:t>
-            </a:r>
-          </a:p>
-        </p:txBody>
-      </p:sp>
-      <p:sp>
-        <p:nvSpPr>
-          <p:cNvPr id="16" name="TextBox 15"/>
-          <p:cNvSpPr txBox="1"/>
-          <p:nvPr/>
-        </p:nvSpPr>
-        <p:spPr>
-          <a:xfrm>
-            <a:off x="6812280" y="3950208"/>
-            <a:ext cx="5029200" cy="347472"/>
-          </a:xfrm>
-          <a:prstGeom prst="rect">
-            <a:avLst/>
-          </a:prstGeom>
-          <a:noFill/>
-        </p:spPr>
-        <p:txBody>
-          <a:bodyPr wrap="square">
-            <a:spAutoFit/>
-          </a:bodyPr>
-          <a:lstStyle/>
-          <a:p>
-            <a:pPr algn="l"/>
-            <a:r>
-              <a:rPr sz="1100" b="0" i="1">
-                <a:solidFill>
-                  <a:srgbClr val="616161"/>
-                </a:solidFill>
-                <a:latin typeface="Calibri"/>
-              </a:rPr>
-              <a:t>A renda média dos trabalhadores negros mais que dobraria — sem nenhum aumento de produtividade</a:t>
-            </a:r>
-          </a:p>
-        </p:txBody>
-      </p:sp>
-      <p:sp>
-        <p:nvSpPr>
-          <p:cNvPr id="17" name="Rectangle 16"/>
+          <p:cNvPr id="20" name="TextBox 19"/>
+          <p:cNvSpPr txBox="1"/>
+          <p:nvPr/>
+        </p:nvSpPr>
+        <p:spPr>
+          <a:xfrm>
+            <a:off x="411480" y="5925312"/>
+            <a:ext cx="11338560" cy="320040"/>
+          </a:xfrm>
+          <a:prstGeom prst="rect">
+            <a:avLst/>
+          </a:prstGeom>
+          <a:noFill/>
+        </p:spPr>
+        <p:txBody>
+          <a:bodyPr wrap="square">
+            <a:spAutoFit/>
+          </a:bodyPr>
+          <a:lstStyle/>
+          <a:p>
+            <a:pPr algn="ctr"/>
+            <a:r>
+              <a:rPr sz="1300" b="1" i="0">
+                <a:solidFill>
+                  <a:srgbClr val="1B2A4A"/>
+                </a:solidFill>
+                <a:latin typeface="Calibri"/>
+              </a:rPr>
+              <a:t>O concurso público equaliza a entrada, mas a promoção às posições de liderança (DAS, chefia) ainda reflete os vieses do setor privado — ou piores.</a:t>
+            </a:r>
+          </a:p>
+        </p:txBody>
+      </p:sp>
+      <p:sp>
+        <p:nvSpPr>
+          <p:cNvPr id="21" name="Rectangle 20"/>
           <p:cNvSpPr/>
           <p:nvPr/>
         </p:nvSpPr>
         <p:spPr>
           <a:xfrm>
-            <a:off x="6675120" y="4572000"/>
-            <a:ext cx="5303520" cy="1261872"/>
+            <a:off x="0" y="6629400"/>
+            <a:ext cx="12188952" cy="228600"/>
           </a:xfrm>
           <a:prstGeom prst="rect">
             <a:avLst/>
           </a:prstGeom>
           <a:solidFill>
-            <a:srgbClr val="F5F5F5"/>
+            <a:srgbClr val="1B2A4A"/>
           </a:solidFill>
-          <a:ln w="25400">
-            <a:solidFill>
-              <a:srgbClr val="00696D"/>
-            </a:solidFill>
-          </a:ln>
+          <a:ln/>
         </p:spPr>
         <p:style>
           <a:lnRef idx="1">
@@ -13983,194 +14815,7 @@
       </p:sp>
       <p:sp>
         <p:nvSpPr>
-          <p:cNvPr id="18" name="Rectangle 17"/>
-          <p:cNvSpPr/>
-          <p:nvPr/>
-        </p:nvSpPr>
-        <p:spPr>
-          <a:xfrm>
-            <a:off x="6675120" y="4572000"/>
-            <a:ext cx="5303520" cy="365760"/>
-          </a:xfrm>
-          <a:prstGeom prst="rect">
-            <a:avLst/>
-          </a:prstGeom>
-          <a:solidFill>
-            <a:srgbClr val="00696D"/>
-          </a:solidFill>
-          <a:ln/>
-        </p:spPr>
-        <p:style>
-          <a:lnRef idx="1">
-            <a:schemeClr val="accent1"/>
-          </a:lnRef>
-          <a:fillRef idx="3">
-            <a:schemeClr val="accent1"/>
-          </a:fillRef>
-          <a:effectRef idx="2">
-            <a:schemeClr val="accent1"/>
-          </a:effectRef>
-          <a:fontRef idx="minor">
-            <a:schemeClr val="lt1"/>
-          </a:fontRef>
-        </p:style>
-        <p:txBody>
-          <a:bodyPr rtlCol="0" anchor="ctr"/>
-          <a:lstStyle/>
-          <a:p>
-            <a:pPr algn="ctr"/>
-          </a:p>
-        </p:txBody>
-      </p:sp>
-      <p:sp>
-        <p:nvSpPr>
-          <p:cNvPr id="19" name="TextBox 18"/>
-          <p:cNvSpPr txBox="1"/>
-          <p:nvPr/>
-        </p:nvSpPr>
-        <p:spPr>
-          <a:xfrm>
-            <a:off x="6812280" y="4608576"/>
-            <a:ext cx="5029200" cy="347472"/>
-          </a:xfrm>
-          <a:prstGeom prst="rect">
-            <a:avLst/>
-          </a:prstGeom>
-          <a:noFill/>
-        </p:spPr>
-        <p:txBody>
-          <a:bodyPr wrap="square">
-            <a:spAutoFit/>
-          </a:bodyPr>
-          <a:lstStyle/>
-          <a:p>
-            <a:pPr algn="l"/>
-            <a:r>
-              <a:rPr sz="1400" b="1" i="0">
-                <a:solidFill>
-                  <a:srgbClr val="FFFFFF"/>
-                </a:solidFill>
-                <a:latin typeface="Calibri"/>
-              </a:rPr>
-              <a:t>Proxy: +74 p.p. PIB</a:t>
-            </a:r>
-          </a:p>
-        </p:txBody>
-      </p:sp>
-      <p:sp>
-        <p:nvSpPr>
-          <p:cNvPr id="20" name="TextBox 19"/>
-          <p:cNvSpPr txBox="1"/>
-          <p:nvPr/>
-        </p:nvSpPr>
-        <p:spPr>
-          <a:xfrm>
-            <a:off x="6812280" y="4983480"/>
-            <a:ext cx="5029200" cy="347472"/>
-          </a:xfrm>
-          <a:prstGeom prst="rect">
-            <a:avLst/>
-          </a:prstGeom>
-          <a:noFill/>
-        </p:spPr>
-        <p:txBody>
-          <a:bodyPr wrap="square">
-            <a:spAutoFit/>
-          </a:bodyPr>
-          <a:lstStyle/>
-          <a:p>
-            <a:pPr algn="l"/>
-            <a:r>
-              <a:rPr sz="1200" b="1" i="0">
-                <a:solidFill>
-                  <a:srgbClr val="00696D"/>
-                </a:solidFill>
-                <a:latin typeface="Calibri"/>
-              </a:rPr>
-              <a:t>Estimativa conservadora do impacto no crescimento</a:t>
-            </a:r>
-          </a:p>
-        </p:txBody>
-      </p:sp>
-      <p:sp>
-        <p:nvSpPr>
-          <p:cNvPr id="21" name="TextBox 20"/>
-          <p:cNvSpPr txBox="1"/>
-          <p:nvPr/>
-        </p:nvSpPr>
-        <p:spPr>
-          <a:xfrm>
-            <a:off x="6812280" y="5321808"/>
-            <a:ext cx="5029200" cy="347472"/>
-          </a:xfrm>
-          <a:prstGeom prst="rect">
-            <a:avLst/>
-          </a:prstGeom>
-          <a:noFill/>
-        </p:spPr>
-        <p:txBody>
-          <a:bodyPr wrap="square">
-            <a:spAutoFit/>
-          </a:bodyPr>
-          <a:lstStyle/>
-          <a:p>
-            <a:pPr algn="l"/>
-            <a:r>
-              <a:rPr sz="1100" b="0" i="1">
-                <a:solidFill>
-                  <a:srgbClr val="616161"/>
-                </a:solidFill>
-                <a:latin typeface="Calibri"/>
-              </a:rPr>
-              <a:t>Incluir negros nas melhores vagas seria um dos maiores motores de crescimento disponíveis hoje</a:t>
-            </a:r>
-          </a:p>
-        </p:txBody>
-      </p:sp>
-      <p:sp>
-        <p:nvSpPr>
-          <p:cNvPr id="22" name="Rectangle 21"/>
-          <p:cNvSpPr/>
-          <p:nvPr/>
-        </p:nvSpPr>
-        <p:spPr>
-          <a:xfrm>
-            <a:off x="0" y="6629400"/>
-            <a:ext cx="12188952" cy="228600"/>
-          </a:xfrm>
-          <a:prstGeom prst="rect">
-            <a:avLst/>
-          </a:prstGeom>
-          <a:solidFill>
-            <a:srgbClr val="1B2A4A"/>
-          </a:solidFill>
-          <a:ln/>
-        </p:spPr>
-        <p:style>
-          <a:lnRef idx="1">
-            <a:schemeClr val="accent1"/>
-          </a:lnRef>
-          <a:fillRef idx="3">
-            <a:schemeClr val="accent1"/>
-          </a:fillRef>
-          <a:effectRef idx="2">
-            <a:schemeClr val="accent1"/>
-          </a:effectRef>
-          <a:fontRef idx="minor">
-            <a:schemeClr val="lt1"/>
-          </a:fontRef>
-        </p:style>
-        <p:txBody>
-          <a:bodyPr rtlCol="0" anchor="ctr"/>
-          <a:lstStyle/>
-          <a:p>
-            <a:pPr algn="ctr"/>
-          </a:p>
-        </p:txBody>
-      </p:sp>
-      <p:sp>
-        <p:nvSpPr>
-          <p:cNvPr id="23" name="TextBox 22"/>
+          <p:cNvPr id="22" name="TextBox 21"/>
           <p:cNvSpPr txBox="1"/>
           <p:nvPr/>
         </p:nvSpPr>
@@ -14205,7 +14850,7 @@
       </p:sp>
       <p:sp>
         <p:nvSpPr>
-          <p:cNvPr id="24" name="TextBox 23"/>
+          <p:cNvPr id="23" name="TextBox 22"/>
           <p:cNvSpPr txBox="1"/>
           <p:nvPr/>
         </p:nvSpPr>
@@ -14233,7 +14878,7 @@
                 </a:solidFill>
                 <a:latin typeface="Calibri"/>
               </a:rPr>
-              <a:t>9/13</a:t>
+              <a:t>9/14</a:t>
             </a:r>
           </a:p>
         </p:txBody>

--- a/apresentacao_executiva.pptx
+++ b/apresentacao_executiva.pptx
@@ -14700,8 +14700,8 @@
         </p:nvSpPr>
         <p:spPr>
           <a:xfrm>
-            <a:off x="274320" y="5833872"/>
-            <a:ext cx="11612880" cy="502920"/>
+            <a:off x="274320" y="5788152"/>
+            <a:ext cx="11612880" cy="457200"/>
           </a:xfrm>
           <a:prstGeom prst="rect">
             <a:avLst/>
@@ -14745,8 +14745,8 @@
         </p:nvSpPr>
         <p:spPr>
           <a:xfrm>
-            <a:off x="411480" y="5925312"/>
-            <a:ext cx="11338560" cy="320040"/>
+            <a:off x="411480" y="5879592"/>
+            <a:ext cx="11338560" cy="274320"/>
           </a:xfrm>
           <a:prstGeom prst="rect">
             <a:avLst/>
@@ -14774,7 +14774,42 @@
       </p:sp>
       <p:sp>
         <p:nvSpPr>
-          <p:cNvPr id="21" name="Rectangle 20"/>
+          <p:cNvPr id="21" name="TextBox 20"/>
+          <p:cNvSpPr txBox="1"/>
+          <p:nvPr/>
+        </p:nvSpPr>
+        <p:spPr>
+          <a:xfrm>
+            <a:off x="320040" y="6327648"/>
+            <a:ext cx="11521440" cy="256032"/>
+          </a:xfrm>
+          <a:prstGeom prst="rect">
+            <a:avLst/>
+          </a:prstGeom>
+          <a:noFill/>
+        </p:spPr>
+        <p:txBody>
+          <a:bodyPr wrap="square">
+            <a:spAutoFit/>
+          </a:bodyPr>
+          <a:lstStyle/>
+          <a:p>
+            <a:pPr algn="l"/>
+            <a:r>
+              <a:rPr sz="950" b="0" i="1">
+                <a:solidFill>
+                  <a:srgbClr val="616161"/>
+                </a:solidFill>
+                <a:latin typeface="Calibri"/>
+              </a:rPr>
+              <a:t>Contexto IBGE 2025: a qualidade de vida melhorou (POF), mas a desigualdade de renda voltou a subir (Gini per capita 0,491) — o avanço agregado não fecha o gap racial.</a:t>
+            </a:r>
+          </a:p>
+        </p:txBody>
+      </p:sp>
+      <p:sp>
+        <p:nvSpPr>
+          <p:cNvPr id="22" name="Rectangle 21"/>
           <p:cNvSpPr/>
           <p:nvPr/>
         </p:nvSpPr>
@@ -14815,7 +14850,7 @@
       </p:sp>
       <p:sp>
         <p:nvSpPr>
-          <p:cNvPr id="22" name="TextBox 21"/>
+          <p:cNvPr id="23" name="TextBox 22"/>
           <p:cNvSpPr txBox="1"/>
           <p:nvPr/>
         </p:nvSpPr>
@@ -14850,7 +14885,7 @@
       </p:sp>
       <p:sp>
         <p:nvSpPr>
-          <p:cNvPr id="23" name="TextBox 22"/>
+          <p:cNvPr id="24" name="TextBox 23"/>
           <p:cNvSpPr txBox="1"/>
           <p:nvPr/>
         </p:nvSpPr>

--- a/apresentacao_executiva.pptx
+++ b/apresentacao_executiva.pptx
@@ -11834,7 +11834,7 @@
         <p:spPr>
           <a:xfrm>
             <a:off x="274320" y="1097280"/>
-            <a:ext cx="6583680" cy="3505648"/>
+            <a:ext cx="6583680" cy="3485478"/>
           </a:xfrm>
           <a:prstGeom prst="rect">
             <a:avLst/>
